--- a/my-tutorials/Representation Learning.pptx
+++ b/my-tutorials/Representation Learning.pptx
@@ -7,6 +7,7 @@
   <p:sldIdLst>
     <p:sldId id="256" r:id="rId2"/>
     <p:sldId id="257" r:id="rId3"/>
+    <p:sldId id="258" r:id="rId4"/>
   </p:sldIdLst>
   <p:sldSz cx="12192000" cy="6858000"/>
   <p:notesSz cx="6858000" cy="9144000"/>
@@ -105,6 +106,11 @@
       </a:defRPr>
     </a:lvl9pPr>
   </p:defaultTextStyle>
+  <p:extLst>
+    <p:ext uri="{EFAFB233-063F-42B5-8137-9DF3F51BA10A}">
+      <p15:sldGuideLst xmlns:p15="http://schemas.microsoft.com/office/powerpoint/2012/main"/>
+    </p:ext>
+  </p:extLst>
 </p:presentation>
 </file>
 
@@ -255,7 +261,7 @@
           <a:p>
             <a:fld id="{A88D0E9C-48A1-4B29-8A4A-E7187B64900D}" type="datetimeFigureOut">
               <a:rPr lang="en-US" smtClean="0"/>
-              <a:t>7/7/2024</a:t>
+              <a:t>7/9/2024</a:t>
             </a:fld>
             <a:endParaRPr lang="en-US"/>
           </a:p>
@@ -453,7 +459,7 @@
           <a:p>
             <a:fld id="{A88D0E9C-48A1-4B29-8A4A-E7187B64900D}" type="datetimeFigureOut">
               <a:rPr lang="en-US" smtClean="0"/>
-              <a:t>7/7/2024</a:t>
+              <a:t>7/9/2024</a:t>
             </a:fld>
             <a:endParaRPr lang="en-US"/>
           </a:p>
@@ -661,7 +667,7 @@
           <a:p>
             <a:fld id="{A88D0E9C-48A1-4B29-8A4A-E7187B64900D}" type="datetimeFigureOut">
               <a:rPr lang="en-US" smtClean="0"/>
-              <a:t>7/7/2024</a:t>
+              <a:t>7/9/2024</a:t>
             </a:fld>
             <a:endParaRPr lang="en-US"/>
           </a:p>
@@ -859,7 +865,7 @@
           <a:p>
             <a:fld id="{A88D0E9C-48A1-4B29-8A4A-E7187B64900D}" type="datetimeFigureOut">
               <a:rPr lang="en-US" smtClean="0"/>
-              <a:t>7/7/2024</a:t>
+              <a:t>7/9/2024</a:t>
             </a:fld>
             <a:endParaRPr lang="en-US"/>
           </a:p>
@@ -1134,7 +1140,7 @@
           <a:p>
             <a:fld id="{A88D0E9C-48A1-4B29-8A4A-E7187B64900D}" type="datetimeFigureOut">
               <a:rPr lang="en-US" smtClean="0"/>
-              <a:t>7/7/2024</a:t>
+              <a:t>7/9/2024</a:t>
             </a:fld>
             <a:endParaRPr lang="en-US"/>
           </a:p>
@@ -1399,7 +1405,7 @@
           <a:p>
             <a:fld id="{A88D0E9C-48A1-4B29-8A4A-E7187B64900D}" type="datetimeFigureOut">
               <a:rPr lang="en-US" smtClean="0"/>
-              <a:t>7/7/2024</a:t>
+              <a:t>7/9/2024</a:t>
             </a:fld>
             <a:endParaRPr lang="en-US"/>
           </a:p>
@@ -1811,7 +1817,7 @@
           <a:p>
             <a:fld id="{A88D0E9C-48A1-4B29-8A4A-E7187B64900D}" type="datetimeFigureOut">
               <a:rPr lang="en-US" smtClean="0"/>
-              <a:t>7/7/2024</a:t>
+              <a:t>7/9/2024</a:t>
             </a:fld>
             <a:endParaRPr lang="en-US"/>
           </a:p>
@@ -1952,7 +1958,7 @@
           <a:p>
             <a:fld id="{A88D0E9C-48A1-4B29-8A4A-E7187B64900D}" type="datetimeFigureOut">
               <a:rPr lang="en-US" smtClean="0"/>
-              <a:t>7/7/2024</a:t>
+              <a:t>7/9/2024</a:t>
             </a:fld>
             <a:endParaRPr lang="en-US"/>
           </a:p>
@@ -2065,7 +2071,7 @@
           <a:p>
             <a:fld id="{A88D0E9C-48A1-4B29-8A4A-E7187B64900D}" type="datetimeFigureOut">
               <a:rPr lang="en-US" smtClean="0"/>
-              <a:t>7/7/2024</a:t>
+              <a:t>7/9/2024</a:t>
             </a:fld>
             <a:endParaRPr lang="en-US"/>
           </a:p>
@@ -2376,7 +2382,7 @@
           <a:p>
             <a:fld id="{A88D0E9C-48A1-4B29-8A4A-E7187B64900D}" type="datetimeFigureOut">
               <a:rPr lang="en-US" smtClean="0"/>
-              <a:t>7/7/2024</a:t>
+              <a:t>7/9/2024</a:t>
             </a:fld>
             <a:endParaRPr lang="en-US"/>
           </a:p>
@@ -2664,7 +2670,7 @@
           <a:p>
             <a:fld id="{A88D0E9C-48A1-4B29-8A4A-E7187B64900D}" type="datetimeFigureOut">
               <a:rPr lang="en-US" smtClean="0"/>
-              <a:t>7/7/2024</a:t>
+              <a:t>7/9/2024</a:t>
             </a:fld>
             <a:endParaRPr lang="en-US"/>
           </a:p>
@@ -2905,7 +2911,7 @@
           <a:p>
             <a:fld id="{A88D0E9C-48A1-4B29-8A4A-E7187B64900D}" type="datetimeFigureOut">
               <a:rPr lang="en-US" smtClean="0"/>
-              <a:t>7/7/2024</a:t>
+              <a:t>7/9/2024</a:t>
             </a:fld>
             <a:endParaRPr lang="en-US"/>
           </a:p>
@@ -6502,6 +6508,5688 @@
 </p:sld>
 </file>
 
+<file path=ppt/slides/slide3.xml><?xml version="1.0" encoding="utf-8"?>
+<p:sld xmlns:a="http://schemas.openxmlformats.org/drawingml/2006/main" xmlns:r="http://schemas.openxmlformats.org/officeDocument/2006/relationships" xmlns:p="http://schemas.openxmlformats.org/presentationml/2006/main">
+  <p:cSld>
+    <p:spTree>
+      <p:nvGrpSpPr>
+        <p:cNvPr id="1" name=""/>
+        <p:cNvGrpSpPr/>
+        <p:nvPr/>
+      </p:nvGrpSpPr>
+      <p:grpSpPr>
+        <a:xfrm>
+          <a:off x="0" y="0"/>
+          <a:ext cx="0" cy="0"/>
+          <a:chOff x="0" y="0"/>
+          <a:chExt cx="0" cy="0"/>
+        </a:xfrm>
+      </p:grpSpPr>
+      <p:sp>
+        <p:nvSpPr>
+          <p:cNvPr id="2" name="Title 1">
+            <a:extLst>
+              <a:ext uri="{FF2B5EF4-FFF2-40B4-BE49-F238E27FC236}">
+                <a16:creationId xmlns:a16="http://schemas.microsoft.com/office/drawing/2014/main" id="{FDB646BE-236F-424D-92DA-F822662233E3}"/>
+              </a:ext>
+            </a:extLst>
+          </p:cNvPr>
+          <p:cNvSpPr>
+            <a:spLocks noGrp="1"/>
+          </p:cNvSpPr>
+          <p:nvPr>
+            <p:ph type="title"/>
+          </p:nvPr>
+        </p:nvSpPr>
+        <p:spPr/>
+        <p:txBody>
+          <a:bodyPr/>
+          <a:lstStyle/>
+          <a:p>
+            <a:r>
+              <a:rPr lang="en-US"/>
+              <a:t>LoRA</a:t>
+            </a:r>
+          </a:p>
+        </p:txBody>
+      </p:sp>
+      <p:grpSp>
+        <p:nvGrpSpPr>
+          <p:cNvPr id="134" name="Group 133">
+            <a:extLst>
+              <a:ext uri="{FF2B5EF4-FFF2-40B4-BE49-F238E27FC236}">
+                <a16:creationId xmlns:a16="http://schemas.microsoft.com/office/drawing/2014/main" id="{A6390DDE-0C60-4E12-A168-E41F355C000D}"/>
+              </a:ext>
+            </a:extLst>
+          </p:cNvPr>
+          <p:cNvGrpSpPr/>
+          <p:nvPr/>
+        </p:nvGrpSpPr>
+        <p:grpSpPr>
+          <a:xfrm>
+            <a:off x="1082809" y="1357732"/>
+            <a:ext cx="2433927" cy="4338962"/>
+            <a:chOff x="1082809" y="1357732"/>
+            <a:chExt cx="2433927" cy="4338962"/>
+          </a:xfrm>
+        </p:grpSpPr>
+        <p:grpSp>
+          <p:nvGrpSpPr>
+            <p:cNvPr id="11" name="Group 10">
+              <a:extLst>
+                <a:ext uri="{FF2B5EF4-FFF2-40B4-BE49-F238E27FC236}">
+                  <a16:creationId xmlns:a16="http://schemas.microsoft.com/office/drawing/2014/main" id="{C6D84B21-9E6F-4178-A3EA-549D4F488FA1}"/>
+                </a:ext>
+              </a:extLst>
+            </p:cNvPr>
+            <p:cNvGrpSpPr/>
+            <p:nvPr/>
+          </p:nvGrpSpPr>
+          <p:grpSpPr>
+            <a:xfrm>
+              <a:off x="1082809" y="2422835"/>
+              <a:ext cx="233608" cy="2129134"/>
+              <a:chOff x="1082809" y="2422835"/>
+              <a:chExt cx="233608" cy="2129134"/>
+            </a:xfrm>
+          </p:grpSpPr>
+          <p:sp>
+            <p:nvSpPr>
+              <p:cNvPr id="4" name="Rectangle 3">
+                <a:extLst>
+                  <a:ext uri="{FF2B5EF4-FFF2-40B4-BE49-F238E27FC236}">
+                    <a16:creationId xmlns:a16="http://schemas.microsoft.com/office/drawing/2014/main" id="{6E42F265-76EE-4038-A643-7E24BCBAFD0F}"/>
+                  </a:ext>
+                </a:extLst>
+              </p:cNvPr>
+              <p:cNvSpPr/>
+              <p:nvPr/>
+            </p:nvSpPr>
+            <p:spPr>
+              <a:xfrm>
+                <a:off x="1082809" y="2422835"/>
+                <a:ext cx="233608" cy="233608"/>
+              </a:xfrm>
+              <a:prstGeom prst="rect">
+                <a:avLst/>
+              </a:prstGeom>
+            </p:spPr>
+            <p:style>
+              <a:lnRef idx="2">
+                <a:schemeClr val="accent1">
+                  <a:shade val="50000"/>
+                </a:schemeClr>
+              </a:lnRef>
+              <a:fillRef idx="1">
+                <a:schemeClr val="accent1"/>
+              </a:fillRef>
+              <a:effectRef idx="0">
+                <a:schemeClr val="accent1"/>
+              </a:effectRef>
+              <a:fontRef idx="minor">
+                <a:schemeClr val="lt1"/>
+              </a:fontRef>
+            </p:style>
+            <p:txBody>
+              <a:bodyPr rtlCol="0" anchor="ctr"/>
+              <a:lstStyle/>
+              <a:p>
+                <a:pPr algn="ctr"/>
+                <a:endParaRPr lang="en-US"/>
+              </a:p>
+            </p:txBody>
+          </p:sp>
+          <p:sp>
+            <p:nvSpPr>
+              <p:cNvPr id="5" name="Rectangle 4">
+                <a:extLst>
+                  <a:ext uri="{FF2B5EF4-FFF2-40B4-BE49-F238E27FC236}">
+                    <a16:creationId xmlns:a16="http://schemas.microsoft.com/office/drawing/2014/main" id="{EBFDBDC4-B374-4DF9-88C9-33AC72D62EB5}"/>
+                  </a:ext>
+                </a:extLst>
+              </p:cNvPr>
+              <p:cNvSpPr/>
+              <p:nvPr/>
+            </p:nvSpPr>
+            <p:spPr>
+              <a:xfrm>
+                <a:off x="1082809" y="2740588"/>
+                <a:ext cx="233608" cy="233608"/>
+              </a:xfrm>
+              <a:prstGeom prst="rect">
+                <a:avLst/>
+              </a:prstGeom>
+            </p:spPr>
+            <p:style>
+              <a:lnRef idx="2">
+                <a:schemeClr val="accent1">
+                  <a:shade val="50000"/>
+                </a:schemeClr>
+              </a:lnRef>
+              <a:fillRef idx="1">
+                <a:schemeClr val="accent1"/>
+              </a:fillRef>
+              <a:effectRef idx="0">
+                <a:schemeClr val="accent1"/>
+              </a:effectRef>
+              <a:fontRef idx="minor">
+                <a:schemeClr val="lt1"/>
+              </a:fontRef>
+            </p:style>
+            <p:txBody>
+              <a:bodyPr rtlCol="0" anchor="ctr"/>
+              <a:lstStyle/>
+              <a:p>
+                <a:pPr algn="ctr"/>
+                <a:endParaRPr lang="en-US"/>
+              </a:p>
+            </p:txBody>
+          </p:sp>
+          <p:sp>
+            <p:nvSpPr>
+              <p:cNvPr id="6" name="Rectangle 5">
+                <a:extLst>
+                  <a:ext uri="{FF2B5EF4-FFF2-40B4-BE49-F238E27FC236}">
+                    <a16:creationId xmlns:a16="http://schemas.microsoft.com/office/drawing/2014/main" id="{750C4CB1-865D-451A-B2D5-928E30471A11}"/>
+                  </a:ext>
+                </a:extLst>
+              </p:cNvPr>
+              <p:cNvSpPr/>
+              <p:nvPr/>
+            </p:nvSpPr>
+            <p:spPr>
+              <a:xfrm>
+                <a:off x="1082809" y="3054890"/>
+                <a:ext cx="233608" cy="233608"/>
+              </a:xfrm>
+              <a:prstGeom prst="rect">
+                <a:avLst/>
+              </a:prstGeom>
+            </p:spPr>
+            <p:style>
+              <a:lnRef idx="2">
+                <a:schemeClr val="accent1">
+                  <a:shade val="50000"/>
+                </a:schemeClr>
+              </a:lnRef>
+              <a:fillRef idx="1">
+                <a:schemeClr val="accent1"/>
+              </a:fillRef>
+              <a:effectRef idx="0">
+                <a:schemeClr val="accent1"/>
+              </a:effectRef>
+              <a:fontRef idx="minor">
+                <a:schemeClr val="lt1"/>
+              </a:fontRef>
+            </p:style>
+            <p:txBody>
+              <a:bodyPr rtlCol="0" anchor="ctr"/>
+              <a:lstStyle/>
+              <a:p>
+                <a:pPr algn="ctr"/>
+                <a:endParaRPr lang="en-US"/>
+              </a:p>
+            </p:txBody>
+          </p:sp>
+          <p:sp>
+            <p:nvSpPr>
+              <p:cNvPr id="7" name="Rectangle 6">
+                <a:extLst>
+                  <a:ext uri="{FF2B5EF4-FFF2-40B4-BE49-F238E27FC236}">
+                    <a16:creationId xmlns:a16="http://schemas.microsoft.com/office/drawing/2014/main" id="{907F6BB4-2001-4B97-9700-09EE390289B9}"/>
+                  </a:ext>
+                </a:extLst>
+              </p:cNvPr>
+              <p:cNvSpPr/>
+              <p:nvPr/>
+            </p:nvSpPr>
+            <p:spPr>
+              <a:xfrm>
+                <a:off x="1082809" y="3368879"/>
+                <a:ext cx="233608" cy="233608"/>
+              </a:xfrm>
+              <a:prstGeom prst="rect">
+                <a:avLst/>
+              </a:prstGeom>
+            </p:spPr>
+            <p:style>
+              <a:lnRef idx="2">
+                <a:schemeClr val="accent1">
+                  <a:shade val="50000"/>
+                </a:schemeClr>
+              </a:lnRef>
+              <a:fillRef idx="1">
+                <a:schemeClr val="accent1"/>
+              </a:fillRef>
+              <a:effectRef idx="0">
+                <a:schemeClr val="accent1"/>
+              </a:effectRef>
+              <a:fontRef idx="minor">
+                <a:schemeClr val="lt1"/>
+              </a:fontRef>
+            </p:style>
+            <p:txBody>
+              <a:bodyPr rtlCol="0" anchor="ctr"/>
+              <a:lstStyle/>
+              <a:p>
+                <a:pPr algn="ctr"/>
+                <a:endParaRPr lang="en-US"/>
+              </a:p>
+            </p:txBody>
+          </p:sp>
+          <p:sp>
+            <p:nvSpPr>
+              <p:cNvPr id="8" name="Rectangle 7">
+                <a:extLst>
+                  <a:ext uri="{FF2B5EF4-FFF2-40B4-BE49-F238E27FC236}">
+                    <a16:creationId xmlns:a16="http://schemas.microsoft.com/office/drawing/2014/main" id="{C7EF7F43-FFA7-4F34-8827-5E0AF9F61C35}"/>
+                  </a:ext>
+                </a:extLst>
+              </p:cNvPr>
+              <p:cNvSpPr/>
+              <p:nvPr/>
+            </p:nvSpPr>
+            <p:spPr>
+              <a:xfrm>
+                <a:off x="1082809" y="3689757"/>
+                <a:ext cx="233608" cy="233608"/>
+              </a:xfrm>
+              <a:prstGeom prst="rect">
+                <a:avLst/>
+              </a:prstGeom>
+            </p:spPr>
+            <p:style>
+              <a:lnRef idx="2">
+                <a:schemeClr val="accent1">
+                  <a:shade val="50000"/>
+                </a:schemeClr>
+              </a:lnRef>
+              <a:fillRef idx="1">
+                <a:schemeClr val="accent1"/>
+              </a:fillRef>
+              <a:effectRef idx="0">
+                <a:schemeClr val="accent1"/>
+              </a:effectRef>
+              <a:fontRef idx="minor">
+                <a:schemeClr val="lt1"/>
+              </a:fontRef>
+            </p:style>
+            <p:txBody>
+              <a:bodyPr rtlCol="0" anchor="ctr"/>
+              <a:lstStyle/>
+              <a:p>
+                <a:pPr algn="ctr"/>
+                <a:endParaRPr lang="en-US"/>
+              </a:p>
+            </p:txBody>
+          </p:sp>
+          <p:sp>
+            <p:nvSpPr>
+              <p:cNvPr id="9" name="Rectangle 8">
+                <a:extLst>
+                  <a:ext uri="{FF2B5EF4-FFF2-40B4-BE49-F238E27FC236}">
+                    <a16:creationId xmlns:a16="http://schemas.microsoft.com/office/drawing/2014/main" id="{5D0A22E7-9CE6-40AA-8830-81AE35520E3B}"/>
+                  </a:ext>
+                </a:extLst>
+              </p:cNvPr>
+              <p:cNvSpPr/>
+              <p:nvPr/>
+            </p:nvSpPr>
+            <p:spPr>
+              <a:xfrm>
+                <a:off x="1082809" y="4004059"/>
+                <a:ext cx="233608" cy="233608"/>
+              </a:xfrm>
+              <a:prstGeom prst="rect">
+                <a:avLst/>
+              </a:prstGeom>
+            </p:spPr>
+            <p:style>
+              <a:lnRef idx="2">
+                <a:schemeClr val="accent1">
+                  <a:shade val="50000"/>
+                </a:schemeClr>
+              </a:lnRef>
+              <a:fillRef idx="1">
+                <a:schemeClr val="accent1"/>
+              </a:fillRef>
+              <a:effectRef idx="0">
+                <a:schemeClr val="accent1"/>
+              </a:effectRef>
+              <a:fontRef idx="minor">
+                <a:schemeClr val="lt1"/>
+              </a:fontRef>
+            </p:style>
+            <p:txBody>
+              <a:bodyPr rtlCol="0" anchor="ctr"/>
+              <a:lstStyle/>
+              <a:p>
+                <a:pPr algn="ctr"/>
+                <a:endParaRPr lang="en-US"/>
+              </a:p>
+            </p:txBody>
+          </p:sp>
+          <p:sp>
+            <p:nvSpPr>
+              <p:cNvPr id="10" name="Rectangle 9">
+                <a:extLst>
+                  <a:ext uri="{FF2B5EF4-FFF2-40B4-BE49-F238E27FC236}">
+                    <a16:creationId xmlns:a16="http://schemas.microsoft.com/office/drawing/2014/main" id="{56B086E4-1D71-4696-BB82-AFDA9400F4C1}"/>
+                  </a:ext>
+                </a:extLst>
+              </p:cNvPr>
+              <p:cNvSpPr/>
+              <p:nvPr/>
+            </p:nvSpPr>
+            <p:spPr>
+              <a:xfrm>
+                <a:off x="1082809" y="4318361"/>
+                <a:ext cx="233608" cy="233608"/>
+              </a:xfrm>
+              <a:prstGeom prst="rect">
+                <a:avLst/>
+              </a:prstGeom>
+            </p:spPr>
+            <p:style>
+              <a:lnRef idx="2">
+                <a:schemeClr val="accent1">
+                  <a:shade val="50000"/>
+                </a:schemeClr>
+              </a:lnRef>
+              <a:fillRef idx="1">
+                <a:schemeClr val="accent1"/>
+              </a:fillRef>
+              <a:effectRef idx="0">
+                <a:schemeClr val="accent1"/>
+              </a:effectRef>
+              <a:fontRef idx="minor">
+                <a:schemeClr val="lt1"/>
+              </a:fontRef>
+            </p:style>
+            <p:txBody>
+              <a:bodyPr rtlCol="0" anchor="ctr"/>
+              <a:lstStyle/>
+              <a:p>
+                <a:pPr algn="ctr"/>
+                <a:endParaRPr lang="en-US"/>
+              </a:p>
+            </p:txBody>
+          </p:sp>
+        </p:grpSp>
+        <p:grpSp>
+          <p:nvGrpSpPr>
+            <p:cNvPr id="28" name="Group 27">
+              <a:extLst>
+                <a:ext uri="{FF2B5EF4-FFF2-40B4-BE49-F238E27FC236}">
+                  <a16:creationId xmlns:a16="http://schemas.microsoft.com/office/drawing/2014/main" id="{E9ED72CC-23FC-44EE-8674-01F74ECD77E0}"/>
+                </a:ext>
+              </a:extLst>
+            </p:cNvPr>
+            <p:cNvGrpSpPr/>
+            <p:nvPr/>
+          </p:nvGrpSpPr>
+          <p:grpSpPr>
+            <a:xfrm>
+              <a:off x="3283128" y="1357732"/>
+              <a:ext cx="233608" cy="4338962"/>
+              <a:chOff x="3325266" y="1239745"/>
+              <a:chExt cx="233608" cy="4338962"/>
+            </a:xfrm>
+            <a:solidFill>
+              <a:schemeClr val="accent4"/>
+            </a:solidFill>
+          </p:grpSpPr>
+          <p:grpSp>
+            <p:nvGrpSpPr>
+              <p:cNvPr id="12" name="Group 11">
+                <a:extLst>
+                  <a:ext uri="{FF2B5EF4-FFF2-40B4-BE49-F238E27FC236}">
+                    <a16:creationId xmlns:a16="http://schemas.microsoft.com/office/drawing/2014/main" id="{F100E029-074A-4E52-BC4B-55C5968FE035}"/>
+                  </a:ext>
+                </a:extLst>
+              </p:cNvPr>
+              <p:cNvGrpSpPr/>
+              <p:nvPr/>
+            </p:nvGrpSpPr>
+            <p:grpSpPr>
+              <a:xfrm>
+                <a:off x="3325266" y="1239745"/>
+                <a:ext cx="233608" cy="2129134"/>
+                <a:chOff x="1082809" y="2422835"/>
+                <a:chExt cx="233608" cy="2129134"/>
+              </a:xfrm>
+              <a:grpFill/>
+            </p:grpSpPr>
+            <p:sp>
+              <p:nvSpPr>
+                <p:cNvPr id="13" name="Rectangle 12">
+                  <a:extLst>
+                    <a:ext uri="{FF2B5EF4-FFF2-40B4-BE49-F238E27FC236}">
+                      <a16:creationId xmlns:a16="http://schemas.microsoft.com/office/drawing/2014/main" id="{9AFB3AB2-F4E2-45C6-9260-FB8B6EAF8281}"/>
+                    </a:ext>
+                  </a:extLst>
+                </p:cNvPr>
+                <p:cNvSpPr/>
+                <p:nvPr/>
+              </p:nvSpPr>
+              <p:spPr>
+                <a:xfrm>
+                  <a:off x="1082809" y="2422835"/>
+                  <a:ext cx="233608" cy="233608"/>
+                </a:xfrm>
+                <a:prstGeom prst="rect">
+                  <a:avLst/>
+                </a:prstGeom>
+                <a:grpFill/>
+              </p:spPr>
+              <p:style>
+                <a:lnRef idx="2">
+                  <a:schemeClr val="accent1">
+                    <a:shade val="50000"/>
+                  </a:schemeClr>
+                </a:lnRef>
+                <a:fillRef idx="1">
+                  <a:schemeClr val="accent1"/>
+                </a:fillRef>
+                <a:effectRef idx="0">
+                  <a:schemeClr val="accent1"/>
+                </a:effectRef>
+                <a:fontRef idx="minor">
+                  <a:schemeClr val="lt1"/>
+                </a:fontRef>
+              </p:style>
+              <p:txBody>
+                <a:bodyPr rtlCol="0" anchor="ctr"/>
+                <a:lstStyle/>
+                <a:p>
+                  <a:pPr algn="ctr"/>
+                  <a:endParaRPr lang="en-US"/>
+                </a:p>
+              </p:txBody>
+            </p:sp>
+            <p:sp>
+              <p:nvSpPr>
+                <p:cNvPr id="14" name="Rectangle 13">
+                  <a:extLst>
+                    <a:ext uri="{FF2B5EF4-FFF2-40B4-BE49-F238E27FC236}">
+                      <a16:creationId xmlns:a16="http://schemas.microsoft.com/office/drawing/2014/main" id="{6A4DDA39-47F3-4B48-BA1E-D0F97CAAE416}"/>
+                    </a:ext>
+                  </a:extLst>
+                </p:cNvPr>
+                <p:cNvSpPr/>
+                <p:nvPr/>
+              </p:nvSpPr>
+              <p:spPr>
+                <a:xfrm>
+                  <a:off x="1082809" y="2740588"/>
+                  <a:ext cx="233608" cy="233608"/>
+                </a:xfrm>
+                <a:prstGeom prst="rect">
+                  <a:avLst/>
+                </a:prstGeom>
+                <a:grpFill/>
+              </p:spPr>
+              <p:style>
+                <a:lnRef idx="2">
+                  <a:schemeClr val="accent1">
+                    <a:shade val="50000"/>
+                  </a:schemeClr>
+                </a:lnRef>
+                <a:fillRef idx="1">
+                  <a:schemeClr val="accent1"/>
+                </a:fillRef>
+                <a:effectRef idx="0">
+                  <a:schemeClr val="accent1"/>
+                </a:effectRef>
+                <a:fontRef idx="minor">
+                  <a:schemeClr val="lt1"/>
+                </a:fontRef>
+              </p:style>
+              <p:txBody>
+                <a:bodyPr rtlCol="0" anchor="ctr"/>
+                <a:lstStyle/>
+                <a:p>
+                  <a:pPr algn="ctr"/>
+                  <a:endParaRPr lang="en-US"/>
+                </a:p>
+              </p:txBody>
+            </p:sp>
+            <p:sp>
+              <p:nvSpPr>
+                <p:cNvPr id="15" name="Rectangle 14">
+                  <a:extLst>
+                    <a:ext uri="{FF2B5EF4-FFF2-40B4-BE49-F238E27FC236}">
+                      <a16:creationId xmlns:a16="http://schemas.microsoft.com/office/drawing/2014/main" id="{506B3F2E-4844-4750-BF72-52DF2054F117}"/>
+                    </a:ext>
+                  </a:extLst>
+                </p:cNvPr>
+                <p:cNvSpPr/>
+                <p:nvPr/>
+              </p:nvSpPr>
+              <p:spPr>
+                <a:xfrm>
+                  <a:off x="1082809" y="3054890"/>
+                  <a:ext cx="233608" cy="233608"/>
+                </a:xfrm>
+                <a:prstGeom prst="rect">
+                  <a:avLst/>
+                </a:prstGeom>
+                <a:grpFill/>
+              </p:spPr>
+              <p:style>
+                <a:lnRef idx="2">
+                  <a:schemeClr val="accent1">
+                    <a:shade val="50000"/>
+                  </a:schemeClr>
+                </a:lnRef>
+                <a:fillRef idx="1">
+                  <a:schemeClr val="accent1"/>
+                </a:fillRef>
+                <a:effectRef idx="0">
+                  <a:schemeClr val="accent1"/>
+                </a:effectRef>
+                <a:fontRef idx="minor">
+                  <a:schemeClr val="lt1"/>
+                </a:fontRef>
+              </p:style>
+              <p:txBody>
+                <a:bodyPr rtlCol="0" anchor="ctr"/>
+                <a:lstStyle/>
+                <a:p>
+                  <a:pPr algn="ctr"/>
+                  <a:endParaRPr lang="en-US"/>
+                </a:p>
+              </p:txBody>
+            </p:sp>
+            <p:sp>
+              <p:nvSpPr>
+                <p:cNvPr id="16" name="Rectangle 15">
+                  <a:extLst>
+                    <a:ext uri="{FF2B5EF4-FFF2-40B4-BE49-F238E27FC236}">
+                      <a16:creationId xmlns:a16="http://schemas.microsoft.com/office/drawing/2014/main" id="{C36C740D-AC6C-444C-95CB-2B765B8C213F}"/>
+                    </a:ext>
+                  </a:extLst>
+                </p:cNvPr>
+                <p:cNvSpPr/>
+                <p:nvPr/>
+              </p:nvSpPr>
+              <p:spPr>
+                <a:xfrm>
+                  <a:off x="1082809" y="3368879"/>
+                  <a:ext cx="233608" cy="233608"/>
+                </a:xfrm>
+                <a:prstGeom prst="rect">
+                  <a:avLst/>
+                </a:prstGeom>
+                <a:grpFill/>
+              </p:spPr>
+              <p:style>
+                <a:lnRef idx="2">
+                  <a:schemeClr val="accent1">
+                    <a:shade val="50000"/>
+                  </a:schemeClr>
+                </a:lnRef>
+                <a:fillRef idx="1">
+                  <a:schemeClr val="accent1"/>
+                </a:fillRef>
+                <a:effectRef idx="0">
+                  <a:schemeClr val="accent1"/>
+                </a:effectRef>
+                <a:fontRef idx="minor">
+                  <a:schemeClr val="lt1"/>
+                </a:fontRef>
+              </p:style>
+              <p:txBody>
+                <a:bodyPr rtlCol="0" anchor="ctr"/>
+                <a:lstStyle/>
+                <a:p>
+                  <a:pPr algn="ctr"/>
+                  <a:endParaRPr lang="en-US"/>
+                </a:p>
+              </p:txBody>
+            </p:sp>
+            <p:sp>
+              <p:nvSpPr>
+                <p:cNvPr id="17" name="Rectangle 16">
+                  <a:extLst>
+                    <a:ext uri="{FF2B5EF4-FFF2-40B4-BE49-F238E27FC236}">
+                      <a16:creationId xmlns:a16="http://schemas.microsoft.com/office/drawing/2014/main" id="{F5E206BF-5E7F-4209-9F90-2E7E91915AEB}"/>
+                    </a:ext>
+                  </a:extLst>
+                </p:cNvPr>
+                <p:cNvSpPr/>
+                <p:nvPr/>
+              </p:nvSpPr>
+              <p:spPr>
+                <a:xfrm>
+                  <a:off x="1082809" y="3689757"/>
+                  <a:ext cx="233608" cy="233608"/>
+                </a:xfrm>
+                <a:prstGeom prst="rect">
+                  <a:avLst/>
+                </a:prstGeom>
+                <a:grpFill/>
+              </p:spPr>
+              <p:style>
+                <a:lnRef idx="2">
+                  <a:schemeClr val="accent1">
+                    <a:shade val="50000"/>
+                  </a:schemeClr>
+                </a:lnRef>
+                <a:fillRef idx="1">
+                  <a:schemeClr val="accent1"/>
+                </a:fillRef>
+                <a:effectRef idx="0">
+                  <a:schemeClr val="accent1"/>
+                </a:effectRef>
+                <a:fontRef idx="minor">
+                  <a:schemeClr val="lt1"/>
+                </a:fontRef>
+              </p:style>
+              <p:txBody>
+                <a:bodyPr rtlCol="0" anchor="ctr"/>
+                <a:lstStyle/>
+                <a:p>
+                  <a:pPr algn="ctr"/>
+                  <a:endParaRPr lang="en-US"/>
+                </a:p>
+              </p:txBody>
+            </p:sp>
+            <p:sp>
+              <p:nvSpPr>
+                <p:cNvPr id="18" name="Rectangle 17">
+                  <a:extLst>
+                    <a:ext uri="{FF2B5EF4-FFF2-40B4-BE49-F238E27FC236}">
+                      <a16:creationId xmlns:a16="http://schemas.microsoft.com/office/drawing/2014/main" id="{2742E41A-F00C-4E70-A7D5-4EF1015654C2}"/>
+                    </a:ext>
+                  </a:extLst>
+                </p:cNvPr>
+                <p:cNvSpPr/>
+                <p:nvPr/>
+              </p:nvSpPr>
+              <p:spPr>
+                <a:xfrm>
+                  <a:off x="1082809" y="4004059"/>
+                  <a:ext cx="233608" cy="233608"/>
+                </a:xfrm>
+                <a:prstGeom prst="rect">
+                  <a:avLst/>
+                </a:prstGeom>
+                <a:grpFill/>
+              </p:spPr>
+              <p:style>
+                <a:lnRef idx="2">
+                  <a:schemeClr val="accent1">
+                    <a:shade val="50000"/>
+                  </a:schemeClr>
+                </a:lnRef>
+                <a:fillRef idx="1">
+                  <a:schemeClr val="accent1"/>
+                </a:fillRef>
+                <a:effectRef idx="0">
+                  <a:schemeClr val="accent1"/>
+                </a:effectRef>
+                <a:fontRef idx="minor">
+                  <a:schemeClr val="lt1"/>
+                </a:fontRef>
+              </p:style>
+              <p:txBody>
+                <a:bodyPr rtlCol="0" anchor="ctr"/>
+                <a:lstStyle/>
+                <a:p>
+                  <a:pPr algn="ctr"/>
+                  <a:endParaRPr lang="en-US"/>
+                </a:p>
+              </p:txBody>
+            </p:sp>
+            <p:sp>
+              <p:nvSpPr>
+                <p:cNvPr id="19" name="Rectangle 18">
+                  <a:extLst>
+                    <a:ext uri="{FF2B5EF4-FFF2-40B4-BE49-F238E27FC236}">
+                      <a16:creationId xmlns:a16="http://schemas.microsoft.com/office/drawing/2014/main" id="{9ACC84A9-C562-45F7-8C14-8F82323D7839}"/>
+                    </a:ext>
+                  </a:extLst>
+                </p:cNvPr>
+                <p:cNvSpPr/>
+                <p:nvPr/>
+              </p:nvSpPr>
+              <p:spPr>
+                <a:xfrm>
+                  <a:off x="1082809" y="4318361"/>
+                  <a:ext cx="233608" cy="233608"/>
+                </a:xfrm>
+                <a:prstGeom prst="rect">
+                  <a:avLst/>
+                </a:prstGeom>
+                <a:grpFill/>
+              </p:spPr>
+              <p:style>
+                <a:lnRef idx="2">
+                  <a:schemeClr val="accent1">
+                    <a:shade val="50000"/>
+                  </a:schemeClr>
+                </a:lnRef>
+                <a:fillRef idx="1">
+                  <a:schemeClr val="accent1"/>
+                </a:fillRef>
+                <a:effectRef idx="0">
+                  <a:schemeClr val="accent1"/>
+                </a:effectRef>
+                <a:fontRef idx="minor">
+                  <a:schemeClr val="lt1"/>
+                </a:fontRef>
+              </p:style>
+              <p:txBody>
+                <a:bodyPr rtlCol="0" anchor="ctr"/>
+                <a:lstStyle/>
+                <a:p>
+                  <a:pPr algn="ctr"/>
+                  <a:endParaRPr lang="en-US"/>
+                </a:p>
+              </p:txBody>
+            </p:sp>
+          </p:grpSp>
+          <p:grpSp>
+            <p:nvGrpSpPr>
+              <p:cNvPr id="20" name="Group 19">
+                <a:extLst>
+                  <a:ext uri="{FF2B5EF4-FFF2-40B4-BE49-F238E27FC236}">
+                    <a16:creationId xmlns:a16="http://schemas.microsoft.com/office/drawing/2014/main" id="{086E27F2-2AD2-4790-8B41-2E8119C50981}"/>
+                  </a:ext>
+                </a:extLst>
+              </p:cNvPr>
+              <p:cNvGrpSpPr/>
+              <p:nvPr/>
+            </p:nvGrpSpPr>
+            <p:grpSpPr>
+              <a:xfrm>
+                <a:off x="3325266" y="3449573"/>
+                <a:ext cx="233608" cy="2129134"/>
+                <a:chOff x="1082809" y="2422835"/>
+                <a:chExt cx="233608" cy="2129134"/>
+              </a:xfrm>
+              <a:grpFill/>
+            </p:grpSpPr>
+            <p:sp>
+              <p:nvSpPr>
+                <p:cNvPr id="21" name="Rectangle 20">
+                  <a:extLst>
+                    <a:ext uri="{FF2B5EF4-FFF2-40B4-BE49-F238E27FC236}">
+                      <a16:creationId xmlns:a16="http://schemas.microsoft.com/office/drawing/2014/main" id="{5D67A532-DCA8-4479-A031-D0F4A2FA8F03}"/>
+                    </a:ext>
+                  </a:extLst>
+                </p:cNvPr>
+                <p:cNvSpPr/>
+                <p:nvPr/>
+              </p:nvSpPr>
+              <p:spPr>
+                <a:xfrm>
+                  <a:off x="1082809" y="2422835"/>
+                  <a:ext cx="233608" cy="233608"/>
+                </a:xfrm>
+                <a:prstGeom prst="rect">
+                  <a:avLst/>
+                </a:prstGeom>
+                <a:grpFill/>
+              </p:spPr>
+              <p:style>
+                <a:lnRef idx="2">
+                  <a:schemeClr val="accent1">
+                    <a:shade val="50000"/>
+                  </a:schemeClr>
+                </a:lnRef>
+                <a:fillRef idx="1">
+                  <a:schemeClr val="accent1"/>
+                </a:fillRef>
+                <a:effectRef idx="0">
+                  <a:schemeClr val="accent1"/>
+                </a:effectRef>
+                <a:fontRef idx="minor">
+                  <a:schemeClr val="lt1"/>
+                </a:fontRef>
+              </p:style>
+              <p:txBody>
+                <a:bodyPr rtlCol="0" anchor="ctr"/>
+                <a:lstStyle/>
+                <a:p>
+                  <a:pPr algn="ctr"/>
+                  <a:endParaRPr lang="en-US"/>
+                </a:p>
+              </p:txBody>
+            </p:sp>
+            <p:sp>
+              <p:nvSpPr>
+                <p:cNvPr id="22" name="Rectangle 21">
+                  <a:extLst>
+                    <a:ext uri="{FF2B5EF4-FFF2-40B4-BE49-F238E27FC236}">
+                      <a16:creationId xmlns:a16="http://schemas.microsoft.com/office/drawing/2014/main" id="{2FFBD316-C889-4F10-8010-52746F240793}"/>
+                    </a:ext>
+                  </a:extLst>
+                </p:cNvPr>
+                <p:cNvSpPr/>
+                <p:nvPr/>
+              </p:nvSpPr>
+              <p:spPr>
+                <a:xfrm>
+                  <a:off x="1082809" y="2740588"/>
+                  <a:ext cx="233608" cy="233608"/>
+                </a:xfrm>
+                <a:prstGeom prst="rect">
+                  <a:avLst/>
+                </a:prstGeom>
+                <a:grpFill/>
+              </p:spPr>
+              <p:style>
+                <a:lnRef idx="2">
+                  <a:schemeClr val="accent1">
+                    <a:shade val="50000"/>
+                  </a:schemeClr>
+                </a:lnRef>
+                <a:fillRef idx="1">
+                  <a:schemeClr val="accent1"/>
+                </a:fillRef>
+                <a:effectRef idx="0">
+                  <a:schemeClr val="accent1"/>
+                </a:effectRef>
+                <a:fontRef idx="minor">
+                  <a:schemeClr val="lt1"/>
+                </a:fontRef>
+              </p:style>
+              <p:txBody>
+                <a:bodyPr rtlCol="0" anchor="ctr"/>
+                <a:lstStyle/>
+                <a:p>
+                  <a:pPr algn="ctr"/>
+                  <a:endParaRPr lang="en-US"/>
+                </a:p>
+              </p:txBody>
+            </p:sp>
+            <p:sp>
+              <p:nvSpPr>
+                <p:cNvPr id="23" name="Rectangle 22">
+                  <a:extLst>
+                    <a:ext uri="{FF2B5EF4-FFF2-40B4-BE49-F238E27FC236}">
+                      <a16:creationId xmlns:a16="http://schemas.microsoft.com/office/drawing/2014/main" id="{C81ACD64-8E01-4BE0-8644-BD67E89B029D}"/>
+                    </a:ext>
+                  </a:extLst>
+                </p:cNvPr>
+                <p:cNvSpPr/>
+                <p:nvPr/>
+              </p:nvSpPr>
+              <p:spPr>
+                <a:xfrm>
+                  <a:off x="1082809" y="3054890"/>
+                  <a:ext cx="233608" cy="233608"/>
+                </a:xfrm>
+                <a:prstGeom prst="rect">
+                  <a:avLst/>
+                </a:prstGeom>
+                <a:grpFill/>
+              </p:spPr>
+              <p:style>
+                <a:lnRef idx="2">
+                  <a:schemeClr val="accent1">
+                    <a:shade val="50000"/>
+                  </a:schemeClr>
+                </a:lnRef>
+                <a:fillRef idx="1">
+                  <a:schemeClr val="accent1"/>
+                </a:fillRef>
+                <a:effectRef idx="0">
+                  <a:schemeClr val="accent1"/>
+                </a:effectRef>
+                <a:fontRef idx="minor">
+                  <a:schemeClr val="lt1"/>
+                </a:fontRef>
+              </p:style>
+              <p:txBody>
+                <a:bodyPr rtlCol="0" anchor="ctr"/>
+                <a:lstStyle/>
+                <a:p>
+                  <a:pPr algn="ctr"/>
+                  <a:endParaRPr lang="en-US"/>
+                </a:p>
+              </p:txBody>
+            </p:sp>
+            <p:sp>
+              <p:nvSpPr>
+                <p:cNvPr id="24" name="Rectangle 23">
+                  <a:extLst>
+                    <a:ext uri="{FF2B5EF4-FFF2-40B4-BE49-F238E27FC236}">
+                      <a16:creationId xmlns:a16="http://schemas.microsoft.com/office/drawing/2014/main" id="{7E5DF4AE-EAC8-4BA2-A4EE-89E21D9081EC}"/>
+                    </a:ext>
+                  </a:extLst>
+                </p:cNvPr>
+                <p:cNvSpPr/>
+                <p:nvPr/>
+              </p:nvSpPr>
+              <p:spPr>
+                <a:xfrm>
+                  <a:off x="1082809" y="3368879"/>
+                  <a:ext cx="233608" cy="233608"/>
+                </a:xfrm>
+                <a:prstGeom prst="rect">
+                  <a:avLst/>
+                </a:prstGeom>
+                <a:grpFill/>
+              </p:spPr>
+              <p:style>
+                <a:lnRef idx="2">
+                  <a:schemeClr val="accent1">
+                    <a:shade val="50000"/>
+                  </a:schemeClr>
+                </a:lnRef>
+                <a:fillRef idx="1">
+                  <a:schemeClr val="accent1"/>
+                </a:fillRef>
+                <a:effectRef idx="0">
+                  <a:schemeClr val="accent1"/>
+                </a:effectRef>
+                <a:fontRef idx="minor">
+                  <a:schemeClr val="lt1"/>
+                </a:fontRef>
+              </p:style>
+              <p:txBody>
+                <a:bodyPr rtlCol="0" anchor="ctr"/>
+                <a:lstStyle/>
+                <a:p>
+                  <a:pPr algn="ctr"/>
+                  <a:endParaRPr lang="en-US"/>
+                </a:p>
+              </p:txBody>
+            </p:sp>
+            <p:sp>
+              <p:nvSpPr>
+                <p:cNvPr id="25" name="Rectangle 24">
+                  <a:extLst>
+                    <a:ext uri="{FF2B5EF4-FFF2-40B4-BE49-F238E27FC236}">
+                      <a16:creationId xmlns:a16="http://schemas.microsoft.com/office/drawing/2014/main" id="{425422E2-5D22-470D-A593-6A1D1F8A47C3}"/>
+                    </a:ext>
+                  </a:extLst>
+                </p:cNvPr>
+                <p:cNvSpPr/>
+                <p:nvPr/>
+              </p:nvSpPr>
+              <p:spPr>
+                <a:xfrm>
+                  <a:off x="1082809" y="3689757"/>
+                  <a:ext cx="233608" cy="233608"/>
+                </a:xfrm>
+                <a:prstGeom prst="rect">
+                  <a:avLst/>
+                </a:prstGeom>
+                <a:grpFill/>
+              </p:spPr>
+              <p:style>
+                <a:lnRef idx="2">
+                  <a:schemeClr val="accent1">
+                    <a:shade val="50000"/>
+                  </a:schemeClr>
+                </a:lnRef>
+                <a:fillRef idx="1">
+                  <a:schemeClr val="accent1"/>
+                </a:fillRef>
+                <a:effectRef idx="0">
+                  <a:schemeClr val="accent1"/>
+                </a:effectRef>
+                <a:fontRef idx="minor">
+                  <a:schemeClr val="lt1"/>
+                </a:fontRef>
+              </p:style>
+              <p:txBody>
+                <a:bodyPr rtlCol="0" anchor="ctr"/>
+                <a:lstStyle/>
+                <a:p>
+                  <a:pPr algn="ctr"/>
+                  <a:endParaRPr lang="en-US"/>
+                </a:p>
+              </p:txBody>
+            </p:sp>
+            <p:sp>
+              <p:nvSpPr>
+                <p:cNvPr id="26" name="Rectangle 25">
+                  <a:extLst>
+                    <a:ext uri="{FF2B5EF4-FFF2-40B4-BE49-F238E27FC236}">
+                      <a16:creationId xmlns:a16="http://schemas.microsoft.com/office/drawing/2014/main" id="{5472563A-CC05-4F1E-8D96-7900AAAC08C5}"/>
+                    </a:ext>
+                  </a:extLst>
+                </p:cNvPr>
+                <p:cNvSpPr/>
+                <p:nvPr/>
+              </p:nvSpPr>
+              <p:spPr>
+                <a:xfrm>
+                  <a:off x="1082809" y="4004059"/>
+                  <a:ext cx="233608" cy="233608"/>
+                </a:xfrm>
+                <a:prstGeom prst="rect">
+                  <a:avLst/>
+                </a:prstGeom>
+                <a:grpFill/>
+              </p:spPr>
+              <p:style>
+                <a:lnRef idx="2">
+                  <a:schemeClr val="accent1">
+                    <a:shade val="50000"/>
+                  </a:schemeClr>
+                </a:lnRef>
+                <a:fillRef idx="1">
+                  <a:schemeClr val="accent1"/>
+                </a:fillRef>
+                <a:effectRef idx="0">
+                  <a:schemeClr val="accent1"/>
+                </a:effectRef>
+                <a:fontRef idx="minor">
+                  <a:schemeClr val="lt1"/>
+                </a:fontRef>
+              </p:style>
+              <p:txBody>
+                <a:bodyPr rtlCol="0" anchor="ctr"/>
+                <a:lstStyle/>
+                <a:p>
+                  <a:pPr algn="ctr"/>
+                  <a:endParaRPr lang="en-US"/>
+                </a:p>
+              </p:txBody>
+            </p:sp>
+            <p:sp>
+              <p:nvSpPr>
+                <p:cNvPr id="27" name="Rectangle 26">
+                  <a:extLst>
+                    <a:ext uri="{FF2B5EF4-FFF2-40B4-BE49-F238E27FC236}">
+                      <a16:creationId xmlns:a16="http://schemas.microsoft.com/office/drawing/2014/main" id="{69314DC4-8E40-49C3-A1C0-917259FF7C3C}"/>
+                    </a:ext>
+                  </a:extLst>
+                </p:cNvPr>
+                <p:cNvSpPr/>
+                <p:nvPr/>
+              </p:nvSpPr>
+              <p:spPr>
+                <a:xfrm>
+                  <a:off x="1082809" y="4318361"/>
+                  <a:ext cx="233608" cy="233608"/>
+                </a:xfrm>
+                <a:prstGeom prst="rect">
+                  <a:avLst/>
+                </a:prstGeom>
+                <a:grpFill/>
+              </p:spPr>
+              <p:style>
+                <a:lnRef idx="2">
+                  <a:schemeClr val="accent1">
+                    <a:shade val="50000"/>
+                  </a:schemeClr>
+                </a:lnRef>
+                <a:fillRef idx="1">
+                  <a:schemeClr val="accent1"/>
+                </a:fillRef>
+                <a:effectRef idx="0">
+                  <a:schemeClr val="accent1"/>
+                </a:effectRef>
+                <a:fontRef idx="minor">
+                  <a:schemeClr val="lt1"/>
+                </a:fontRef>
+              </p:style>
+              <p:txBody>
+                <a:bodyPr rtlCol="0" anchor="ctr"/>
+                <a:lstStyle/>
+                <a:p>
+                  <a:pPr algn="ctr"/>
+                  <a:endParaRPr lang="en-US"/>
+                </a:p>
+              </p:txBody>
+            </p:sp>
+          </p:grpSp>
+        </p:grpSp>
+        <p:sp>
+          <p:nvSpPr>
+            <p:cNvPr id="29" name="Isosceles Triangle 28">
+              <a:extLst>
+                <a:ext uri="{FF2B5EF4-FFF2-40B4-BE49-F238E27FC236}">
+                  <a16:creationId xmlns:a16="http://schemas.microsoft.com/office/drawing/2014/main" id="{D85C2160-E460-4D23-8D03-C16AD6355A55}"/>
+                </a:ext>
+              </a:extLst>
+            </p:cNvPr>
+            <p:cNvSpPr/>
+            <p:nvPr/>
+          </p:nvSpPr>
+          <p:spPr>
+            <a:xfrm rot="5400000">
+              <a:off x="678219" y="3152772"/>
+              <a:ext cx="2129134" cy="669260"/>
+            </a:xfrm>
+            <a:prstGeom prst="triangle">
+              <a:avLst>
+                <a:gd name="adj" fmla="val 49008"/>
+              </a:avLst>
+            </a:prstGeom>
+            <a:noFill/>
+          </p:spPr>
+          <p:style>
+            <a:lnRef idx="2">
+              <a:schemeClr val="accent1">
+                <a:shade val="50000"/>
+              </a:schemeClr>
+            </a:lnRef>
+            <a:fillRef idx="1">
+              <a:schemeClr val="accent1"/>
+            </a:fillRef>
+            <a:effectRef idx="0">
+              <a:schemeClr val="accent1"/>
+            </a:effectRef>
+            <a:fontRef idx="minor">
+              <a:schemeClr val="lt1"/>
+            </a:fontRef>
+          </p:style>
+          <p:txBody>
+            <a:bodyPr rtlCol="0" anchor="ctr"/>
+            <a:lstStyle/>
+            <a:p>
+              <a:pPr algn="ctr"/>
+              <a:endParaRPr lang="en-US"/>
+            </a:p>
+          </p:txBody>
+        </p:sp>
+        <p:sp>
+          <p:nvSpPr>
+            <p:cNvPr id="30" name="Isosceles Triangle 29">
+              <a:extLst>
+                <a:ext uri="{FF2B5EF4-FFF2-40B4-BE49-F238E27FC236}">
+                  <a16:creationId xmlns:a16="http://schemas.microsoft.com/office/drawing/2014/main" id="{9D15E270-E0AF-41D3-AA55-5FC354E3C72B}"/>
+                </a:ext>
+              </a:extLst>
+            </p:cNvPr>
+            <p:cNvSpPr/>
+            <p:nvPr/>
+          </p:nvSpPr>
+          <p:spPr>
+            <a:xfrm rot="5400000" flipV="1">
+              <a:off x="474700" y="2960453"/>
+              <a:ext cx="4338960" cy="1133521"/>
+            </a:xfrm>
+            <a:prstGeom prst="triangle">
+              <a:avLst>
+                <a:gd name="adj" fmla="val 48620"/>
+              </a:avLst>
+            </a:prstGeom>
+            <a:noFill/>
+          </p:spPr>
+          <p:style>
+            <a:lnRef idx="2">
+              <a:schemeClr val="accent1">
+                <a:shade val="50000"/>
+              </a:schemeClr>
+            </a:lnRef>
+            <a:fillRef idx="1">
+              <a:schemeClr val="accent1"/>
+            </a:fillRef>
+            <a:effectRef idx="0">
+              <a:schemeClr val="accent1"/>
+            </a:effectRef>
+            <a:fontRef idx="minor">
+              <a:schemeClr val="lt1"/>
+            </a:fontRef>
+          </p:style>
+          <p:txBody>
+            <a:bodyPr rtlCol="0" anchor="ctr"/>
+            <a:lstStyle/>
+            <a:p>
+              <a:pPr algn="ctr"/>
+              <a:endParaRPr lang="en-US"/>
+            </a:p>
+          </p:txBody>
+        </p:sp>
+      </p:grpSp>
+      <p:sp>
+        <p:nvSpPr>
+          <p:cNvPr id="31" name="TextBox 30">
+            <a:extLst>
+              <a:ext uri="{FF2B5EF4-FFF2-40B4-BE49-F238E27FC236}">
+                <a16:creationId xmlns:a16="http://schemas.microsoft.com/office/drawing/2014/main" id="{6C56BCDD-067B-4207-8E31-87874CC2F15E}"/>
+              </a:ext>
+            </a:extLst>
+          </p:cNvPr>
+          <p:cNvSpPr txBox="1"/>
+          <p:nvPr/>
+        </p:nvSpPr>
+        <p:spPr>
+          <a:xfrm>
+            <a:off x="989849" y="1856968"/>
+            <a:ext cx="1280264" cy="253916"/>
+          </a:xfrm>
+          <a:prstGeom prst="rect">
+            <a:avLst/>
+          </a:prstGeom>
+          <a:noFill/>
+        </p:spPr>
+        <p:txBody>
+          <a:bodyPr wrap="square" rtlCol="0">
+            <a:spAutoFit/>
+          </a:bodyPr>
+          <a:lstStyle/>
+          <a:p>
+            <a:r>
+              <a:rPr lang="en-US" sz="1050"/>
+              <a:t>300x500 = 150K</a:t>
+            </a:r>
+          </a:p>
+        </p:txBody>
+      </p:sp>
+      <p:sp>
+        <p:nvSpPr>
+          <p:cNvPr id="59" name="TextBox 58">
+            <a:extLst>
+              <a:ext uri="{FF2B5EF4-FFF2-40B4-BE49-F238E27FC236}">
+                <a16:creationId xmlns:a16="http://schemas.microsoft.com/office/drawing/2014/main" id="{D0949489-BB3E-4C27-98AD-BE87E99384F6}"/>
+              </a:ext>
+            </a:extLst>
+          </p:cNvPr>
+          <p:cNvSpPr txBox="1"/>
+          <p:nvPr/>
+        </p:nvSpPr>
+        <p:spPr>
+          <a:xfrm>
+            <a:off x="4298511" y="1689179"/>
+            <a:ext cx="1605611" cy="577081"/>
+          </a:xfrm>
+          <a:prstGeom prst="rect">
+            <a:avLst/>
+          </a:prstGeom>
+          <a:noFill/>
+        </p:spPr>
+        <p:txBody>
+          <a:bodyPr wrap="square" rtlCol="0">
+            <a:spAutoFit/>
+          </a:bodyPr>
+          <a:lstStyle/>
+          <a:p>
+            <a:r>
+              <a:rPr lang="en-US" sz="1050"/>
+              <a:t>300x50= 15,000</a:t>
+            </a:r>
+          </a:p>
+          <a:p>
+            <a:r>
+              <a:rPr lang="en-US" sz="1050"/>
+              <a:t>50x500 = 25,000</a:t>
+            </a:r>
+          </a:p>
+          <a:p>
+            <a:r>
+              <a:rPr lang="en-US" sz="1050"/>
+              <a:t>New params: 40K</a:t>
+            </a:r>
+          </a:p>
+        </p:txBody>
+      </p:sp>
+      <p:grpSp>
+        <p:nvGrpSpPr>
+          <p:cNvPr id="136" name="Group 135">
+            <a:extLst>
+              <a:ext uri="{FF2B5EF4-FFF2-40B4-BE49-F238E27FC236}">
+                <a16:creationId xmlns:a16="http://schemas.microsoft.com/office/drawing/2014/main" id="{2DF95EC7-47F1-4DD0-9C92-481D80DA461C}"/>
+              </a:ext>
+            </a:extLst>
+          </p:cNvPr>
+          <p:cNvGrpSpPr/>
+          <p:nvPr/>
+        </p:nvGrpSpPr>
+        <p:grpSpPr>
+          <a:xfrm>
+            <a:off x="4388944" y="1353816"/>
+            <a:ext cx="2433927" cy="4338962"/>
+            <a:chOff x="4388944" y="1353816"/>
+            <a:chExt cx="2433927" cy="4338962"/>
+          </a:xfrm>
+        </p:grpSpPr>
+        <p:grpSp>
+          <p:nvGrpSpPr>
+            <p:cNvPr id="32" name="Group 31">
+              <a:extLst>
+                <a:ext uri="{FF2B5EF4-FFF2-40B4-BE49-F238E27FC236}">
+                  <a16:creationId xmlns:a16="http://schemas.microsoft.com/office/drawing/2014/main" id="{5263D603-7378-4681-85CE-CF948E588657}"/>
+                </a:ext>
+              </a:extLst>
+            </p:cNvPr>
+            <p:cNvGrpSpPr/>
+            <p:nvPr/>
+          </p:nvGrpSpPr>
+          <p:grpSpPr>
+            <a:xfrm>
+              <a:off x="4388944" y="2418919"/>
+              <a:ext cx="233608" cy="2129134"/>
+              <a:chOff x="1082809" y="2422835"/>
+              <a:chExt cx="233608" cy="2129134"/>
+            </a:xfrm>
+          </p:grpSpPr>
+          <p:sp>
+            <p:nvSpPr>
+              <p:cNvPr id="33" name="Rectangle 32">
+                <a:extLst>
+                  <a:ext uri="{FF2B5EF4-FFF2-40B4-BE49-F238E27FC236}">
+                    <a16:creationId xmlns:a16="http://schemas.microsoft.com/office/drawing/2014/main" id="{B131D8E6-D6E2-48E5-B889-1D413AB79D28}"/>
+                  </a:ext>
+                </a:extLst>
+              </p:cNvPr>
+              <p:cNvSpPr/>
+              <p:nvPr/>
+            </p:nvSpPr>
+            <p:spPr>
+              <a:xfrm>
+                <a:off x="1082809" y="2422835"/>
+                <a:ext cx="233608" cy="233608"/>
+              </a:xfrm>
+              <a:prstGeom prst="rect">
+                <a:avLst/>
+              </a:prstGeom>
+            </p:spPr>
+            <p:style>
+              <a:lnRef idx="2">
+                <a:schemeClr val="accent1">
+                  <a:shade val="50000"/>
+                </a:schemeClr>
+              </a:lnRef>
+              <a:fillRef idx="1">
+                <a:schemeClr val="accent1"/>
+              </a:fillRef>
+              <a:effectRef idx="0">
+                <a:schemeClr val="accent1"/>
+              </a:effectRef>
+              <a:fontRef idx="minor">
+                <a:schemeClr val="lt1"/>
+              </a:fontRef>
+            </p:style>
+            <p:txBody>
+              <a:bodyPr rtlCol="0" anchor="ctr"/>
+              <a:lstStyle/>
+              <a:p>
+                <a:pPr algn="ctr"/>
+                <a:endParaRPr lang="en-US"/>
+              </a:p>
+            </p:txBody>
+          </p:sp>
+          <p:sp>
+            <p:nvSpPr>
+              <p:cNvPr id="34" name="Rectangle 33">
+                <a:extLst>
+                  <a:ext uri="{FF2B5EF4-FFF2-40B4-BE49-F238E27FC236}">
+                    <a16:creationId xmlns:a16="http://schemas.microsoft.com/office/drawing/2014/main" id="{CCD2E0C7-3852-4030-8397-AD6607CC9D4E}"/>
+                  </a:ext>
+                </a:extLst>
+              </p:cNvPr>
+              <p:cNvSpPr/>
+              <p:nvPr/>
+            </p:nvSpPr>
+            <p:spPr>
+              <a:xfrm>
+                <a:off x="1082809" y="2740588"/>
+                <a:ext cx="233608" cy="233608"/>
+              </a:xfrm>
+              <a:prstGeom prst="rect">
+                <a:avLst/>
+              </a:prstGeom>
+            </p:spPr>
+            <p:style>
+              <a:lnRef idx="2">
+                <a:schemeClr val="accent1">
+                  <a:shade val="50000"/>
+                </a:schemeClr>
+              </a:lnRef>
+              <a:fillRef idx="1">
+                <a:schemeClr val="accent1"/>
+              </a:fillRef>
+              <a:effectRef idx="0">
+                <a:schemeClr val="accent1"/>
+              </a:effectRef>
+              <a:fontRef idx="minor">
+                <a:schemeClr val="lt1"/>
+              </a:fontRef>
+            </p:style>
+            <p:txBody>
+              <a:bodyPr rtlCol="0" anchor="ctr"/>
+              <a:lstStyle/>
+              <a:p>
+                <a:pPr algn="ctr"/>
+                <a:endParaRPr lang="en-US"/>
+              </a:p>
+            </p:txBody>
+          </p:sp>
+          <p:sp>
+            <p:nvSpPr>
+              <p:cNvPr id="35" name="Rectangle 34">
+                <a:extLst>
+                  <a:ext uri="{FF2B5EF4-FFF2-40B4-BE49-F238E27FC236}">
+                    <a16:creationId xmlns:a16="http://schemas.microsoft.com/office/drawing/2014/main" id="{B274811E-CAE2-406E-86EF-AE7A2FC8CBAC}"/>
+                  </a:ext>
+                </a:extLst>
+              </p:cNvPr>
+              <p:cNvSpPr/>
+              <p:nvPr/>
+            </p:nvSpPr>
+            <p:spPr>
+              <a:xfrm>
+                <a:off x="1082809" y="3054890"/>
+                <a:ext cx="233608" cy="233608"/>
+              </a:xfrm>
+              <a:prstGeom prst="rect">
+                <a:avLst/>
+              </a:prstGeom>
+            </p:spPr>
+            <p:style>
+              <a:lnRef idx="2">
+                <a:schemeClr val="accent1">
+                  <a:shade val="50000"/>
+                </a:schemeClr>
+              </a:lnRef>
+              <a:fillRef idx="1">
+                <a:schemeClr val="accent1"/>
+              </a:fillRef>
+              <a:effectRef idx="0">
+                <a:schemeClr val="accent1"/>
+              </a:effectRef>
+              <a:fontRef idx="minor">
+                <a:schemeClr val="lt1"/>
+              </a:fontRef>
+            </p:style>
+            <p:txBody>
+              <a:bodyPr rtlCol="0" anchor="ctr"/>
+              <a:lstStyle/>
+              <a:p>
+                <a:pPr algn="ctr"/>
+                <a:endParaRPr lang="en-US"/>
+              </a:p>
+            </p:txBody>
+          </p:sp>
+          <p:sp>
+            <p:nvSpPr>
+              <p:cNvPr id="36" name="Rectangle 35">
+                <a:extLst>
+                  <a:ext uri="{FF2B5EF4-FFF2-40B4-BE49-F238E27FC236}">
+                    <a16:creationId xmlns:a16="http://schemas.microsoft.com/office/drawing/2014/main" id="{BA7AE205-CA1B-4B03-94BD-9AEDAA5FB64C}"/>
+                  </a:ext>
+                </a:extLst>
+              </p:cNvPr>
+              <p:cNvSpPr/>
+              <p:nvPr/>
+            </p:nvSpPr>
+            <p:spPr>
+              <a:xfrm>
+                <a:off x="1082809" y="3368879"/>
+                <a:ext cx="233608" cy="233608"/>
+              </a:xfrm>
+              <a:prstGeom prst="rect">
+                <a:avLst/>
+              </a:prstGeom>
+            </p:spPr>
+            <p:style>
+              <a:lnRef idx="2">
+                <a:schemeClr val="accent1">
+                  <a:shade val="50000"/>
+                </a:schemeClr>
+              </a:lnRef>
+              <a:fillRef idx="1">
+                <a:schemeClr val="accent1"/>
+              </a:fillRef>
+              <a:effectRef idx="0">
+                <a:schemeClr val="accent1"/>
+              </a:effectRef>
+              <a:fontRef idx="minor">
+                <a:schemeClr val="lt1"/>
+              </a:fontRef>
+            </p:style>
+            <p:txBody>
+              <a:bodyPr rtlCol="0" anchor="ctr"/>
+              <a:lstStyle/>
+              <a:p>
+                <a:pPr algn="ctr"/>
+                <a:endParaRPr lang="en-US"/>
+              </a:p>
+            </p:txBody>
+          </p:sp>
+          <p:sp>
+            <p:nvSpPr>
+              <p:cNvPr id="37" name="Rectangle 36">
+                <a:extLst>
+                  <a:ext uri="{FF2B5EF4-FFF2-40B4-BE49-F238E27FC236}">
+                    <a16:creationId xmlns:a16="http://schemas.microsoft.com/office/drawing/2014/main" id="{9CB5B752-4807-4D1F-80B8-E2FAE8195E65}"/>
+                  </a:ext>
+                </a:extLst>
+              </p:cNvPr>
+              <p:cNvSpPr/>
+              <p:nvPr/>
+            </p:nvSpPr>
+            <p:spPr>
+              <a:xfrm>
+                <a:off x="1082809" y="3689757"/>
+                <a:ext cx="233608" cy="233608"/>
+              </a:xfrm>
+              <a:prstGeom prst="rect">
+                <a:avLst/>
+              </a:prstGeom>
+            </p:spPr>
+            <p:style>
+              <a:lnRef idx="2">
+                <a:schemeClr val="accent1">
+                  <a:shade val="50000"/>
+                </a:schemeClr>
+              </a:lnRef>
+              <a:fillRef idx="1">
+                <a:schemeClr val="accent1"/>
+              </a:fillRef>
+              <a:effectRef idx="0">
+                <a:schemeClr val="accent1"/>
+              </a:effectRef>
+              <a:fontRef idx="minor">
+                <a:schemeClr val="lt1"/>
+              </a:fontRef>
+            </p:style>
+            <p:txBody>
+              <a:bodyPr rtlCol="0" anchor="ctr"/>
+              <a:lstStyle/>
+              <a:p>
+                <a:pPr algn="ctr"/>
+                <a:endParaRPr lang="en-US"/>
+              </a:p>
+            </p:txBody>
+          </p:sp>
+          <p:sp>
+            <p:nvSpPr>
+              <p:cNvPr id="38" name="Rectangle 37">
+                <a:extLst>
+                  <a:ext uri="{FF2B5EF4-FFF2-40B4-BE49-F238E27FC236}">
+                    <a16:creationId xmlns:a16="http://schemas.microsoft.com/office/drawing/2014/main" id="{B2CA8552-1C83-4963-8EEB-A3A93F041A0C}"/>
+                  </a:ext>
+                </a:extLst>
+              </p:cNvPr>
+              <p:cNvSpPr/>
+              <p:nvPr/>
+            </p:nvSpPr>
+            <p:spPr>
+              <a:xfrm>
+                <a:off x="1082809" y="4004059"/>
+                <a:ext cx="233608" cy="233608"/>
+              </a:xfrm>
+              <a:prstGeom prst="rect">
+                <a:avLst/>
+              </a:prstGeom>
+            </p:spPr>
+            <p:style>
+              <a:lnRef idx="2">
+                <a:schemeClr val="accent1">
+                  <a:shade val="50000"/>
+                </a:schemeClr>
+              </a:lnRef>
+              <a:fillRef idx="1">
+                <a:schemeClr val="accent1"/>
+              </a:fillRef>
+              <a:effectRef idx="0">
+                <a:schemeClr val="accent1"/>
+              </a:effectRef>
+              <a:fontRef idx="minor">
+                <a:schemeClr val="lt1"/>
+              </a:fontRef>
+            </p:style>
+            <p:txBody>
+              <a:bodyPr rtlCol="0" anchor="ctr"/>
+              <a:lstStyle/>
+              <a:p>
+                <a:pPr algn="ctr"/>
+                <a:endParaRPr lang="en-US"/>
+              </a:p>
+            </p:txBody>
+          </p:sp>
+          <p:sp>
+            <p:nvSpPr>
+              <p:cNvPr id="39" name="Rectangle 38">
+                <a:extLst>
+                  <a:ext uri="{FF2B5EF4-FFF2-40B4-BE49-F238E27FC236}">
+                    <a16:creationId xmlns:a16="http://schemas.microsoft.com/office/drawing/2014/main" id="{FC7453BE-8E21-415C-9523-C2B6878FE29E}"/>
+                  </a:ext>
+                </a:extLst>
+              </p:cNvPr>
+              <p:cNvSpPr/>
+              <p:nvPr/>
+            </p:nvSpPr>
+            <p:spPr>
+              <a:xfrm>
+                <a:off x="1082809" y="4318361"/>
+                <a:ext cx="233608" cy="233608"/>
+              </a:xfrm>
+              <a:prstGeom prst="rect">
+                <a:avLst/>
+              </a:prstGeom>
+            </p:spPr>
+            <p:style>
+              <a:lnRef idx="2">
+                <a:schemeClr val="accent1">
+                  <a:shade val="50000"/>
+                </a:schemeClr>
+              </a:lnRef>
+              <a:fillRef idx="1">
+                <a:schemeClr val="accent1"/>
+              </a:fillRef>
+              <a:effectRef idx="0">
+                <a:schemeClr val="accent1"/>
+              </a:effectRef>
+              <a:fontRef idx="minor">
+                <a:schemeClr val="lt1"/>
+              </a:fontRef>
+            </p:style>
+            <p:txBody>
+              <a:bodyPr rtlCol="0" anchor="ctr"/>
+              <a:lstStyle/>
+              <a:p>
+                <a:pPr algn="ctr"/>
+                <a:endParaRPr lang="en-US"/>
+              </a:p>
+            </p:txBody>
+          </p:sp>
+        </p:grpSp>
+        <p:grpSp>
+          <p:nvGrpSpPr>
+            <p:cNvPr id="40" name="Group 39">
+              <a:extLst>
+                <a:ext uri="{FF2B5EF4-FFF2-40B4-BE49-F238E27FC236}">
+                  <a16:creationId xmlns:a16="http://schemas.microsoft.com/office/drawing/2014/main" id="{23FEDBAD-1BCF-4349-A53A-A9DB33C3405D}"/>
+                </a:ext>
+              </a:extLst>
+            </p:cNvPr>
+            <p:cNvGrpSpPr/>
+            <p:nvPr/>
+          </p:nvGrpSpPr>
+          <p:grpSpPr>
+            <a:xfrm>
+              <a:off x="6589263" y="1353816"/>
+              <a:ext cx="233608" cy="4338962"/>
+              <a:chOff x="3325266" y="1239745"/>
+              <a:chExt cx="233608" cy="4338962"/>
+            </a:xfrm>
+            <a:solidFill>
+              <a:schemeClr val="accent4">
+                <a:lumMod val="40000"/>
+                <a:lumOff val="60000"/>
+              </a:schemeClr>
+            </a:solidFill>
+          </p:grpSpPr>
+          <p:grpSp>
+            <p:nvGrpSpPr>
+              <p:cNvPr id="41" name="Group 40">
+                <a:extLst>
+                  <a:ext uri="{FF2B5EF4-FFF2-40B4-BE49-F238E27FC236}">
+                    <a16:creationId xmlns:a16="http://schemas.microsoft.com/office/drawing/2014/main" id="{7845371E-1F95-4D84-9507-A1880B414135}"/>
+                  </a:ext>
+                </a:extLst>
+              </p:cNvPr>
+              <p:cNvGrpSpPr/>
+              <p:nvPr/>
+            </p:nvGrpSpPr>
+            <p:grpSpPr>
+              <a:xfrm>
+                <a:off x="3325266" y="1239745"/>
+                <a:ext cx="233608" cy="2129134"/>
+                <a:chOff x="1082809" y="2422835"/>
+                <a:chExt cx="233608" cy="2129134"/>
+              </a:xfrm>
+              <a:grpFill/>
+            </p:grpSpPr>
+            <p:sp>
+              <p:nvSpPr>
+                <p:cNvPr id="50" name="Rectangle 49">
+                  <a:extLst>
+                    <a:ext uri="{FF2B5EF4-FFF2-40B4-BE49-F238E27FC236}">
+                      <a16:creationId xmlns:a16="http://schemas.microsoft.com/office/drawing/2014/main" id="{9C21D359-FBF0-49BD-B771-4135E1636BC6}"/>
+                    </a:ext>
+                  </a:extLst>
+                </p:cNvPr>
+                <p:cNvSpPr/>
+                <p:nvPr/>
+              </p:nvSpPr>
+              <p:spPr>
+                <a:xfrm>
+                  <a:off x="1082809" y="2422835"/>
+                  <a:ext cx="233608" cy="233608"/>
+                </a:xfrm>
+                <a:prstGeom prst="rect">
+                  <a:avLst/>
+                </a:prstGeom>
+                <a:grpFill/>
+              </p:spPr>
+              <p:style>
+                <a:lnRef idx="2">
+                  <a:schemeClr val="accent1">
+                    <a:shade val="50000"/>
+                  </a:schemeClr>
+                </a:lnRef>
+                <a:fillRef idx="1">
+                  <a:schemeClr val="accent1"/>
+                </a:fillRef>
+                <a:effectRef idx="0">
+                  <a:schemeClr val="accent1"/>
+                </a:effectRef>
+                <a:fontRef idx="minor">
+                  <a:schemeClr val="lt1"/>
+                </a:fontRef>
+              </p:style>
+              <p:txBody>
+                <a:bodyPr rtlCol="0" anchor="ctr"/>
+                <a:lstStyle/>
+                <a:p>
+                  <a:pPr algn="ctr"/>
+                  <a:endParaRPr lang="en-US"/>
+                </a:p>
+              </p:txBody>
+            </p:sp>
+            <p:sp>
+              <p:nvSpPr>
+                <p:cNvPr id="51" name="Rectangle 50">
+                  <a:extLst>
+                    <a:ext uri="{FF2B5EF4-FFF2-40B4-BE49-F238E27FC236}">
+                      <a16:creationId xmlns:a16="http://schemas.microsoft.com/office/drawing/2014/main" id="{F4541AC4-90C0-4C03-9129-C866DA07C279}"/>
+                    </a:ext>
+                  </a:extLst>
+                </p:cNvPr>
+                <p:cNvSpPr/>
+                <p:nvPr/>
+              </p:nvSpPr>
+              <p:spPr>
+                <a:xfrm>
+                  <a:off x="1082809" y="2740588"/>
+                  <a:ext cx="233608" cy="233608"/>
+                </a:xfrm>
+                <a:prstGeom prst="rect">
+                  <a:avLst/>
+                </a:prstGeom>
+                <a:grpFill/>
+              </p:spPr>
+              <p:style>
+                <a:lnRef idx="2">
+                  <a:schemeClr val="accent1">
+                    <a:shade val="50000"/>
+                  </a:schemeClr>
+                </a:lnRef>
+                <a:fillRef idx="1">
+                  <a:schemeClr val="accent1"/>
+                </a:fillRef>
+                <a:effectRef idx="0">
+                  <a:schemeClr val="accent1"/>
+                </a:effectRef>
+                <a:fontRef idx="minor">
+                  <a:schemeClr val="lt1"/>
+                </a:fontRef>
+              </p:style>
+              <p:txBody>
+                <a:bodyPr rtlCol="0" anchor="ctr"/>
+                <a:lstStyle/>
+                <a:p>
+                  <a:pPr algn="ctr"/>
+                  <a:endParaRPr lang="en-US"/>
+                </a:p>
+              </p:txBody>
+            </p:sp>
+            <p:sp>
+              <p:nvSpPr>
+                <p:cNvPr id="52" name="Rectangle 51">
+                  <a:extLst>
+                    <a:ext uri="{FF2B5EF4-FFF2-40B4-BE49-F238E27FC236}">
+                      <a16:creationId xmlns:a16="http://schemas.microsoft.com/office/drawing/2014/main" id="{BBCD6A74-A06E-4E8A-AB2C-6B21C4FC24E3}"/>
+                    </a:ext>
+                  </a:extLst>
+                </p:cNvPr>
+                <p:cNvSpPr/>
+                <p:nvPr/>
+              </p:nvSpPr>
+              <p:spPr>
+                <a:xfrm>
+                  <a:off x="1082809" y="3054890"/>
+                  <a:ext cx="233608" cy="233608"/>
+                </a:xfrm>
+                <a:prstGeom prst="rect">
+                  <a:avLst/>
+                </a:prstGeom>
+                <a:grpFill/>
+              </p:spPr>
+              <p:style>
+                <a:lnRef idx="2">
+                  <a:schemeClr val="accent1">
+                    <a:shade val="50000"/>
+                  </a:schemeClr>
+                </a:lnRef>
+                <a:fillRef idx="1">
+                  <a:schemeClr val="accent1"/>
+                </a:fillRef>
+                <a:effectRef idx="0">
+                  <a:schemeClr val="accent1"/>
+                </a:effectRef>
+                <a:fontRef idx="minor">
+                  <a:schemeClr val="lt1"/>
+                </a:fontRef>
+              </p:style>
+              <p:txBody>
+                <a:bodyPr rtlCol="0" anchor="ctr"/>
+                <a:lstStyle/>
+                <a:p>
+                  <a:pPr algn="ctr"/>
+                  <a:endParaRPr lang="en-US"/>
+                </a:p>
+              </p:txBody>
+            </p:sp>
+            <p:sp>
+              <p:nvSpPr>
+                <p:cNvPr id="53" name="Rectangle 52">
+                  <a:extLst>
+                    <a:ext uri="{FF2B5EF4-FFF2-40B4-BE49-F238E27FC236}">
+                      <a16:creationId xmlns:a16="http://schemas.microsoft.com/office/drawing/2014/main" id="{1B76543E-7112-47DC-BD3C-6F2C915BA04A}"/>
+                    </a:ext>
+                  </a:extLst>
+                </p:cNvPr>
+                <p:cNvSpPr/>
+                <p:nvPr/>
+              </p:nvSpPr>
+              <p:spPr>
+                <a:xfrm>
+                  <a:off x="1082809" y="3368879"/>
+                  <a:ext cx="233608" cy="233608"/>
+                </a:xfrm>
+                <a:prstGeom prst="rect">
+                  <a:avLst/>
+                </a:prstGeom>
+                <a:grpFill/>
+              </p:spPr>
+              <p:style>
+                <a:lnRef idx="2">
+                  <a:schemeClr val="accent1">
+                    <a:shade val="50000"/>
+                  </a:schemeClr>
+                </a:lnRef>
+                <a:fillRef idx="1">
+                  <a:schemeClr val="accent1"/>
+                </a:fillRef>
+                <a:effectRef idx="0">
+                  <a:schemeClr val="accent1"/>
+                </a:effectRef>
+                <a:fontRef idx="minor">
+                  <a:schemeClr val="lt1"/>
+                </a:fontRef>
+              </p:style>
+              <p:txBody>
+                <a:bodyPr rtlCol="0" anchor="ctr"/>
+                <a:lstStyle/>
+                <a:p>
+                  <a:pPr algn="ctr"/>
+                  <a:endParaRPr lang="en-US"/>
+                </a:p>
+              </p:txBody>
+            </p:sp>
+            <p:sp>
+              <p:nvSpPr>
+                <p:cNvPr id="54" name="Rectangle 53">
+                  <a:extLst>
+                    <a:ext uri="{FF2B5EF4-FFF2-40B4-BE49-F238E27FC236}">
+                      <a16:creationId xmlns:a16="http://schemas.microsoft.com/office/drawing/2014/main" id="{DDC0A22A-B122-40CA-B638-91362937B687}"/>
+                    </a:ext>
+                  </a:extLst>
+                </p:cNvPr>
+                <p:cNvSpPr/>
+                <p:nvPr/>
+              </p:nvSpPr>
+              <p:spPr>
+                <a:xfrm>
+                  <a:off x="1082809" y="3689757"/>
+                  <a:ext cx="233608" cy="233608"/>
+                </a:xfrm>
+                <a:prstGeom prst="rect">
+                  <a:avLst/>
+                </a:prstGeom>
+                <a:grpFill/>
+              </p:spPr>
+              <p:style>
+                <a:lnRef idx="2">
+                  <a:schemeClr val="accent1">
+                    <a:shade val="50000"/>
+                  </a:schemeClr>
+                </a:lnRef>
+                <a:fillRef idx="1">
+                  <a:schemeClr val="accent1"/>
+                </a:fillRef>
+                <a:effectRef idx="0">
+                  <a:schemeClr val="accent1"/>
+                </a:effectRef>
+                <a:fontRef idx="minor">
+                  <a:schemeClr val="lt1"/>
+                </a:fontRef>
+              </p:style>
+              <p:txBody>
+                <a:bodyPr rtlCol="0" anchor="ctr"/>
+                <a:lstStyle/>
+                <a:p>
+                  <a:pPr algn="ctr"/>
+                  <a:endParaRPr lang="en-US"/>
+                </a:p>
+              </p:txBody>
+            </p:sp>
+            <p:sp>
+              <p:nvSpPr>
+                <p:cNvPr id="55" name="Rectangle 54">
+                  <a:extLst>
+                    <a:ext uri="{FF2B5EF4-FFF2-40B4-BE49-F238E27FC236}">
+                      <a16:creationId xmlns:a16="http://schemas.microsoft.com/office/drawing/2014/main" id="{A5580C67-4285-4129-8F19-353C14ABF8B9}"/>
+                    </a:ext>
+                  </a:extLst>
+                </p:cNvPr>
+                <p:cNvSpPr/>
+                <p:nvPr/>
+              </p:nvSpPr>
+              <p:spPr>
+                <a:xfrm>
+                  <a:off x="1082809" y="4004059"/>
+                  <a:ext cx="233608" cy="233608"/>
+                </a:xfrm>
+                <a:prstGeom prst="rect">
+                  <a:avLst/>
+                </a:prstGeom>
+                <a:grpFill/>
+              </p:spPr>
+              <p:style>
+                <a:lnRef idx="2">
+                  <a:schemeClr val="accent1">
+                    <a:shade val="50000"/>
+                  </a:schemeClr>
+                </a:lnRef>
+                <a:fillRef idx="1">
+                  <a:schemeClr val="accent1"/>
+                </a:fillRef>
+                <a:effectRef idx="0">
+                  <a:schemeClr val="accent1"/>
+                </a:effectRef>
+                <a:fontRef idx="minor">
+                  <a:schemeClr val="lt1"/>
+                </a:fontRef>
+              </p:style>
+              <p:txBody>
+                <a:bodyPr rtlCol="0" anchor="ctr"/>
+                <a:lstStyle/>
+                <a:p>
+                  <a:pPr algn="ctr"/>
+                  <a:endParaRPr lang="en-US"/>
+                </a:p>
+              </p:txBody>
+            </p:sp>
+            <p:sp>
+              <p:nvSpPr>
+                <p:cNvPr id="56" name="Rectangle 55">
+                  <a:extLst>
+                    <a:ext uri="{FF2B5EF4-FFF2-40B4-BE49-F238E27FC236}">
+                      <a16:creationId xmlns:a16="http://schemas.microsoft.com/office/drawing/2014/main" id="{783C0917-BD59-4C2C-8498-AF5150FC83A6}"/>
+                    </a:ext>
+                  </a:extLst>
+                </p:cNvPr>
+                <p:cNvSpPr/>
+                <p:nvPr/>
+              </p:nvSpPr>
+              <p:spPr>
+                <a:xfrm>
+                  <a:off x="1082809" y="4318361"/>
+                  <a:ext cx="233608" cy="233608"/>
+                </a:xfrm>
+                <a:prstGeom prst="rect">
+                  <a:avLst/>
+                </a:prstGeom>
+                <a:grpFill/>
+              </p:spPr>
+              <p:style>
+                <a:lnRef idx="2">
+                  <a:schemeClr val="accent1">
+                    <a:shade val="50000"/>
+                  </a:schemeClr>
+                </a:lnRef>
+                <a:fillRef idx="1">
+                  <a:schemeClr val="accent1"/>
+                </a:fillRef>
+                <a:effectRef idx="0">
+                  <a:schemeClr val="accent1"/>
+                </a:effectRef>
+                <a:fontRef idx="minor">
+                  <a:schemeClr val="lt1"/>
+                </a:fontRef>
+              </p:style>
+              <p:txBody>
+                <a:bodyPr rtlCol="0" anchor="ctr"/>
+                <a:lstStyle/>
+                <a:p>
+                  <a:pPr algn="ctr"/>
+                  <a:endParaRPr lang="en-US"/>
+                </a:p>
+              </p:txBody>
+            </p:sp>
+          </p:grpSp>
+          <p:grpSp>
+            <p:nvGrpSpPr>
+              <p:cNvPr id="42" name="Group 41">
+                <a:extLst>
+                  <a:ext uri="{FF2B5EF4-FFF2-40B4-BE49-F238E27FC236}">
+                    <a16:creationId xmlns:a16="http://schemas.microsoft.com/office/drawing/2014/main" id="{F963BF6C-70A0-4228-AD45-C5A073919B15}"/>
+                  </a:ext>
+                </a:extLst>
+              </p:cNvPr>
+              <p:cNvGrpSpPr/>
+              <p:nvPr/>
+            </p:nvGrpSpPr>
+            <p:grpSpPr>
+              <a:xfrm>
+                <a:off x="3325266" y="3449573"/>
+                <a:ext cx="233608" cy="2129134"/>
+                <a:chOff x="1082809" y="2422835"/>
+                <a:chExt cx="233608" cy="2129134"/>
+              </a:xfrm>
+              <a:grpFill/>
+            </p:grpSpPr>
+            <p:sp>
+              <p:nvSpPr>
+                <p:cNvPr id="43" name="Rectangle 42">
+                  <a:extLst>
+                    <a:ext uri="{FF2B5EF4-FFF2-40B4-BE49-F238E27FC236}">
+                      <a16:creationId xmlns:a16="http://schemas.microsoft.com/office/drawing/2014/main" id="{20193805-5564-4F19-BB8E-62BEA5A0B796}"/>
+                    </a:ext>
+                  </a:extLst>
+                </p:cNvPr>
+                <p:cNvSpPr/>
+                <p:nvPr/>
+              </p:nvSpPr>
+              <p:spPr>
+                <a:xfrm>
+                  <a:off x="1082809" y="2422835"/>
+                  <a:ext cx="233608" cy="233608"/>
+                </a:xfrm>
+                <a:prstGeom prst="rect">
+                  <a:avLst/>
+                </a:prstGeom>
+                <a:grpFill/>
+              </p:spPr>
+              <p:style>
+                <a:lnRef idx="2">
+                  <a:schemeClr val="accent1">
+                    <a:shade val="50000"/>
+                  </a:schemeClr>
+                </a:lnRef>
+                <a:fillRef idx="1">
+                  <a:schemeClr val="accent1"/>
+                </a:fillRef>
+                <a:effectRef idx="0">
+                  <a:schemeClr val="accent1"/>
+                </a:effectRef>
+                <a:fontRef idx="minor">
+                  <a:schemeClr val="lt1"/>
+                </a:fontRef>
+              </p:style>
+              <p:txBody>
+                <a:bodyPr rtlCol="0" anchor="ctr"/>
+                <a:lstStyle/>
+                <a:p>
+                  <a:pPr algn="ctr"/>
+                  <a:endParaRPr lang="en-US"/>
+                </a:p>
+              </p:txBody>
+            </p:sp>
+            <p:sp>
+              <p:nvSpPr>
+                <p:cNvPr id="44" name="Rectangle 43">
+                  <a:extLst>
+                    <a:ext uri="{FF2B5EF4-FFF2-40B4-BE49-F238E27FC236}">
+                      <a16:creationId xmlns:a16="http://schemas.microsoft.com/office/drawing/2014/main" id="{3C8F9562-3EB0-40FA-B7C0-70E24CCBFE05}"/>
+                    </a:ext>
+                  </a:extLst>
+                </p:cNvPr>
+                <p:cNvSpPr/>
+                <p:nvPr/>
+              </p:nvSpPr>
+              <p:spPr>
+                <a:xfrm>
+                  <a:off x="1082809" y="2740588"/>
+                  <a:ext cx="233608" cy="233608"/>
+                </a:xfrm>
+                <a:prstGeom prst="rect">
+                  <a:avLst/>
+                </a:prstGeom>
+                <a:grpFill/>
+              </p:spPr>
+              <p:style>
+                <a:lnRef idx="2">
+                  <a:schemeClr val="accent1">
+                    <a:shade val="50000"/>
+                  </a:schemeClr>
+                </a:lnRef>
+                <a:fillRef idx="1">
+                  <a:schemeClr val="accent1"/>
+                </a:fillRef>
+                <a:effectRef idx="0">
+                  <a:schemeClr val="accent1"/>
+                </a:effectRef>
+                <a:fontRef idx="minor">
+                  <a:schemeClr val="lt1"/>
+                </a:fontRef>
+              </p:style>
+              <p:txBody>
+                <a:bodyPr rtlCol="0" anchor="ctr"/>
+                <a:lstStyle/>
+                <a:p>
+                  <a:pPr algn="ctr"/>
+                  <a:endParaRPr lang="en-US"/>
+                </a:p>
+              </p:txBody>
+            </p:sp>
+            <p:sp>
+              <p:nvSpPr>
+                <p:cNvPr id="45" name="Rectangle 44">
+                  <a:extLst>
+                    <a:ext uri="{FF2B5EF4-FFF2-40B4-BE49-F238E27FC236}">
+                      <a16:creationId xmlns:a16="http://schemas.microsoft.com/office/drawing/2014/main" id="{DBDC848F-39C6-430A-8A7E-1F1A83372916}"/>
+                    </a:ext>
+                  </a:extLst>
+                </p:cNvPr>
+                <p:cNvSpPr/>
+                <p:nvPr/>
+              </p:nvSpPr>
+              <p:spPr>
+                <a:xfrm>
+                  <a:off x="1082809" y="3054890"/>
+                  <a:ext cx="233608" cy="233608"/>
+                </a:xfrm>
+                <a:prstGeom prst="rect">
+                  <a:avLst/>
+                </a:prstGeom>
+                <a:grpFill/>
+              </p:spPr>
+              <p:style>
+                <a:lnRef idx="2">
+                  <a:schemeClr val="accent1">
+                    <a:shade val="50000"/>
+                  </a:schemeClr>
+                </a:lnRef>
+                <a:fillRef idx="1">
+                  <a:schemeClr val="accent1"/>
+                </a:fillRef>
+                <a:effectRef idx="0">
+                  <a:schemeClr val="accent1"/>
+                </a:effectRef>
+                <a:fontRef idx="minor">
+                  <a:schemeClr val="lt1"/>
+                </a:fontRef>
+              </p:style>
+              <p:txBody>
+                <a:bodyPr rtlCol="0" anchor="ctr"/>
+                <a:lstStyle/>
+                <a:p>
+                  <a:pPr algn="ctr"/>
+                  <a:endParaRPr lang="en-US"/>
+                </a:p>
+              </p:txBody>
+            </p:sp>
+            <p:sp>
+              <p:nvSpPr>
+                <p:cNvPr id="46" name="Rectangle 45">
+                  <a:extLst>
+                    <a:ext uri="{FF2B5EF4-FFF2-40B4-BE49-F238E27FC236}">
+                      <a16:creationId xmlns:a16="http://schemas.microsoft.com/office/drawing/2014/main" id="{84BC6071-4818-4386-8F71-00836086AC72}"/>
+                    </a:ext>
+                  </a:extLst>
+                </p:cNvPr>
+                <p:cNvSpPr/>
+                <p:nvPr/>
+              </p:nvSpPr>
+              <p:spPr>
+                <a:xfrm>
+                  <a:off x="1082809" y="3368879"/>
+                  <a:ext cx="233608" cy="233608"/>
+                </a:xfrm>
+                <a:prstGeom prst="rect">
+                  <a:avLst/>
+                </a:prstGeom>
+                <a:grpFill/>
+              </p:spPr>
+              <p:style>
+                <a:lnRef idx="2">
+                  <a:schemeClr val="accent1">
+                    <a:shade val="50000"/>
+                  </a:schemeClr>
+                </a:lnRef>
+                <a:fillRef idx="1">
+                  <a:schemeClr val="accent1"/>
+                </a:fillRef>
+                <a:effectRef idx="0">
+                  <a:schemeClr val="accent1"/>
+                </a:effectRef>
+                <a:fontRef idx="minor">
+                  <a:schemeClr val="lt1"/>
+                </a:fontRef>
+              </p:style>
+              <p:txBody>
+                <a:bodyPr rtlCol="0" anchor="ctr"/>
+                <a:lstStyle/>
+                <a:p>
+                  <a:pPr algn="ctr"/>
+                  <a:endParaRPr lang="en-US"/>
+                </a:p>
+              </p:txBody>
+            </p:sp>
+            <p:sp>
+              <p:nvSpPr>
+                <p:cNvPr id="47" name="Rectangle 46">
+                  <a:extLst>
+                    <a:ext uri="{FF2B5EF4-FFF2-40B4-BE49-F238E27FC236}">
+                      <a16:creationId xmlns:a16="http://schemas.microsoft.com/office/drawing/2014/main" id="{FD3BDAFE-1074-483F-AB52-9F5FF74F0CC7}"/>
+                    </a:ext>
+                  </a:extLst>
+                </p:cNvPr>
+                <p:cNvSpPr/>
+                <p:nvPr/>
+              </p:nvSpPr>
+              <p:spPr>
+                <a:xfrm>
+                  <a:off x="1082809" y="3689757"/>
+                  <a:ext cx="233608" cy="233608"/>
+                </a:xfrm>
+                <a:prstGeom prst="rect">
+                  <a:avLst/>
+                </a:prstGeom>
+                <a:grpFill/>
+              </p:spPr>
+              <p:style>
+                <a:lnRef idx="2">
+                  <a:schemeClr val="accent1">
+                    <a:shade val="50000"/>
+                  </a:schemeClr>
+                </a:lnRef>
+                <a:fillRef idx="1">
+                  <a:schemeClr val="accent1"/>
+                </a:fillRef>
+                <a:effectRef idx="0">
+                  <a:schemeClr val="accent1"/>
+                </a:effectRef>
+                <a:fontRef idx="minor">
+                  <a:schemeClr val="lt1"/>
+                </a:fontRef>
+              </p:style>
+              <p:txBody>
+                <a:bodyPr rtlCol="0" anchor="ctr"/>
+                <a:lstStyle/>
+                <a:p>
+                  <a:pPr algn="ctr"/>
+                  <a:endParaRPr lang="en-US"/>
+                </a:p>
+              </p:txBody>
+            </p:sp>
+            <p:sp>
+              <p:nvSpPr>
+                <p:cNvPr id="48" name="Rectangle 47">
+                  <a:extLst>
+                    <a:ext uri="{FF2B5EF4-FFF2-40B4-BE49-F238E27FC236}">
+                      <a16:creationId xmlns:a16="http://schemas.microsoft.com/office/drawing/2014/main" id="{B69422C1-2981-482B-9580-5567A872181D}"/>
+                    </a:ext>
+                  </a:extLst>
+                </p:cNvPr>
+                <p:cNvSpPr/>
+                <p:nvPr/>
+              </p:nvSpPr>
+              <p:spPr>
+                <a:xfrm>
+                  <a:off x="1082809" y="4004059"/>
+                  <a:ext cx="233608" cy="233608"/>
+                </a:xfrm>
+                <a:prstGeom prst="rect">
+                  <a:avLst/>
+                </a:prstGeom>
+                <a:grpFill/>
+              </p:spPr>
+              <p:style>
+                <a:lnRef idx="2">
+                  <a:schemeClr val="accent1">
+                    <a:shade val="50000"/>
+                  </a:schemeClr>
+                </a:lnRef>
+                <a:fillRef idx="1">
+                  <a:schemeClr val="accent1"/>
+                </a:fillRef>
+                <a:effectRef idx="0">
+                  <a:schemeClr val="accent1"/>
+                </a:effectRef>
+                <a:fontRef idx="minor">
+                  <a:schemeClr val="lt1"/>
+                </a:fontRef>
+              </p:style>
+              <p:txBody>
+                <a:bodyPr rtlCol="0" anchor="ctr"/>
+                <a:lstStyle/>
+                <a:p>
+                  <a:pPr algn="ctr"/>
+                  <a:endParaRPr lang="en-US"/>
+                </a:p>
+              </p:txBody>
+            </p:sp>
+            <p:sp>
+              <p:nvSpPr>
+                <p:cNvPr id="49" name="Rectangle 48">
+                  <a:extLst>
+                    <a:ext uri="{FF2B5EF4-FFF2-40B4-BE49-F238E27FC236}">
+                      <a16:creationId xmlns:a16="http://schemas.microsoft.com/office/drawing/2014/main" id="{B5D744C1-27DB-416B-8F44-8F3AD1E1DA84}"/>
+                    </a:ext>
+                  </a:extLst>
+                </p:cNvPr>
+                <p:cNvSpPr/>
+                <p:nvPr/>
+              </p:nvSpPr>
+              <p:spPr>
+                <a:xfrm>
+                  <a:off x="1082809" y="4318361"/>
+                  <a:ext cx="233608" cy="233608"/>
+                </a:xfrm>
+                <a:prstGeom prst="rect">
+                  <a:avLst/>
+                </a:prstGeom>
+                <a:grpFill/>
+              </p:spPr>
+              <p:style>
+                <a:lnRef idx="2">
+                  <a:schemeClr val="accent1">
+                    <a:shade val="50000"/>
+                  </a:schemeClr>
+                </a:lnRef>
+                <a:fillRef idx="1">
+                  <a:schemeClr val="accent1"/>
+                </a:fillRef>
+                <a:effectRef idx="0">
+                  <a:schemeClr val="accent1"/>
+                </a:effectRef>
+                <a:fontRef idx="minor">
+                  <a:schemeClr val="lt1"/>
+                </a:fontRef>
+              </p:style>
+              <p:txBody>
+                <a:bodyPr rtlCol="0" anchor="ctr"/>
+                <a:lstStyle/>
+                <a:p>
+                  <a:pPr algn="ctr"/>
+                  <a:endParaRPr lang="en-US"/>
+                </a:p>
+              </p:txBody>
+            </p:sp>
+          </p:grpSp>
+        </p:grpSp>
+        <p:sp>
+          <p:nvSpPr>
+            <p:cNvPr id="57" name="Isosceles Triangle 56">
+              <a:extLst>
+                <a:ext uri="{FF2B5EF4-FFF2-40B4-BE49-F238E27FC236}">
+                  <a16:creationId xmlns:a16="http://schemas.microsoft.com/office/drawing/2014/main" id="{526D4B96-A13E-4D0F-9CF7-87DC47AF5E37}"/>
+                </a:ext>
+              </a:extLst>
+            </p:cNvPr>
+            <p:cNvSpPr/>
+            <p:nvPr/>
+          </p:nvSpPr>
+          <p:spPr>
+            <a:xfrm rot="5400000">
+              <a:off x="3870774" y="3260178"/>
+              <a:ext cx="2093025" cy="405995"/>
+            </a:xfrm>
+            <a:prstGeom prst="triangle">
+              <a:avLst>
+                <a:gd name="adj" fmla="val 49008"/>
+              </a:avLst>
+            </a:prstGeom>
+            <a:noFill/>
+          </p:spPr>
+          <p:style>
+            <a:lnRef idx="2">
+              <a:schemeClr val="accent1">
+                <a:shade val="50000"/>
+              </a:schemeClr>
+            </a:lnRef>
+            <a:fillRef idx="1">
+              <a:schemeClr val="accent1"/>
+            </a:fillRef>
+            <a:effectRef idx="0">
+              <a:schemeClr val="accent1"/>
+            </a:effectRef>
+            <a:fontRef idx="minor">
+              <a:schemeClr val="lt1"/>
+            </a:fontRef>
+          </p:style>
+          <p:txBody>
+            <a:bodyPr rtlCol="0" anchor="ctr"/>
+            <a:lstStyle/>
+            <a:p>
+              <a:pPr algn="ctr"/>
+              <a:endParaRPr lang="en-US"/>
+            </a:p>
+          </p:txBody>
+        </p:sp>
+        <p:sp>
+          <p:nvSpPr>
+            <p:cNvPr id="58" name="Isosceles Triangle 57">
+              <a:extLst>
+                <a:ext uri="{FF2B5EF4-FFF2-40B4-BE49-F238E27FC236}">
+                  <a16:creationId xmlns:a16="http://schemas.microsoft.com/office/drawing/2014/main" id="{DA4008AC-6FCA-4A2D-8514-BB0FAE1F584D}"/>
+                </a:ext>
+              </a:extLst>
+            </p:cNvPr>
+            <p:cNvSpPr/>
+            <p:nvPr/>
+          </p:nvSpPr>
+          <p:spPr>
+            <a:xfrm rot="5400000" flipV="1">
+              <a:off x="4107011" y="3261965"/>
+              <a:ext cx="4326022" cy="509724"/>
+            </a:xfrm>
+            <a:prstGeom prst="triangle">
+              <a:avLst>
+                <a:gd name="adj" fmla="val 48620"/>
+              </a:avLst>
+            </a:prstGeom>
+            <a:noFill/>
+          </p:spPr>
+          <p:style>
+            <a:lnRef idx="2">
+              <a:schemeClr val="accent1">
+                <a:shade val="50000"/>
+              </a:schemeClr>
+            </a:lnRef>
+            <a:fillRef idx="1">
+              <a:schemeClr val="accent1"/>
+            </a:fillRef>
+            <a:effectRef idx="0">
+              <a:schemeClr val="accent1"/>
+            </a:effectRef>
+            <a:fontRef idx="minor">
+              <a:schemeClr val="lt1"/>
+            </a:fontRef>
+          </p:style>
+          <p:txBody>
+            <a:bodyPr rtlCol="0" anchor="ctr"/>
+            <a:lstStyle/>
+            <a:p>
+              <a:pPr algn="ctr"/>
+              <a:endParaRPr lang="en-US"/>
+            </a:p>
+          </p:txBody>
+        </p:sp>
+        <p:grpSp>
+          <p:nvGrpSpPr>
+            <p:cNvPr id="60" name="Group 59">
+              <a:extLst>
+                <a:ext uri="{FF2B5EF4-FFF2-40B4-BE49-F238E27FC236}">
+                  <a16:creationId xmlns:a16="http://schemas.microsoft.com/office/drawing/2014/main" id="{CB04CAD0-B1B5-4409-93FD-C72DE59ED07B}"/>
+                </a:ext>
+              </a:extLst>
+            </p:cNvPr>
+            <p:cNvGrpSpPr/>
+            <p:nvPr/>
+          </p:nvGrpSpPr>
+          <p:grpSpPr>
+            <a:xfrm>
+              <a:off x="5441706" y="3026708"/>
+              <a:ext cx="233608" cy="861899"/>
+              <a:chOff x="1082809" y="2740588"/>
+              <a:chExt cx="233608" cy="861899"/>
+            </a:xfrm>
+            <a:solidFill>
+              <a:schemeClr val="accent1">
+                <a:lumMod val="40000"/>
+                <a:lumOff val="60000"/>
+              </a:schemeClr>
+            </a:solidFill>
+          </p:grpSpPr>
+          <p:sp>
+            <p:nvSpPr>
+              <p:cNvPr id="62" name="Rectangle 61">
+                <a:extLst>
+                  <a:ext uri="{FF2B5EF4-FFF2-40B4-BE49-F238E27FC236}">
+                    <a16:creationId xmlns:a16="http://schemas.microsoft.com/office/drawing/2014/main" id="{6B37470E-8937-4EB1-850E-A5B55E38CF02}"/>
+                  </a:ext>
+                </a:extLst>
+              </p:cNvPr>
+              <p:cNvSpPr/>
+              <p:nvPr/>
+            </p:nvSpPr>
+            <p:spPr>
+              <a:xfrm>
+                <a:off x="1082809" y="2740588"/>
+                <a:ext cx="233608" cy="233608"/>
+              </a:xfrm>
+              <a:prstGeom prst="rect">
+                <a:avLst/>
+              </a:prstGeom>
+              <a:grpFill/>
+            </p:spPr>
+            <p:style>
+              <a:lnRef idx="2">
+                <a:schemeClr val="accent1">
+                  <a:shade val="50000"/>
+                </a:schemeClr>
+              </a:lnRef>
+              <a:fillRef idx="1">
+                <a:schemeClr val="accent1"/>
+              </a:fillRef>
+              <a:effectRef idx="0">
+                <a:schemeClr val="accent1"/>
+              </a:effectRef>
+              <a:fontRef idx="minor">
+                <a:schemeClr val="lt1"/>
+              </a:fontRef>
+            </p:style>
+            <p:txBody>
+              <a:bodyPr rtlCol="0" anchor="ctr"/>
+              <a:lstStyle/>
+              <a:p>
+                <a:pPr algn="ctr"/>
+                <a:endParaRPr lang="en-US"/>
+              </a:p>
+            </p:txBody>
+          </p:sp>
+          <p:sp>
+            <p:nvSpPr>
+              <p:cNvPr id="63" name="Rectangle 62">
+                <a:extLst>
+                  <a:ext uri="{FF2B5EF4-FFF2-40B4-BE49-F238E27FC236}">
+                    <a16:creationId xmlns:a16="http://schemas.microsoft.com/office/drawing/2014/main" id="{706B40C9-9BE2-4ED5-8F77-4E90F4A8D9CD}"/>
+                  </a:ext>
+                </a:extLst>
+              </p:cNvPr>
+              <p:cNvSpPr/>
+              <p:nvPr/>
+            </p:nvSpPr>
+            <p:spPr>
+              <a:xfrm>
+                <a:off x="1082809" y="3054890"/>
+                <a:ext cx="233608" cy="233608"/>
+              </a:xfrm>
+              <a:prstGeom prst="rect">
+                <a:avLst/>
+              </a:prstGeom>
+              <a:grpFill/>
+            </p:spPr>
+            <p:style>
+              <a:lnRef idx="2">
+                <a:schemeClr val="accent1">
+                  <a:shade val="50000"/>
+                </a:schemeClr>
+              </a:lnRef>
+              <a:fillRef idx="1">
+                <a:schemeClr val="accent1"/>
+              </a:fillRef>
+              <a:effectRef idx="0">
+                <a:schemeClr val="accent1"/>
+              </a:effectRef>
+              <a:fontRef idx="minor">
+                <a:schemeClr val="lt1"/>
+              </a:fontRef>
+            </p:style>
+            <p:txBody>
+              <a:bodyPr rtlCol="0" anchor="ctr"/>
+              <a:lstStyle/>
+              <a:p>
+                <a:pPr algn="ctr"/>
+                <a:endParaRPr lang="en-US"/>
+              </a:p>
+            </p:txBody>
+          </p:sp>
+          <p:sp>
+            <p:nvSpPr>
+              <p:cNvPr id="64" name="Rectangle 63">
+                <a:extLst>
+                  <a:ext uri="{FF2B5EF4-FFF2-40B4-BE49-F238E27FC236}">
+                    <a16:creationId xmlns:a16="http://schemas.microsoft.com/office/drawing/2014/main" id="{F43DB8BF-F7E3-4674-8953-D536EE5DB53A}"/>
+                  </a:ext>
+                </a:extLst>
+              </p:cNvPr>
+              <p:cNvSpPr/>
+              <p:nvPr/>
+            </p:nvSpPr>
+            <p:spPr>
+              <a:xfrm>
+                <a:off x="1082809" y="3368879"/>
+                <a:ext cx="233608" cy="233608"/>
+              </a:xfrm>
+              <a:prstGeom prst="rect">
+                <a:avLst/>
+              </a:prstGeom>
+              <a:grpFill/>
+            </p:spPr>
+            <p:style>
+              <a:lnRef idx="2">
+                <a:schemeClr val="accent1">
+                  <a:shade val="50000"/>
+                </a:schemeClr>
+              </a:lnRef>
+              <a:fillRef idx="1">
+                <a:schemeClr val="accent1"/>
+              </a:fillRef>
+              <a:effectRef idx="0">
+                <a:schemeClr val="accent1"/>
+              </a:effectRef>
+              <a:fontRef idx="minor">
+                <a:schemeClr val="lt1"/>
+              </a:fontRef>
+            </p:style>
+            <p:txBody>
+              <a:bodyPr rtlCol="0" anchor="ctr"/>
+              <a:lstStyle/>
+              <a:p>
+                <a:pPr algn="ctr"/>
+                <a:endParaRPr lang="en-US"/>
+              </a:p>
+            </p:txBody>
+          </p:sp>
+        </p:grpSp>
+        <p:sp>
+          <p:nvSpPr>
+            <p:cNvPr id="68" name="Isosceles Triangle 67">
+              <a:extLst>
+                <a:ext uri="{FF2B5EF4-FFF2-40B4-BE49-F238E27FC236}">
+                  <a16:creationId xmlns:a16="http://schemas.microsoft.com/office/drawing/2014/main" id="{FFF43C56-B3A0-47E4-82B2-A07945C8F050}"/>
+                </a:ext>
+              </a:extLst>
+            </p:cNvPr>
+            <p:cNvSpPr/>
+            <p:nvPr/>
+          </p:nvSpPr>
+          <p:spPr>
+            <a:xfrm rot="5400000" flipV="1">
+              <a:off x="4842212" y="3325644"/>
+              <a:ext cx="820177" cy="264029"/>
+            </a:xfrm>
+            <a:prstGeom prst="triangle">
+              <a:avLst>
+                <a:gd name="adj" fmla="val 48620"/>
+              </a:avLst>
+            </a:prstGeom>
+            <a:noFill/>
+          </p:spPr>
+          <p:style>
+            <a:lnRef idx="2">
+              <a:schemeClr val="accent1">
+                <a:shade val="50000"/>
+              </a:schemeClr>
+            </a:lnRef>
+            <a:fillRef idx="1">
+              <a:schemeClr val="accent1"/>
+            </a:fillRef>
+            <a:effectRef idx="0">
+              <a:schemeClr val="accent1"/>
+            </a:effectRef>
+            <a:fontRef idx="minor">
+              <a:schemeClr val="lt1"/>
+            </a:fontRef>
+          </p:style>
+          <p:txBody>
+            <a:bodyPr rtlCol="0" anchor="ctr"/>
+            <a:lstStyle/>
+            <a:p>
+              <a:pPr algn="ctr"/>
+              <a:endParaRPr lang="en-US"/>
+            </a:p>
+          </p:txBody>
+        </p:sp>
+        <p:sp>
+          <p:nvSpPr>
+            <p:cNvPr id="69" name="Isosceles Triangle 68">
+              <a:extLst>
+                <a:ext uri="{FF2B5EF4-FFF2-40B4-BE49-F238E27FC236}">
+                  <a16:creationId xmlns:a16="http://schemas.microsoft.com/office/drawing/2014/main" id="{AE8B0F5B-3E0D-4410-ABAB-E9D4E47FFF87}"/>
+                </a:ext>
+              </a:extLst>
+            </p:cNvPr>
+            <p:cNvSpPr/>
+            <p:nvPr/>
+          </p:nvSpPr>
+          <p:spPr>
+            <a:xfrm rot="5400000">
+              <a:off x="5458308" y="3317945"/>
+              <a:ext cx="820178" cy="279428"/>
+            </a:xfrm>
+            <a:prstGeom prst="triangle">
+              <a:avLst>
+                <a:gd name="adj" fmla="val 48620"/>
+              </a:avLst>
+            </a:prstGeom>
+            <a:noFill/>
+          </p:spPr>
+          <p:style>
+            <a:lnRef idx="2">
+              <a:schemeClr val="accent1">
+                <a:shade val="50000"/>
+              </a:schemeClr>
+            </a:lnRef>
+            <a:fillRef idx="1">
+              <a:schemeClr val="accent1"/>
+            </a:fillRef>
+            <a:effectRef idx="0">
+              <a:schemeClr val="accent1"/>
+            </a:effectRef>
+            <a:fontRef idx="minor">
+              <a:schemeClr val="lt1"/>
+            </a:fontRef>
+          </p:style>
+          <p:txBody>
+            <a:bodyPr rtlCol="0" anchor="ctr"/>
+            <a:lstStyle/>
+            <a:p>
+              <a:pPr algn="ctr"/>
+              <a:endParaRPr lang="en-US"/>
+            </a:p>
+          </p:txBody>
+        </p:sp>
+      </p:grpSp>
+      <p:sp>
+        <p:nvSpPr>
+          <p:cNvPr id="70" name="TextBox 69">
+            <a:extLst>
+              <a:ext uri="{FF2B5EF4-FFF2-40B4-BE49-F238E27FC236}">
+                <a16:creationId xmlns:a16="http://schemas.microsoft.com/office/drawing/2014/main" id="{FCF7411B-D78C-478E-B96E-2083F12AABB5}"/>
+              </a:ext>
+            </a:extLst>
+          </p:cNvPr>
+          <p:cNvSpPr txBox="1"/>
+          <p:nvPr/>
+        </p:nvSpPr>
+        <p:spPr>
+          <a:xfrm>
+            <a:off x="4298511" y="4893949"/>
+            <a:ext cx="1971511" cy="769441"/>
+          </a:xfrm>
+          <a:prstGeom prst="rect">
+            <a:avLst/>
+          </a:prstGeom>
+          <a:noFill/>
+        </p:spPr>
+        <p:txBody>
+          <a:bodyPr wrap="square" rtlCol="0">
+            <a:spAutoFit/>
+          </a:bodyPr>
+          <a:lstStyle/>
+          <a:p>
+            <a:r>
+              <a:rPr lang="en-US" sz="1100" i="1"/>
+              <a:t>It is assuming that original weights can be approximated by the new weights. </a:t>
+            </a:r>
+            <a:r>
+              <a:rPr lang="en-US" sz="1100" i="1">
+                <a:solidFill>
+                  <a:srgbClr val="FF0000"/>
+                </a:solidFill>
+              </a:rPr>
+              <a:t>But we need to use existing weights!</a:t>
+            </a:r>
+          </a:p>
+        </p:txBody>
+      </p:sp>
+      <p:grpSp>
+        <p:nvGrpSpPr>
+          <p:cNvPr id="137" name="Group 136">
+            <a:extLst>
+              <a:ext uri="{FF2B5EF4-FFF2-40B4-BE49-F238E27FC236}">
+                <a16:creationId xmlns:a16="http://schemas.microsoft.com/office/drawing/2014/main" id="{8D966F14-B9FF-444C-BB82-20BB165A305E}"/>
+              </a:ext>
+            </a:extLst>
+          </p:cNvPr>
+          <p:cNvGrpSpPr/>
+          <p:nvPr/>
+        </p:nvGrpSpPr>
+        <p:grpSpPr>
+          <a:xfrm>
+            <a:off x="7863546" y="1887353"/>
+            <a:ext cx="819799" cy="1292229"/>
+            <a:chOff x="1082809" y="1357732"/>
+            <a:chExt cx="2433927" cy="4338962"/>
+          </a:xfrm>
+        </p:grpSpPr>
+        <p:grpSp>
+          <p:nvGrpSpPr>
+            <p:cNvPr id="138" name="Group 137">
+              <a:extLst>
+                <a:ext uri="{FF2B5EF4-FFF2-40B4-BE49-F238E27FC236}">
+                  <a16:creationId xmlns:a16="http://schemas.microsoft.com/office/drawing/2014/main" id="{6065D3E0-2480-4E0B-9202-6C4C7CA4AF2A}"/>
+                </a:ext>
+              </a:extLst>
+            </p:cNvPr>
+            <p:cNvGrpSpPr/>
+            <p:nvPr/>
+          </p:nvGrpSpPr>
+          <p:grpSpPr>
+            <a:xfrm>
+              <a:off x="1082809" y="2422835"/>
+              <a:ext cx="233608" cy="2129134"/>
+              <a:chOff x="1082809" y="2422835"/>
+              <a:chExt cx="233608" cy="2129134"/>
+            </a:xfrm>
+          </p:grpSpPr>
+          <p:sp>
+            <p:nvSpPr>
+              <p:cNvPr id="158" name="Rectangle 157">
+                <a:extLst>
+                  <a:ext uri="{FF2B5EF4-FFF2-40B4-BE49-F238E27FC236}">
+                    <a16:creationId xmlns:a16="http://schemas.microsoft.com/office/drawing/2014/main" id="{0FAFF336-2481-4452-92CD-CCB098A40D84}"/>
+                  </a:ext>
+                </a:extLst>
+              </p:cNvPr>
+              <p:cNvSpPr/>
+              <p:nvPr/>
+            </p:nvSpPr>
+            <p:spPr>
+              <a:xfrm>
+                <a:off x="1082809" y="2422835"/>
+                <a:ext cx="233608" cy="233608"/>
+              </a:xfrm>
+              <a:prstGeom prst="rect">
+                <a:avLst/>
+              </a:prstGeom>
+            </p:spPr>
+            <p:style>
+              <a:lnRef idx="2">
+                <a:schemeClr val="accent1">
+                  <a:shade val="50000"/>
+                </a:schemeClr>
+              </a:lnRef>
+              <a:fillRef idx="1">
+                <a:schemeClr val="accent1"/>
+              </a:fillRef>
+              <a:effectRef idx="0">
+                <a:schemeClr val="accent1"/>
+              </a:effectRef>
+              <a:fontRef idx="minor">
+                <a:schemeClr val="lt1"/>
+              </a:fontRef>
+            </p:style>
+            <p:txBody>
+              <a:bodyPr rtlCol="0" anchor="ctr"/>
+              <a:lstStyle/>
+              <a:p>
+                <a:pPr algn="ctr"/>
+                <a:endParaRPr lang="en-US"/>
+              </a:p>
+            </p:txBody>
+          </p:sp>
+          <p:sp>
+            <p:nvSpPr>
+              <p:cNvPr id="159" name="Rectangle 158">
+                <a:extLst>
+                  <a:ext uri="{FF2B5EF4-FFF2-40B4-BE49-F238E27FC236}">
+                    <a16:creationId xmlns:a16="http://schemas.microsoft.com/office/drawing/2014/main" id="{BEB9E9D4-5D55-4C4C-B785-35F8BE679DD7}"/>
+                  </a:ext>
+                </a:extLst>
+              </p:cNvPr>
+              <p:cNvSpPr/>
+              <p:nvPr/>
+            </p:nvSpPr>
+            <p:spPr>
+              <a:xfrm>
+                <a:off x="1082809" y="2740588"/>
+                <a:ext cx="233608" cy="233608"/>
+              </a:xfrm>
+              <a:prstGeom prst="rect">
+                <a:avLst/>
+              </a:prstGeom>
+            </p:spPr>
+            <p:style>
+              <a:lnRef idx="2">
+                <a:schemeClr val="accent1">
+                  <a:shade val="50000"/>
+                </a:schemeClr>
+              </a:lnRef>
+              <a:fillRef idx="1">
+                <a:schemeClr val="accent1"/>
+              </a:fillRef>
+              <a:effectRef idx="0">
+                <a:schemeClr val="accent1"/>
+              </a:effectRef>
+              <a:fontRef idx="minor">
+                <a:schemeClr val="lt1"/>
+              </a:fontRef>
+            </p:style>
+            <p:txBody>
+              <a:bodyPr rtlCol="0" anchor="ctr"/>
+              <a:lstStyle/>
+              <a:p>
+                <a:pPr algn="ctr"/>
+                <a:endParaRPr lang="en-US"/>
+              </a:p>
+            </p:txBody>
+          </p:sp>
+          <p:sp>
+            <p:nvSpPr>
+              <p:cNvPr id="160" name="Rectangle 159">
+                <a:extLst>
+                  <a:ext uri="{FF2B5EF4-FFF2-40B4-BE49-F238E27FC236}">
+                    <a16:creationId xmlns:a16="http://schemas.microsoft.com/office/drawing/2014/main" id="{E645866B-7BE9-4E5B-821C-992764A10733}"/>
+                  </a:ext>
+                </a:extLst>
+              </p:cNvPr>
+              <p:cNvSpPr/>
+              <p:nvPr/>
+            </p:nvSpPr>
+            <p:spPr>
+              <a:xfrm>
+                <a:off x="1082809" y="3054890"/>
+                <a:ext cx="233608" cy="233608"/>
+              </a:xfrm>
+              <a:prstGeom prst="rect">
+                <a:avLst/>
+              </a:prstGeom>
+            </p:spPr>
+            <p:style>
+              <a:lnRef idx="2">
+                <a:schemeClr val="accent1">
+                  <a:shade val="50000"/>
+                </a:schemeClr>
+              </a:lnRef>
+              <a:fillRef idx="1">
+                <a:schemeClr val="accent1"/>
+              </a:fillRef>
+              <a:effectRef idx="0">
+                <a:schemeClr val="accent1"/>
+              </a:effectRef>
+              <a:fontRef idx="minor">
+                <a:schemeClr val="lt1"/>
+              </a:fontRef>
+            </p:style>
+            <p:txBody>
+              <a:bodyPr rtlCol="0" anchor="ctr"/>
+              <a:lstStyle/>
+              <a:p>
+                <a:pPr algn="ctr"/>
+                <a:endParaRPr lang="en-US"/>
+              </a:p>
+            </p:txBody>
+          </p:sp>
+          <p:sp>
+            <p:nvSpPr>
+              <p:cNvPr id="161" name="Rectangle 160">
+                <a:extLst>
+                  <a:ext uri="{FF2B5EF4-FFF2-40B4-BE49-F238E27FC236}">
+                    <a16:creationId xmlns:a16="http://schemas.microsoft.com/office/drawing/2014/main" id="{5E138345-8236-48ED-9E4F-6190C9DF766D}"/>
+                  </a:ext>
+                </a:extLst>
+              </p:cNvPr>
+              <p:cNvSpPr/>
+              <p:nvPr/>
+            </p:nvSpPr>
+            <p:spPr>
+              <a:xfrm>
+                <a:off x="1082809" y="3368879"/>
+                <a:ext cx="233608" cy="233608"/>
+              </a:xfrm>
+              <a:prstGeom prst="rect">
+                <a:avLst/>
+              </a:prstGeom>
+            </p:spPr>
+            <p:style>
+              <a:lnRef idx="2">
+                <a:schemeClr val="accent1">
+                  <a:shade val="50000"/>
+                </a:schemeClr>
+              </a:lnRef>
+              <a:fillRef idx="1">
+                <a:schemeClr val="accent1"/>
+              </a:fillRef>
+              <a:effectRef idx="0">
+                <a:schemeClr val="accent1"/>
+              </a:effectRef>
+              <a:fontRef idx="minor">
+                <a:schemeClr val="lt1"/>
+              </a:fontRef>
+            </p:style>
+            <p:txBody>
+              <a:bodyPr rtlCol="0" anchor="ctr"/>
+              <a:lstStyle/>
+              <a:p>
+                <a:pPr algn="ctr"/>
+                <a:endParaRPr lang="en-US"/>
+              </a:p>
+            </p:txBody>
+          </p:sp>
+          <p:sp>
+            <p:nvSpPr>
+              <p:cNvPr id="162" name="Rectangle 161">
+                <a:extLst>
+                  <a:ext uri="{FF2B5EF4-FFF2-40B4-BE49-F238E27FC236}">
+                    <a16:creationId xmlns:a16="http://schemas.microsoft.com/office/drawing/2014/main" id="{682D7A4E-C215-43CA-8609-477E74FA3BD8}"/>
+                  </a:ext>
+                </a:extLst>
+              </p:cNvPr>
+              <p:cNvSpPr/>
+              <p:nvPr/>
+            </p:nvSpPr>
+            <p:spPr>
+              <a:xfrm>
+                <a:off x="1082809" y="3689757"/>
+                <a:ext cx="233608" cy="233608"/>
+              </a:xfrm>
+              <a:prstGeom prst="rect">
+                <a:avLst/>
+              </a:prstGeom>
+            </p:spPr>
+            <p:style>
+              <a:lnRef idx="2">
+                <a:schemeClr val="accent1">
+                  <a:shade val="50000"/>
+                </a:schemeClr>
+              </a:lnRef>
+              <a:fillRef idx="1">
+                <a:schemeClr val="accent1"/>
+              </a:fillRef>
+              <a:effectRef idx="0">
+                <a:schemeClr val="accent1"/>
+              </a:effectRef>
+              <a:fontRef idx="minor">
+                <a:schemeClr val="lt1"/>
+              </a:fontRef>
+            </p:style>
+            <p:txBody>
+              <a:bodyPr rtlCol="0" anchor="ctr"/>
+              <a:lstStyle/>
+              <a:p>
+                <a:pPr algn="ctr"/>
+                <a:endParaRPr lang="en-US"/>
+              </a:p>
+            </p:txBody>
+          </p:sp>
+          <p:sp>
+            <p:nvSpPr>
+              <p:cNvPr id="163" name="Rectangle 162">
+                <a:extLst>
+                  <a:ext uri="{FF2B5EF4-FFF2-40B4-BE49-F238E27FC236}">
+                    <a16:creationId xmlns:a16="http://schemas.microsoft.com/office/drawing/2014/main" id="{F81B1015-A31E-4717-8479-3C2319D4DE09}"/>
+                  </a:ext>
+                </a:extLst>
+              </p:cNvPr>
+              <p:cNvSpPr/>
+              <p:nvPr/>
+            </p:nvSpPr>
+            <p:spPr>
+              <a:xfrm>
+                <a:off x="1082809" y="4004059"/>
+                <a:ext cx="233608" cy="233608"/>
+              </a:xfrm>
+              <a:prstGeom prst="rect">
+                <a:avLst/>
+              </a:prstGeom>
+            </p:spPr>
+            <p:style>
+              <a:lnRef idx="2">
+                <a:schemeClr val="accent1">
+                  <a:shade val="50000"/>
+                </a:schemeClr>
+              </a:lnRef>
+              <a:fillRef idx="1">
+                <a:schemeClr val="accent1"/>
+              </a:fillRef>
+              <a:effectRef idx="0">
+                <a:schemeClr val="accent1"/>
+              </a:effectRef>
+              <a:fontRef idx="minor">
+                <a:schemeClr val="lt1"/>
+              </a:fontRef>
+            </p:style>
+            <p:txBody>
+              <a:bodyPr rtlCol="0" anchor="ctr"/>
+              <a:lstStyle/>
+              <a:p>
+                <a:pPr algn="ctr"/>
+                <a:endParaRPr lang="en-US"/>
+              </a:p>
+            </p:txBody>
+          </p:sp>
+          <p:sp>
+            <p:nvSpPr>
+              <p:cNvPr id="164" name="Rectangle 163">
+                <a:extLst>
+                  <a:ext uri="{FF2B5EF4-FFF2-40B4-BE49-F238E27FC236}">
+                    <a16:creationId xmlns:a16="http://schemas.microsoft.com/office/drawing/2014/main" id="{2FCCEF24-9764-49D0-9773-B0EC0D074671}"/>
+                  </a:ext>
+                </a:extLst>
+              </p:cNvPr>
+              <p:cNvSpPr/>
+              <p:nvPr/>
+            </p:nvSpPr>
+            <p:spPr>
+              <a:xfrm>
+                <a:off x="1082809" y="4318361"/>
+                <a:ext cx="233608" cy="233608"/>
+              </a:xfrm>
+              <a:prstGeom prst="rect">
+                <a:avLst/>
+              </a:prstGeom>
+            </p:spPr>
+            <p:style>
+              <a:lnRef idx="2">
+                <a:schemeClr val="accent1">
+                  <a:shade val="50000"/>
+                </a:schemeClr>
+              </a:lnRef>
+              <a:fillRef idx="1">
+                <a:schemeClr val="accent1"/>
+              </a:fillRef>
+              <a:effectRef idx="0">
+                <a:schemeClr val="accent1"/>
+              </a:effectRef>
+              <a:fontRef idx="minor">
+                <a:schemeClr val="lt1"/>
+              </a:fontRef>
+            </p:style>
+            <p:txBody>
+              <a:bodyPr rtlCol="0" anchor="ctr"/>
+              <a:lstStyle/>
+              <a:p>
+                <a:pPr algn="ctr"/>
+                <a:endParaRPr lang="en-US"/>
+              </a:p>
+            </p:txBody>
+          </p:sp>
+        </p:grpSp>
+        <p:grpSp>
+          <p:nvGrpSpPr>
+            <p:cNvPr id="139" name="Group 138">
+              <a:extLst>
+                <a:ext uri="{FF2B5EF4-FFF2-40B4-BE49-F238E27FC236}">
+                  <a16:creationId xmlns:a16="http://schemas.microsoft.com/office/drawing/2014/main" id="{94EE9693-936F-4541-97A3-F76C3CA1E67C}"/>
+                </a:ext>
+              </a:extLst>
+            </p:cNvPr>
+            <p:cNvGrpSpPr/>
+            <p:nvPr/>
+          </p:nvGrpSpPr>
+          <p:grpSpPr>
+            <a:xfrm>
+              <a:off x="3283128" y="1357732"/>
+              <a:ext cx="233608" cy="4338962"/>
+              <a:chOff x="3325266" y="1239745"/>
+              <a:chExt cx="233608" cy="4338962"/>
+            </a:xfrm>
+            <a:solidFill>
+              <a:schemeClr val="accent4"/>
+            </a:solidFill>
+          </p:grpSpPr>
+          <p:grpSp>
+            <p:nvGrpSpPr>
+              <p:cNvPr id="142" name="Group 141">
+                <a:extLst>
+                  <a:ext uri="{FF2B5EF4-FFF2-40B4-BE49-F238E27FC236}">
+                    <a16:creationId xmlns:a16="http://schemas.microsoft.com/office/drawing/2014/main" id="{5680EED7-1DB4-4C0C-A903-D6FA66FB7D24}"/>
+                  </a:ext>
+                </a:extLst>
+              </p:cNvPr>
+              <p:cNvGrpSpPr/>
+              <p:nvPr/>
+            </p:nvGrpSpPr>
+            <p:grpSpPr>
+              <a:xfrm>
+                <a:off x="3325266" y="1239745"/>
+                <a:ext cx="233608" cy="2129134"/>
+                <a:chOff x="1082809" y="2422835"/>
+                <a:chExt cx="233608" cy="2129134"/>
+              </a:xfrm>
+              <a:grpFill/>
+            </p:grpSpPr>
+            <p:sp>
+              <p:nvSpPr>
+                <p:cNvPr id="151" name="Rectangle 150">
+                  <a:extLst>
+                    <a:ext uri="{FF2B5EF4-FFF2-40B4-BE49-F238E27FC236}">
+                      <a16:creationId xmlns:a16="http://schemas.microsoft.com/office/drawing/2014/main" id="{44A6663C-1C2C-4375-B9BB-0586F0ED6CFF}"/>
+                    </a:ext>
+                  </a:extLst>
+                </p:cNvPr>
+                <p:cNvSpPr/>
+                <p:nvPr/>
+              </p:nvSpPr>
+              <p:spPr>
+                <a:xfrm>
+                  <a:off x="1082809" y="2422835"/>
+                  <a:ext cx="233608" cy="233608"/>
+                </a:xfrm>
+                <a:prstGeom prst="rect">
+                  <a:avLst/>
+                </a:prstGeom>
+                <a:grpFill/>
+              </p:spPr>
+              <p:style>
+                <a:lnRef idx="2">
+                  <a:schemeClr val="accent1">
+                    <a:shade val="50000"/>
+                  </a:schemeClr>
+                </a:lnRef>
+                <a:fillRef idx="1">
+                  <a:schemeClr val="accent1"/>
+                </a:fillRef>
+                <a:effectRef idx="0">
+                  <a:schemeClr val="accent1"/>
+                </a:effectRef>
+                <a:fontRef idx="minor">
+                  <a:schemeClr val="lt1"/>
+                </a:fontRef>
+              </p:style>
+              <p:txBody>
+                <a:bodyPr rtlCol="0" anchor="ctr"/>
+                <a:lstStyle/>
+                <a:p>
+                  <a:pPr algn="ctr"/>
+                  <a:endParaRPr lang="en-US"/>
+                </a:p>
+              </p:txBody>
+            </p:sp>
+            <p:sp>
+              <p:nvSpPr>
+                <p:cNvPr id="152" name="Rectangle 151">
+                  <a:extLst>
+                    <a:ext uri="{FF2B5EF4-FFF2-40B4-BE49-F238E27FC236}">
+                      <a16:creationId xmlns:a16="http://schemas.microsoft.com/office/drawing/2014/main" id="{CE9AF320-E615-49CF-B494-33386D018A84}"/>
+                    </a:ext>
+                  </a:extLst>
+                </p:cNvPr>
+                <p:cNvSpPr/>
+                <p:nvPr/>
+              </p:nvSpPr>
+              <p:spPr>
+                <a:xfrm>
+                  <a:off x="1082809" y="2740588"/>
+                  <a:ext cx="233608" cy="233608"/>
+                </a:xfrm>
+                <a:prstGeom prst="rect">
+                  <a:avLst/>
+                </a:prstGeom>
+                <a:grpFill/>
+              </p:spPr>
+              <p:style>
+                <a:lnRef idx="2">
+                  <a:schemeClr val="accent1">
+                    <a:shade val="50000"/>
+                  </a:schemeClr>
+                </a:lnRef>
+                <a:fillRef idx="1">
+                  <a:schemeClr val="accent1"/>
+                </a:fillRef>
+                <a:effectRef idx="0">
+                  <a:schemeClr val="accent1"/>
+                </a:effectRef>
+                <a:fontRef idx="minor">
+                  <a:schemeClr val="lt1"/>
+                </a:fontRef>
+              </p:style>
+              <p:txBody>
+                <a:bodyPr rtlCol="0" anchor="ctr"/>
+                <a:lstStyle/>
+                <a:p>
+                  <a:pPr algn="ctr"/>
+                  <a:endParaRPr lang="en-US"/>
+                </a:p>
+              </p:txBody>
+            </p:sp>
+            <p:sp>
+              <p:nvSpPr>
+                <p:cNvPr id="153" name="Rectangle 152">
+                  <a:extLst>
+                    <a:ext uri="{FF2B5EF4-FFF2-40B4-BE49-F238E27FC236}">
+                      <a16:creationId xmlns:a16="http://schemas.microsoft.com/office/drawing/2014/main" id="{DFB4355C-D7B4-4583-8F82-0B04CAB8421F}"/>
+                    </a:ext>
+                  </a:extLst>
+                </p:cNvPr>
+                <p:cNvSpPr/>
+                <p:nvPr/>
+              </p:nvSpPr>
+              <p:spPr>
+                <a:xfrm>
+                  <a:off x="1082809" y="3054890"/>
+                  <a:ext cx="233608" cy="233608"/>
+                </a:xfrm>
+                <a:prstGeom prst="rect">
+                  <a:avLst/>
+                </a:prstGeom>
+                <a:grpFill/>
+              </p:spPr>
+              <p:style>
+                <a:lnRef idx="2">
+                  <a:schemeClr val="accent1">
+                    <a:shade val="50000"/>
+                  </a:schemeClr>
+                </a:lnRef>
+                <a:fillRef idx="1">
+                  <a:schemeClr val="accent1"/>
+                </a:fillRef>
+                <a:effectRef idx="0">
+                  <a:schemeClr val="accent1"/>
+                </a:effectRef>
+                <a:fontRef idx="minor">
+                  <a:schemeClr val="lt1"/>
+                </a:fontRef>
+              </p:style>
+              <p:txBody>
+                <a:bodyPr rtlCol="0" anchor="ctr"/>
+                <a:lstStyle/>
+                <a:p>
+                  <a:pPr algn="ctr"/>
+                  <a:endParaRPr lang="en-US"/>
+                </a:p>
+              </p:txBody>
+            </p:sp>
+            <p:sp>
+              <p:nvSpPr>
+                <p:cNvPr id="154" name="Rectangle 153">
+                  <a:extLst>
+                    <a:ext uri="{FF2B5EF4-FFF2-40B4-BE49-F238E27FC236}">
+                      <a16:creationId xmlns:a16="http://schemas.microsoft.com/office/drawing/2014/main" id="{992079FE-A1F6-4A89-A7DE-CCADB3467EF4}"/>
+                    </a:ext>
+                  </a:extLst>
+                </p:cNvPr>
+                <p:cNvSpPr/>
+                <p:nvPr/>
+              </p:nvSpPr>
+              <p:spPr>
+                <a:xfrm>
+                  <a:off x="1082809" y="3368879"/>
+                  <a:ext cx="233608" cy="233608"/>
+                </a:xfrm>
+                <a:prstGeom prst="rect">
+                  <a:avLst/>
+                </a:prstGeom>
+                <a:grpFill/>
+              </p:spPr>
+              <p:style>
+                <a:lnRef idx="2">
+                  <a:schemeClr val="accent1">
+                    <a:shade val="50000"/>
+                  </a:schemeClr>
+                </a:lnRef>
+                <a:fillRef idx="1">
+                  <a:schemeClr val="accent1"/>
+                </a:fillRef>
+                <a:effectRef idx="0">
+                  <a:schemeClr val="accent1"/>
+                </a:effectRef>
+                <a:fontRef idx="minor">
+                  <a:schemeClr val="lt1"/>
+                </a:fontRef>
+              </p:style>
+              <p:txBody>
+                <a:bodyPr rtlCol="0" anchor="ctr"/>
+                <a:lstStyle/>
+                <a:p>
+                  <a:pPr algn="ctr"/>
+                  <a:endParaRPr lang="en-US"/>
+                </a:p>
+              </p:txBody>
+            </p:sp>
+            <p:sp>
+              <p:nvSpPr>
+                <p:cNvPr id="155" name="Rectangle 154">
+                  <a:extLst>
+                    <a:ext uri="{FF2B5EF4-FFF2-40B4-BE49-F238E27FC236}">
+                      <a16:creationId xmlns:a16="http://schemas.microsoft.com/office/drawing/2014/main" id="{CD143E73-ECE2-4AA5-BF59-69310AF24D3B}"/>
+                    </a:ext>
+                  </a:extLst>
+                </p:cNvPr>
+                <p:cNvSpPr/>
+                <p:nvPr/>
+              </p:nvSpPr>
+              <p:spPr>
+                <a:xfrm>
+                  <a:off x="1082809" y="3689757"/>
+                  <a:ext cx="233608" cy="233608"/>
+                </a:xfrm>
+                <a:prstGeom prst="rect">
+                  <a:avLst/>
+                </a:prstGeom>
+                <a:grpFill/>
+              </p:spPr>
+              <p:style>
+                <a:lnRef idx="2">
+                  <a:schemeClr val="accent1">
+                    <a:shade val="50000"/>
+                  </a:schemeClr>
+                </a:lnRef>
+                <a:fillRef idx="1">
+                  <a:schemeClr val="accent1"/>
+                </a:fillRef>
+                <a:effectRef idx="0">
+                  <a:schemeClr val="accent1"/>
+                </a:effectRef>
+                <a:fontRef idx="minor">
+                  <a:schemeClr val="lt1"/>
+                </a:fontRef>
+              </p:style>
+              <p:txBody>
+                <a:bodyPr rtlCol="0" anchor="ctr"/>
+                <a:lstStyle/>
+                <a:p>
+                  <a:pPr algn="ctr"/>
+                  <a:endParaRPr lang="en-US"/>
+                </a:p>
+              </p:txBody>
+            </p:sp>
+            <p:sp>
+              <p:nvSpPr>
+                <p:cNvPr id="156" name="Rectangle 155">
+                  <a:extLst>
+                    <a:ext uri="{FF2B5EF4-FFF2-40B4-BE49-F238E27FC236}">
+                      <a16:creationId xmlns:a16="http://schemas.microsoft.com/office/drawing/2014/main" id="{0EA8714B-5764-436C-9E33-6070CEED8C44}"/>
+                    </a:ext>
+                  </a:extLst>
+                </p:cNvPr>
+                <p:cNvSpPr/>
+                <p:nvPr/>
+              </p:nvSpPr>
+              <p:spPr>
+                <a:xfrm>
+                  <a:off x="1082809" y="4004059"/>
+                  <a:ext cx="233608" cy="233608"/>
+                </a:xfrm>
+                <a:prstGeom prst="rect">
+                  <a:avLst/>
+                </a:prstGeom>
+                <a:grpFill/>
+              </p:spPr>
+              <p:style>
+                <a:lnRef idx="2">
+                  <a:schemeClr val="accent1">
+                    <a:shade val="50000"/>
+                  </a:schemeClr>
+                </a:lnRef>
+                <a:fillRef idx="1">
+                  <a:schemeClr val="accent1"/>
+                </a:fillRef>
+                <a:effectRef idx="0">
+                  <a:schemeClr val="accent1"/>
+                </a:effectRef>
+                <a:fontRef idx="minor">
+                  <a:schemeClr val="lt1"/>
+                </a:fontRef>
+              </p:style>
+              <p:txBody>
+                <a:bodyPr rtlCol="0" anchor="ctr"/>
+                <a:lstStyle/>
+                <a:p>
+                  <a:pPr algn="ctr"/>
+                  <a:endParaRPr lang="en-US"/>
+                </a:p>
+              </p:txBody>
+            </p:sp>
+            <p:sp>
+              <p:nvSpPr>
+                <p:cNvPr id="157" name="Rectangle 156">
+                  <a:extLst>
+                    <a:ext uri="{FF2B5EF4-FFF2-40B4-BE49-F238E27FC236}">
+                      <a16:creationId xmlns:a16="http://schemas.microsoft.com/office/drawing/2014/main" id="{C7825649-7067-49BA-A04D-D7D94AFE52B3}"/>
+                    </a:ext>
+                  </a:extLst>
+                </p:cNvPr>
+                <p:cNvSpPr/>
+                <p:nvPr/>
+              </p:nvSpPr>
+              <p:spPr>
+                <a:xfrm>
+                  <a:off x="1082809" y="4318361"/>
+                  <a:ext cx="233608" cy="233608"/>
+                </a:xfrm>
+                <a:prstGeom prst="rect">
+                  <a:avLst/>
+                </a:prstGeom>
+                <a:grpFill/>
+              </p:spPr>
+              <p:style>
+                <a:lnRef idx="2">
+                  <a:schemeClr val="accent1">
+                    <a:shade val="50000"/>
+                  </a:schemeClr>
+                </a:lnRef>
+                <a:fillRef idx="1">
+                  <a:schemeClr val="accent1"/>
+                </a:fillRef>
+                <a:effectRef idx="0">
+                  <a:schemeClr val="accent1"/>
+                </a:effectRef>
+                <a:fontRef idx="minor">
+                  <a:schemeClr val="lt1"/>
+                </a:fontRef>
+              </p:style>
+              <p:txBody>
+                <a:bodyPr rtlCol="0" anchor="ctr"/>
+                <a:lstStyle/>
+                <a:p>
+                  <a:pPr algn="ctr"/>
+                  <a:endParaRPr lang="en-US"/>
+                </a:p>
+              </p:txBody>
+            </p:sp>
+          </p:grpSp>
+          <p:grpSp>
+            <p:nvGrpSpPr>
+              <p:cNvPr id="143" name="Group 142">
+                <a:extLst>
+                  <a:ext uri="{FF2B5EF4-FFF2-40B4-BE49-F238E27FC236}">
+                    <a16:creationId xmlns:a16="http://schemas.microsoft.com/office/drawing/2014/main" id="{D119014C-FAE2-427F-B469-0A24431CD607}"/>
+                  </a:ext>
+                </a:extLst>
+              </p:cNvPr>
+              <p:cNvGrpSpPr/>
+              <p:nvPr/>
+            </p:nvGrpSpPr>
+            <p:grpSpPr>
+              <a:xfrm>
+                <a:off x="3325266" y="3449573"/>
+                <a:ext cx="233608" cy="2129134"/>
+                <a:chOff x="1082809" y="2422835"/>
+                <a:chExt cx="233608" cy="2129134"/>
+              </a:xfrm>
+              <a:grpFill/>
+            </p:grpSpPr>
+            <p:sp>
+              <p:nvSpPr>
+                <p:cNvPr id="144" name="Rectangle 143">
+                  <a:extLst>
+                    <a:ext uri="{FF2B5EF4-FFF2-40B4-BE49-F238E27FC236}">
+                      <a16:creationId xmlns:a16="http://schemas.microsoft.com/office/drawing/2014/main" id="{17B5797E-B889-41EA-9F7D-FC89590AE9AB}"/>
+                    </a:ext>
+                  </a:extLst>
+                </p:cNvPr>
+                <p:cNvSpPr/>
+                <p:nvPr/>
+              </p:nvSpPr>
+              <p:spPr>
+                <a:xfrm>
+                  <a:off x="1082809" y="2422835"/>
+                  <a:ext cx="233608" cy="233608"/>
+                </a:xfrm>
+                <a:prstGeom prst="rect">
+                  <a:avLst/>
+                </a:prstGeom>
+                <a:grpFill/>
+              </p:spPr>
+              <p:style>
+                <a:lnRef idx="2">
+                  <a:schemeClr val="accent1">
+                    <a:shade val="50000"/>
+                  </a:schemeClr>
+                </a:lnRef>
+                <a:fillRef idx="1">
+                  <a:schemeClr val="accent1"/>
+                </a:fillRef>
+                <a:effectRef idx="0">
+                  <a:schemeClr val="accent1"/>
+                </a:effectRef>
+                <a:fontRef idx="minor">
+                  <a:schemeClr val="lt1"/>
+                </a:fontRef>
+              </p:style>
+              <p:txBody>
+                <a:bodyPr rtlCol="0" anchor="ctr"/>
+                <a:lstStyle/>
+                <a:p>
+                  <a:pPr algn="ctr"/>
+                  <a:endParaRPr lang="en-US"/>
+                </a:p>
+              </p:txBody>
+            </p:sp>
+            <p:sp>
+              <p:nvSpPr>
+                <p:cNvPr id="145" name="Rectangle 144">
+                  <a:extLst>
+                    <a:ext uri="{FF2B5EF4-FFF2-40B4-BE49-F238E27FC236}">
+                      <a16:creationId xmlns:a16="http://schemas.microsoft.com/office/drawing/2014/main" id="{80F4E990-34BA-4206-9C63-CDB029D8DF2A}"/>
+                    </a:ext>
+                  </a:extLst>
+                </p:cNvPr>
+                <p:cNvSpPr/>
+                <p:nvPr/>
+              </p:nvSpPr>
+              <p:spPr>
+                <a:xfrm>
+                  <a:off x="1082809" y="2740588"/>
+                  <a:ext cx="233608" cy="233608"/>
+                </a:xfrm>
+                <a:prstGeom prst="rect">
+                  <a:avLst/>
+                </a:prstGeom>
+                <a:grpFill/>
+              </p:spPr>
+              <p:style>
+                <a:lnRef idx="2">
+                  <a:schemeClr val="accent1">
+                    <a:shade val="50000"/>
+                  </a:schemeClr>
+                </a:lnRef>
+                <a:fillRef idx="1">
+                  <a:schemeClr val="accent1"/>
+                </a:fillRef>
+                <a:effectRef idx="0">
+                  <a:schemeClr val="accent1"/>
+                </a:effectRef>
+                <a:fontRef idx="minor">
+                  <a:schemeClr val="lt1"/>
+                </a:fontRef>
+              </p:style>
+              <p:txBody>
+                <a:bodyPr rtlCol="0" anchor="ctr"/>
+                <a:lstStyle/>
+                <a:p>
+                  <a:pPr algn="ctr"/>
+                  <a:endParaRPr lang="en-US"/>
+                </a:p>
+              </p:txBody>
+            </p:sp>
+            <p:sp>
+              <p:nvSpPr>
+                <p:cNvPr id="146" name="Rectangle 145">
+                  <a:extLst>
+                    <a:ext uri="{FF2B5EF4-FFF2-40B4-BE49-F238E27FC236}">
+                      <a16:creationId xmlns:a16="http://schemas.microsoft.com/office/drawing/2014/main" id="{1BA659C0-F0D8-4DBF-9E72-0837004FD884}"/>
+                    </a:ext>
+                  </a:extLst>
+                </p:cNvPr>
+                <p:cNvSpPr/>
+                <p:nvPr/>
+              </p:nvSpPr>
+              <p:spPr>
+                <a:xfrm>
+                  <a:off x="1082809" y="3054890"/>
+                  <a:ext cx="233608" cy="233608"/>
+                </a:xfrm>
+                <a:prstGeom prst="rect">
+                  <a:avLst/>
+                </a:prstGeom>
+                <a:grpFill/>
+              </p:spPr>
+              <p:style>
+                <a:lnRef idx="2">
+                  <a:schemeClr val="accent1">
+                    <a:shade val="50000"/>
+                  </a:schemeClr>
+                </a:lnRef>
+                <a:fillRef idx="1">
+                  <a:schemeClr val="accent1"/>
+                </a:fillRef>
+                <a:effectRef idx="0">
+                  <a:schemeClr val="accent1"/>
+                </a:effectRef>
+                <a:fontRef idx="minor">
+                  <a:schemeClr val="lt1"/>
+                </a:fontRef>
+              </p:style>
+              <p:txBody>
+                <a:bodyPr rtlCol="0" anchor="ctr"/>
+                <a:lstStyle/>
+                <a:p>
+                  <a:pPr algn="ctr"/>
+                  <a:endParaRPr lang="en-US"/>
+                </a:p>
+              </p:txBody>
+            </p:sp>
+            <p:sp>
+              <p:nvSpPr>
+                <p:cNvPr id="147" name="Rectangle 146">
+                  <a:extLst>
+                    <a:ext uri="{FF2B5EF4-FFF2-40B4-BE49-F238E27FC236}">
+                      <a16:creationId xmlns:a16="http://schemas.microsoft.com/office/drawing/2014/main" id="{60035E6E-6387-4D78-A818-11BE2065AB70}"/>
+                    </a:ext>
+                  </a:extLst>
+                </p:cNvPr>
+                <p:cNvSpPr/>
+                <p:nvPr/>
+              </p:nvSpPr>
+              <p:spPr>
+                <a:xfrm>
+                  <a:off x="1082809" y="3368879"/>
+                  <a:ext cx="233608" cy="233608"/>
+                </a:xfrm>
+                <a:prstGeom prst="rect">
+                  <a:avLst/>
+                </a:prstGeom>
+                <a:grpFill/>
+              </p:spPr>
+              <p:style>
+                <a:lnRef idx="2">
+                  <a:schemeClr val="accent1">
+                    <a:shade val="50000"/>
+                  </a:schemeClr>
+                </a:lnRef>
+                <a:fillRef idx="1">
+                  <a:schemeClr val="accent1"/>
+                </a:fillRef>
+                <a:effectRef idx="0">
+                  <a:schemeClr val="accent1"/>
+                </a:effectRef>
+                <a:fontRef idx="minor">
+                  <a:schemeClr val="lt1"/>
+                </a:fontRef>
+              </p:style>
+              <p:txBody>
+                <a:bodyPr rtlCol="0" anchor="ctr"/>
+                <a:lstStyle/>
+                <a:p>
+                  <a:pPr algn="ctr"/>
+                  <a:endParaRPr lang="en-US"/>
+                </a:p>
+              </p:txBody>
+            </p:sp>
+            <p:sp>
+              <p:nvSpPr>
+                <p:cNvPr id="148" name="Rectangle 147">
+                  <a:extLst>
+                    <a:ext uri="{FF2B5EF4-FFF2-40B4-BE49-F238E27FC236}">
+                      <a16:creationId xmlns:a16="http://schemas.microsoft.com/office/drawing/2014/main" id="{0DEF1D1A-D1A9-4818-8A1F-D928660F37FA}"/>
+                    </a:ext>
+                  </a:extLst>
+                </p:cNvPr>
+                <p:cNvSpPr/>
+                <p:nvPr/>
+              </p:nvSpPr>
+              <p:spPr>
+                <a:xfrm>
+                  <a:off x="1082809" y="3689757"/>
+                  <a:ext cx="233608" cy="233608"/>
+                </a:xfrm>
+                <a:prstGeom prst="rect">
+                  <a:avLst/>
+                </a:prstGeom>
+                <a:grpFill/>
+              </p:spPr>
+              <p:style>
+                <a:lnRef idx="2">
+                  <a:schemeClr val="accent1">
+                    <a:shade val="50000"/>
+                  </a:schemeClr>
+                </a:lnRef>
+                <a:fillRef idx="1">
+                  <a:schemeClr val="accent1"/>
+                </a:fillRef>
+                <a:effectRef idx="0">
+                  <a:schemeClr val="accent1"/>
+                </a:effectRef>
+                <a:fontRef idx="minor">
+                  <a:schemeClr val="lt1"/>
+                </a:fontRef>
+              </p:style>
+              <p:txBody>
+                <a:bodyPr rtlCol="0" anchor="ctr"/>
+                <a:lstStyle/>
+                <a:p>
+                  <a:pPr algn="ctr"/>
+                  <a:endParaRPr lang="en-US"/>
+                </a:p>
+              </p:txBody>
+            </p:sp>
+            <p:sp>
+              <p:nvSpPr>
+                <p:cNvPr id="149" name="Rectangle 148">
+                  <a:extLst>
+                    <a:ext uri="{FF2B5EF4-FFF2-40B4-BE49-F238E27FC236}">
+                      <a16:creationId xmlns:a16="http://schemas.microsoft.com/office/drawing/2014/main" id="{D586A22B-6FA5-46D9-83F7-302E21F8CF02}"/>
+                    </a:ext>
+                  </a:extLst>
+                </p:cNvPr>
+                <p:cNvSpPr/>
+                <p:nvPr/>
+              </p:nvSpPr>
+              <p:spPr>
+                <a:xfrm>
+                  <a:off x="1082809" y="4004059"/>
+                  <a:ext cx="233608" cy="233608"/>
+                </a:xfrm>
+                <a:prstGeom prst="rect">
+                  <a:avLst/>
+                </a:prstGeom>
+                <a:grpFill/>
+              </p:spPr>
+              <p:style>
+                <a:lnRef idx="2">
+                  <a:schemeClr val="accent1">
+                    <a:shade val="50000"/>
+                  </a:schemeClr>
+                </a:lnRef>
+                <a:fillRef idx="1">
+                  <a:schemeClr val="accent1"/>
+                </a:fillRef>
+                <a:effectRef idx="0">
+                  <a:schemeClr val="accent1"/>
+                </a:effectRef>
+                <a:fontRef idx="minor">
+                  <a:schemeClr val="lt1"/>
+                </a:fontRef>
+              </p:style>
+              <p:txBody>
+                <a:bodyPr rtlCol="0" anchor="ctr"/>
+                <a:lstStyle/>
+                <a:p>
+                  <a:pPr algn="ctr"/>
+                  <a:endParaRPr lang="en-US"/>
+                </a:p>
+              </p:txBody>
+            </p:sp>
+            <p:sp>
+              <p:nvSpPr>
+                <p:cNvPr id="150" name="Rectangle 149">
+                  <a:extLst>
+                    <a:ext uri="{FF2B5EF4-FFF2-40B4-BE49-F238E27FC236}">
+                      <a16:creationId xmlns:a16="http://schemas.microsoft.com/office/drawing/2014/main" id="{2B209171-7CDB-4CBA-9701-986B74D1C0D7}"/>
+                    </a:ext>
+                  </a:extLst>
+                </p:cNvPr>
+                <p:cNvSpPr/>
+                <p:nvPr/>
+              </p:nvSpPr>
+              <p:spPr>
+                <a:xfrm>
+                  <a:off x="1082809" y="4318361"/>
+                  <a:ext cx="233608" cy="233608"/>
+                </a:xfrm>
+                <a:prstGeom prst="rect">
+                  <a:avLst/>
+                </a:prstGeom>
+                <a:grpFill/>
+              </p:spPr>
+              <p:style>
+                <a:lnRef idx="2">
+                  <a:schemeClr val="accent1">
+                    <a:shade val="50000"/>
+                  </a:schemeClr>
+                </a:lnRef>
+                <a:fillRef idx="1">
+                  <a:schemeClr val="accent1"/>
+                </a:fillRef>
+                <a:effectRef idx="0">
+                  <a:schemeClr val="accent1"/>
+                </a:effectRef>
+                <a:fontRef idx="minor">
+                  <a:schemeClr val="lt1"/>
+                </a:fontRef>
+              </p:style>
+              <p:txBody>
+                <a:bodyPr rtlCol="0" anchor="ctr"/>
+                <a:lstStyle/>
+                <a:p>
+                  <a:pPr algn="ctr"/>
+                  <a:endParaRPr lang="en-US"/>
+                </a:p>
+              </p:txBody>
+            </p:sp>
+          </p:grpSp>
+        </p:grpSp>
+        <p:sp>
+          <p:nvSpPr>
+            <p:cNvPr id="140" name="Isosceles Triangle 139">
+              <a:extLst>
+                <a:ext uri="{FF2B5EF4-FFF2-40B4-BE49-F238E27FC236}">
+                  <a16:creationId xmlns:a16="http://schemas.microsoft.com/office/drawing/2014/main" id="{C7E9DB51-AB6B-4B71-ACC8-CF55A030A5D8}"/>
+                </a:ext>
+              </a:extLst>
+            </p:cNvPr>
+            <p:cNvSpPr/>
+            <p:nvPr/>
+          </p:nvSpPr>
+          <p:spPr>
+            <a:xfrm rot="5400000">
+              <a:off x="678219" y="3152772"/>
+              <a:ext cx="2129134" cy="669260"/>
+            </a:xfrm>
+            <a:prstGeom prst="triangle">
+              <a:avLst>
+                <a:gd name="adj" fmla="val 49008"/>
+              </a:avLst>
+            </a:prstGeom>
+            <a:noFill/>
+          </p:spPr>
+          <p:style>
+            <a:lnRef idx="2">
+              <a:schemeClr val="accent1">
+                <a:shade val="50000"/>
+              </a:schemeClr>
+            </a:lnRef>
+            <a:fillRef idx="1">
+              <a:schemeClr val="accent1"/>
+            </a:fillRef>
+            <a:effectRef idx="0">
+              <a:schemeClr val="accent1"/>
+            </a:effectRef>
+            <a:fontRef idx="minor">
+              <a:schemeClr val="lt1"/>
+            </a:fontRef>
+          </p:style>
+          <p:txBody>
+            <a:bodyPr rtlCol="0" anchor="ctr"/>
+            <a:lstStyle/>
+            <a:p>
+              <a:pPr algn="ctr"/>
+              <a:endParaRPr lang="en-US"/>
+            </a:p>
+          </p:txBody>
+        </p:sp>
+        <p:sp>
+          <p:nvSpPr>
+            <p:cNvPr id="141" name="Isosceles Triangle 140">
+              <a:extLst>
+                <a:ext uri="{FF2B5EF4-FFF2-40B4-BE49-F238E27FC236}">
+                  <a16:creationId xmlns:a16="http://schemas.microsoft.com/office/drawing/2014/main" id="{9B12E281-3D81-4B37-9B1A-C8F1BD4F617B}"/>
+                </a:ext>
+              </a:extLst>
+            </p:cNvPr>
+            <p:cNvSpPr/>
+            <p:nvPr/>
+          </p:nvSpPr>
+          <p:spPr>
+            <a:xfrm rot="5400000" flipV="1">
+              <a:off x="474700" y="2960453"/>
+              <a:ext cx="4338960" cy="1133521"/>
+            </a:xfrm>
+            <a:prstGeom prst="triangle">
+              <a:avLst>
+                <a:gd name="adj" fmla="val 48620"/>
+              </a:avLst>
+            </a:prstGeom>
+            <a:noFill/>
+          </p:spPr>
+          <p:style>
+            <a:lnRef idx="2">
+              <a:schemeClr val="accent1">
+                <a:shade val="50000"/>
+              </a:schemeClr>
+            </a:lnRef>
+            <a:fillRef idx="1">
+              <a:schemeClr val="accent1"/>
+            </a:fillRef>
+            <a:effectRef idx="0">
+              <a:schemeClr val="accent1"/>
+            </a:effectRef>
+            <a:fontRef idx="minor">
+              <a:schemeClr val="lt1"/>
+            </a:fontRef>
+          </p:style>
+          <p:txBody>
+            <a:bodyPr rtlCol="0" anchor="ctr"/>
+            <a:lstStyle/>
+            <a:p>
+              <a:pPr algn="ctr"/>
+              <a:endParaRPr lang="en-US"/>
+            </a:p>
+          </p:txBody>
+        </p:sp>
+      </p:grpSp>
+      <p:grpSp>
+        <p:nvGrpSpPr>
+          <p:cNvPr id="165" name="Group 164">
+            <a:extLst>
+              <a:ext uri="{FF2B5EF4-FFF2-40B4-BE49-F238E27FC236}">
+                <a16:creationId xmlns:a16="http://schemas.microsoft.com/office/drawing/2014/main" id="{FECF9B79-6D66-44F0-B117-E2CA00923BF4}"/>
+              </a:ext>
+            </a:extLst>
+          </p:cNvPr>
+          <p:cNvGrpSpPr/>
+          <p:nvPr/>
+        </p:nvGrpSpPr>
+        <p:grpSpPr>
+          <a:xfrm>
+            <a:off x="7863547" y="3333315"/>
+            <a:ext cx="819799" cy="1438418"/>
+            <a:chOff x="4388944" y="1353816"/>
+            <a:chExt cx="2433927" cy="4338962"/>
+          </a:xfrm>
+        </p:grpSpPr>
+        <p:grpSp>
+          <p:nvGrpSpPr>
+            <p:cNvPr id="166" name="Group 165">
+              <a:extLst>
+                <a:ext uri="{FF2B5EF4-FFF2-40B4-BE49-F238E27FC236}">
+                  <a16:creationId xmlns:a16="http://schemas.microsoft.com/office/drawing/2014/main" id="{6B964E07-4FE0-4B76-BCFD-994BDE645B99}"/>
+                </a:ext>
+              </a:extLst>
+            </p:cNvPr>
+            <p:cNvGrpSpPr/>
+            <p:nvPr/>
+          </p:nvGrpSpPr>
+          <p:grpSpPr>
+            <a:xfrm>
+              <a:off x="4388944" y="2418919"/>
+              <a:ext cx="233608" cy="2129134"/>
+              <a:chOff x="1082809" y="2422835"/>
+              <a:chExt cx="233608" cy="2129134"/>
+            </a:xfrm>
+          </p:grpSpPr>
+          <p:sp>
+            <p:nvSpPr>
+              <p:cNvPr id="192" name="Rectangle 191">
+                <a:extLst>
+                  <a:ext uri="{FF2B5EF4-FFF2-40B4-BE49-F238E27FC236}">
+                    <a16:creationId xmlns:a16="http://schemas.microsoft.com/office/drawing/2014/main" id="{E389A294-D5BD-4198-B02E-35FCEA4F01C7}"/>
+                  </a:ext>
+                </a:extLst>
+              </p:cNvPr>
+              <p:cNvSpPr/>
+              <p:nvPr/>
+            </p:nvSpPr>
+            <p:spPr>
+              <a:xfrm>
+                <a:off x="1082809" y="2422835"/>
+                <a:ext cx="233608" cy="233608"/>
+              </a:xfrm>
+              <a:prstGeom prst="rect">
+                <a:avLst/>
+              </a:prstGeom>
+            </p:spPr>
+            <p:style>
+              <a:lnRef idx="2">
+                <a:schemeClr val="accent1">
+                  <a:shade val="50000"/>
+                </a:schemeClr>
+              </a:lnRef>
+              <a:fillRef idx="1">
+                <a:schemeClr val="accent1"/>
+              </a:fillRef>
+              <a:effectRef idx="0">
+                <a:schemeClr val="accent1"/>
+              </a:effectRef>
+              <a:fontRef idx="minor">
+                <a:schemeClr val="lt1"/>
+              </a:fontRef>
+            </p:style>
+            <p:txBody>
+              <a:bodyPr rtlCol="0" anchor="ctr"/>
+              <a:lstStyle/>
+              <a:p>
+                <a:pPr algn="ctr"/>
+                <a:endParaRPr lang="en-US"/>
+              </a:p>
+            </p:txBody>
+          </p:sp>
+          <p:sp>
+            <p:nvSpPr>
+              <p:cNvPr id="193" name="Rectangle 192">
+                <a:extLst>
+                  <a:ext uri="{FF2B5EF4-FFF2-40B4-BE49-F238E27FC236}">
+                    <a16:creationId xmlns:a16="http://schemas.microsoft.com/office/drawing/2014/main" id="{DF32E6E4-C6FC-4D7A-A69A-B79B60F33FC2}"/>
+                  </a:ext>
+                </a:extLst>
+              </p:cNvPr>
+              <p:cNvSpPr/>
+              <p:nvPr/>
+            </p:nvSpPr>
+            <p:spPr>
+              <a:xfrm>
+                <a:off x="1082809" y="2740588"/>
+                <a:ext cx="233608" cy="233608"/>
+              </a:xfrm>
+              <a:prstGeom prst="rect">
+                <a:avLst/>
+              </a:prstGeom>
+            </p:spPr>
+            <p:style>
+              <a:lnRef idx="2">
+                <a:schemeClr val="accent1">
+                  <a:shade val="50000"/>
+                </a:schemeClr>
+              </a:lnRef>
+              <a:fillRef idx="1">
+                <a:schemeClr val="accent1"/>
+              </a:fillRef>
+              <a:effectRef idx="0">
+                <a:schemeClr val="accent1"/>
+              </a:effectRef>
+              <a:fontRef idx="minor">
+                <a:schemeClr val="lt1"/>
+              </a:fontRef>
+            </p:style>
+            <p:txBody>
+              <a:bodyPr rtlCol="0" anchor="ctr"/>
+              <a:lstStyle/>
+              <a:p>
+                <a:pPr algn="ctr"/>
+                <a:endParaRPr lang="en-US"/>
+              </a:p>
+            </p:txBody>
+          </p:sp>
+          <p:sp>
+            <p:nvSpPr>
+              <p:cNvPr id="194" name="Rectangle 193">
+                <a:extLst>
+                  <a:ext uri="{FF2B5EF4-FFF2-40B4-BE49-F238E27FC236}">
+                    <a16:creationId xmlns:a16="http://schemas.microsoft.com/office/drawing/2014/main" id="{1F2E029A-8ADF-4AE7-B8EF-F81C17BA7FF2}"/>
+                  </a:ext>
+                </a:extLst>
+              </p:cNvPr>
+              <p:cNvSpPr/>
+              <p:nvPr/>
+            </p:nvSpPr>
+            <p:spPr>
+              <a:xfrm>
+                <a:off x="1082809" y="3054890"/>
+                <a:ext cx="233608" cy="233608"/>
+              </a:xfrm>
+              <a:prstGeom prst="rect">
+                <a:avLst/>
+              </a:prstGeom>
+            </p:spPr>
+            <p:style>
+              <a:lnRef idx="2">
+                <a:schemeClr val="accent1">
+                  <a:shade val="50000"/>
+                </a:schemeClr>
+              </a:lnRef>
+              <a:fillRef idx="1">
+                <a:schemeClr val="accent1"/>
+              </a:fillRef>
+              <a:effectRef idx="0">
+                <a:schemeClr val="accent1"/>
+              </a:effectRef>
+              <a:fontRef idx="minor">
+                <a:schemeClr val="lt1"/>
+              </a:fontRef>
+            </p:style>
+            <p:txBody>
+              <a:bodyPr rtlCol="0" anchor="ctr"/>
+              <a:lstStyle/>
+              <a:p>
+                <a:pPr algn="ctr"/>
+                <a:endParaRPr lang="en-US"/>
+              </a:p>
+            </p:txBody>
+          </p:sp>
+          <p:sp>
+            <p:nvSpPr>
+              <p:cNvPr id="195" name="Rectangle 194">
+                <a:extLst>
+                  <a:ext uri="{FF2B5EF4-FFF2-40B4-BE49-F238E27FC236}">
+                    <a16:creationId xmlns:a16="http://schemas.microsoft.com/office/drawing/2014/main" id="{CE97C603-DD2D-44BA-B49D-7FDCCA00E815}"/>
+                  </a:ext>
+                </a:extLst>
+              </p:cNvPr>
+              <p:cNvSpPr/>
+              <p:nvPr/>
+            </p:nvSpPr>
+            <p:spPr>
+              <a:xfrm>
+                <a:off x="1082809" y="3368879"/>
+                <a:ext cx="233608" cy="233608"/>
+              </a:xfrm>
+              <a:prstGeom prst="rect">
+                <a:avLst/>
+              </a:prstGeom>
+            </p:spPr>
+            <p:style>
+              <a:lnRef idx="2">
+                <a:schemeClr val="accent1">
+                  <a:shade val="50000"/>
+                </a:schemeClr>
+              </a:lnRef>
+              <a:fillRef idx="1">
+                <a:schemeClr val="accent1"/>
+              </a:fillRef>
+              <a:effectRef idx="0">
+                <a:schemeClr val="accent1"/>
+              </a:effectRef>
+              <a:fontRef idx="minor">
+                <a:schemeClr val="lt1"/>
+              </a:fontRef>
+            </p:style>
+            <p:txBody>
+              <a:bodyPr rtlCol="0" anchor="ctr"/>
+              <a:lstStyle/>
+              <a:p>
+                <a:pPr algn="ctr"/>
+                <a:endParaRPr lang="en-US"/>
+              </a:p>
+            </p:txBody>
+          </p:sp>
+          <p:sp>
+            <p:nvSpPr>
+              <p:cNvPr id="196" name="Rectangle 195">
+                <a:extLst>
+                  <a:ext uri="{FF2B5EF4-FFF2-40B4-BE49-F238E27FC236}">
+                    <a16:creationId xmlns:a16="http://schemas.microsoft.com/office/drawing/2014/main" id="{DB77535C-F825-45A0-B013-E0CFB605E585}"/>
+                  </a:ext>
+                </a:extLst>
+              </p:cNvPr>
+              <p:cNvSpPr/>
+              <p:nvPr/>
+            </p:nvSpPr>
+            <p:spPr>
+              <a:xfrm>
+                <a:off x="1082809" y="3689757"/>
+                <a:ext cx="233608" cy="233608"/>
+              </a:xfrm>
+              <a:prstGeom prst="rect">
+                <a:avLst/>
+              </a:prstGeom>
+            </p:spPr>
+            <p:style>
+              <a:lnRef idx="2">
+                <a:schemeClr val="accent1">
+                  <a:shade val="50000"/>
+                </a:schemeClr>
+              </a:lnRef>
+              <a:fillRef idx="1">
+                <a:schemeClr val="accent1"/>
+              </a:fillRef>
+              <a:effectRef idx="0">
+                <a:schemeClr val="accent1"/>
+              </a:effectRef>
+              <a:fontRef idx="minor">
+                <a:schemeClr val="lt1"/>
+              </a:fontRef>
+            </p:style>
+            <p:txBody>
+              <a:bodyPr rtlCol="0" anchor="ctr"/>
+              <a:lstStyle/>
+              <a:p>
+                <a:pPr algn="ctr"/>
+                <a:endParaRPr lang="en-US"/>
+              </a:p>
+            </p:txBody>
+          </p:sp>
+          <p:sp>
+            <p:nvSpPr>
+              <p:cNvPr id="197" name="Rectangle 196">
+                <a:extLst>
+                  <a:ext uri="{FF2B5EF4-FFF2-40B4-BE49-F238E27FC236}">
+                    <a16:creationId xmlns:a16="http://schemas.microsoft.com/office/drawing/2014/main" id="{0D041043-8EF1-425B-A889-2915D6A340C0}"/>
+                  </a:ext>
+                </a:extLst>
+              </p:cNvPr>
+              <p:cNvSpPr/>
+              <p:nvPr/>
+            </p:nvSpPr>
+            <p:spPr>
+              <a:xfrm>
+                <a:off x="1082809" y="4004059"/>
+                <a:ext cx="233608" cy="233608"/>
+              </a:xfrm>
+              <a:prstGeom prst="rect">
+                <a:avLst/>
+              </a:prstGeom>
+            </p:spPr>
+            <p:style>
+              <a:lnRef idx="2">
+                <a:schemeClr val="accent1">
+                  <a:shade val="50000"/>
+                </a:schemeClr>
+              </a:lnRef>
+              <a:fillRef idx="1">
+                <a:schemeClr val="accent1"/>
+              </a:fillRef>
+              <a:effectRef idx="0">
+                <a:schemeClr val="accent1"/>
+              </a:effectRef>
+              <a:fontRef idx="minor">
+                <a:schemeClr val="lt1"/>
+              </a:fontRef>
+            </p:style>
+            <p:txBody>
+              <a:bodyPr rtlCol="0" anchor="ctr"/>
+              <a:lstStyle/>
+              <a:p>
+                <a:pPr algn="ctr"/>
+                <a:endParaRPr lang="en-US"/>
+              </a:p>
+            </p:txBody>
+          </p:sp>
+          <p:sp>
+            <p:nvSpPr>
+              <p:cNvPr id="198" name="Rectangle 197">
+                <a:extLst>
+                  <a:ext uri="{FF2B5EF4-FFF2-40B4-BE49-F238E27FC236}">
+                    <a16:creationId xmlns:a16="http://schemas.microsoft.com/office/drawing/2014/main" id="{7DBAE4EC-E2F8-46F2-866F-63CB82E7E2B0}"/>
+                  </a:ext>
+                </a:extLst>
+              </p:cNvPr>
+              <p:cNvSpPr/>
+              <p:nvPr/>
+            </p:nvSpPr>
+            <p:spPr>
+              <a:xfrm>
+                <a:off x="1082809" y="4318361"/>
+                <a:ext cx="233608" cy="233608"/>
+              </a:xfrm>
+              <a:prstGeom prst="rect">
+                <a:avLst/>
+              </a:prstGeom>
+            </p:spPr>
+            <p:style>
+              <a:lnRef idx="2">
+                <a:schemeClr val="accent1">
+                  <a:shade val="50000"/>
+                </a:schemeClr>
+              </a:lnRef>
+              <a:fillRef idx="1">
+                <a:schemeClr val="accent1"/>
+              </a:fillRef>
+              <a:effectRef idx="0">
+                <a:schemeClr val="accent1"/>
+              </a:effectRef>
+              <a:fontRef idx="minor">
+                <a:schemeClr val="lt1"/>
+              </a:fontRef>
+            </p:style>
+            <p:txBody>
+              <a:bodyPr rtlCol="0" anchor="ctr"/>
+              <a:lstStyle/>
+              <a:p>
+                <a:pPr algn="ctr"/>
+                <a:endParaRPr lang="en-US"/>
+              </a:p>
+            </p:txBody>
+          </p:sp>
+        </p:grpSp>
+        <p:grpSp>
+          <p:nvGrpSpPr>
+            <p:cNvPr id="167" name="Group 166">
+              <a:extLst>
+                <a:ext uri="{FF2B5EF4-FFF2-40B4-BE49-F238E27FC236}">
+                  <a16:creationId xmlns:a16="http://schemas.microsoft.com/office/drawing/2014/main" id="{21BF1B98-E4C4-43B9-B720-447D0CF56BCF}"/>
+                </a:ext>
+              </a:extLst>
+            </p:cNvPr>
+            <p:cNvGrpSpPr/>
+            <p:nvPr/>
+          </p:nvGrpSpPr>
+          <p:grpSpPr>
+            <a:xfrm>
+              <a:off x="6589263" y="1353816"/>
+              <a:ext cx="233608" cy="4338962"/>
+              <a:chOff x="3325266" y="1239745"/>
+              <a:chExt cx="233608" cy="4338962"/>
+            </a:xfrm>
+            <a:solidFill>
+              <a:schemeClr val="accent4">
+                <a:lumMod val="40000"/>
+                <a:lumOff val="60000"/>
+              </a:schemeClr>
+            </a:solidFill>
+          </p:grpSpPr>
+          <p:grpSp>
+            <p:nvGrpSpPr>
+              <p:cNvPr id="176" name="Group 175">
+                <a:extLst>
+                  <a:ext uri="{FF2B5EF4-FFF2-40B4-BE49-F238E27FC236}">
+                    <a16:creationId xmlns:a16="http://schemas.microsoft.com/office/drawing/2014/main" id="{C80136BB-8653-4262-9C6D-8EBDD4F00330}"/>
+                  </a:ext>
+                </a:extLst>
+              </p:cNvPr>
+              <p:cNvGrpSpPr/>
+              <p:nvPr/>
+            </p:nvGrpSpPr>
+            <p:grpSpPr>
+              <a:xfrm>
+                <a:off x="3325266" y="1239745"/>
+                <a:ext cx="233608" cy="2129134"/>
+                <a:chOff x="1082809" y="2422835"/>
+                <a:chExt cx="233608" cy="2129134"/>
+              </a:xfrm>
+              <a:grpFill/>
+            </p:grpSpPr>
+            <p:sp>
+              <p:nvSpPr>
+                <p:cNvPr id="185" name="Rectangle 184">
+                  <a:extLst>
+                    <a:ext uri="{FF2B5EF4-FFF2-40B4-BE49-F238E27FC236}">
+                      <a16:creationId xmlns:a16="http://schemas.microsoft.com/office/drawing/2014/main" id="{869676AB-27BC-4F84-BE17-F9299EE7B91F}"/>
+                    </a:ext>
+                  </a:extLst>
+                </p:cNvPr>
+                <p:cNvSpPr/>
+                <p:nvPr/>
+              </p:nvSpPr>
+              <p:spPr>
+                <a:xfrm>
+                  <a:off x="1082809" y="2422835"/>
+                  <a:ext cx="233608" cy="233608"/>
+                </a:xfrm>
+                <a:prstGeom prst="rect">
+                  <a:avLst/>
+                </a:prstGeom>
+                <a:grpFill/>
+              </p:spPr>
+              <p:style>
+                <a:lnRef idx="2">
+                  <a:schemeClr val="accent1">
+                    <a:shade val="50000"/>
+                  </a:schemeClr>
+                </a:lnRef>
+                <a:fillRef idx="1">
+                  <a:schemeClr val="accent1"/>
+                </a:fillRef>
+                <a:effectRef idx="0">
+                  <a:schemeClr val="accent1"/>
+                </a:effectRef>
+                <a:fontRef idx="minor">
+                  <a:schemeClr val="lt1"/>
+                </a:fontRef>
+              </p:style>
+              <p:txBody>
+                <a:bodyPr rtlCol="0" anchor="ctr"/>
+                <a:lstStyle/>
+                <a:p>
+                  <a:pPr algn="ctr"/>
+                  <a:endParaRPr lang="en-US"/>
+                </a:p>
+              </p:txBody>
+            </p:sp>
+            <p:sp>
+              <p:nvSpPr>
+                <p:cNvPr id="186" name="Rectangle 185">
+                  <a:extLst>
+                    <a:ext uri="{FF2B5EF4-FFF2-40B4-BE49-F238E27FC236}">
+                      <a16:creationId xmlns:a16="http://schemas.microsoft.com/office/drawing/2014/main" id="{E6B69E9F-0067-4308-B6DF-4664A521BFA6}"/>
+                    </a:ext>
+                  </a:extLst>
+                </p:cNvPr>
+                <p:cNvSpPr/>
+                <p:nvPr/>
+              </p:nvSpPr>
+              <p:spPr>
+                <a:xfrm>
+                  <a:off x="1082809" y="2740588"/>
+                  <a:ext cx="233608" cy="233608"/>
+                </a:xfrm>
+                <a:prstGeom prst="rect">
+                  <a:avLst/>
+                </a:prstGeom>
+                <a:grpFill/>
+              </p:spPr>
+              <p:style>
+                <a:lnRef idx="2">
+                  <a:schemeClr val="accent1">
+                    <a:shade val="50000"/>
+                  </a:schemeClr>
+                </a:lnRef>
+                <a:fillRef idx="1">
+                  <a:schemeClr val="accent1"/>
+                </a:fillRef>
+                <a:effectRef idx="0">
+                  <a:schemeClr val="accent1"/>
+                </a:effectRef>
+                <a:fontRef idx="minor">
+                  <a:schemeClr val="lt1"/>
+                </a:fontRef>
+              </p:style>
+              <p:txBody>
+                <a:bodyPr rtlCol="0" anchor="ctr"/>
+                <a:lstStyle/>
+                <a:p>
+                  <a:pPr algn="ctr"/>
+                  <a:endParaRPr lang="en-US"/>
+                </a:p>
+              </p:txBody>
+            </p:sp>
+            <p:sp>
+              <p:nvSpPr>
+                <p:cNvPr id="187" name="Rectangle 186">
+                  <a:extLst>
+                    <a:ext uri="{FF2B5EF4-FFF2-40B4-BE49-F238E27FC236}">
+                      <a16:creationId xmlns:a16="http://schemas.microsoft.com/office/drawing/2014/main" id="{9DCC1DFE-02E6-4527-A40D-7B08E13B489A}"/>
+                    </a:ext>
+                  </a:extLst>
+                </p:cNvPr>
+                <p:cNvSpPr/>
+                <p:nvPr/>
+              </p:nvSpPr>
+              <p:spPr>
+                <a:xfrm>
+                  <a:off x="1082809" y="3054890"/>
+                  <a:ext cx="233608" cy="233608"/>
+                </a:xfrm>
+                <a:prstGeom prst="rect">
+                  <a:avLst/>
+                </a:prstGeom>
+                <a:grpFill/>
+              </p:spPr>
+              <p:style>
+                <a:lnRef idx="2">
+                  <a:schemeClr val="accent1">
+                    <a:shade val="50000"/>
+                  </a:schemeClr>
+                </a:lnRef>
+                <a:fillRef idx="1">
+                  <a:schemeClr val="accent1"/>
+                </a:fillRef>
+                <a:effectRef idx="0">
+                  <a:schemeClr val="accent1"/>
+                </a:effectRef>
+                <a:fontRef idx="minor">
+                  <a:schemeClr val="lt1"/>
+                </a:fontRef>
+              </p:style>
+              <p:txBody>
+                <a:bodyPr rtlCol="0" anchor="ctr"/>
+                <a:lstStyle/>
+                <a:p>
+                  <a:pPr algn="ctr"/>
+                  <a:endParaRPr lang="en-US"/>
+                </a:p>
+              </p:txBody>
+            </p:sp>
+            <p:sp>
+              <p:nvSpPr>
+                <p:cNvPr id="188" name="Rectangle 187">
+                  <a:extLst>
+                    <a:ext uri="{FF2B5EF4-FFF2-40B4-BE49-F238E27FC236}">
+                      <a16:creationId xmlns:a16="http://schemas.microsoft.com/office/drawing/2014/main" id="{A0A89376-F4FE-4BC9-A80E-69AD5BBF6E24}"/>
+                    </a:ext>
+                  </a:extLst>
+                </p:cNvPr>
+                <p:cNvSpPr/>
+                <p:nvPr/>
+              </p:nvSpPr>
+              <p:spPr>
+                <a:xfrm>
+                  <a:off x="1082809" y="3368879"/>
+                  <a:ext cx="233608" cy="233608"/>
+                </a:xfrm>
+                <a:prstGeom prst="rect">
+                  <a:avLst/>
+                </a:prstGeom>
+                <a:grpFill/>
+              </p:spPr>
+              <p:style>
+                <a:lnRef idx="2">
+                  <a:schemeClr val="accent1">
+                    <a:shade val="50000"/>
+                  </a:schemeClr>
+                </a:lnRef>
+                <a:fillRef idx="1">
+                  <a:schemeClr val="accent1"/>
+                </a:fillRef>
+                <a:effectRef idx="0">
+                  <a:schemeClr val="accent1"/>
+                </a:effectRef>
+                <a:fontRef idx="minor">
+                  <a:schemeClr val="lt1"/>
+                </a:fontRef>
+              </p:style>
+              <p:txBody>
+                <a:bodyPr rtlCol="0" anchor="ctr"/>
+                <a:lstStyle/>
+                <a:p>
+                  <a:pPr algn="ctr"/>
+                  <a:endParaRPr lang="en-US"/>
+                </a:p>
+              </p:txBody>
+            </p:sp>
+            <p:sp>
+              <p:nvSpPr>
+                <p:cNvPr id="189" name="Rectangle 188">
+                  <a:extLst>
+                    <a:ext uri="{FF2B5EF4-FFF2-40B4-BE49-F238E27FC236}">
+                      <a16:creationId xmlns:a16="http://schemas.microsoft.com/office/drawing/2014/main" id="{2BF5A235-B602-459C-871A-D80E06C3A452}"/>
+                    </a:ext>
+                  </a:extLst>
+                </p:cNvPr>
+                <p:cNvSpPr/>
+                <p:nvPr/>
+              </p:nvSpPr>
+              <p:spPr>
+                <a:xfrm>
+                  <a:off x="1082809" y="3689757"/>
+                  <a:ext cx="233608" cy="233608"/>
+                </a:xfrm>
+                <a:prstGeom prst="rect">
+                  <a:avLst/>
+                </a:prstGeom>
+                <a:grpFill/>
+              </p:spPr>
+              <p:style>
+                <a:lnRef idx="2">
+                  <a:schemeClr val="accent1">
+                    <a:shade val="50000"/>
+                  </a:schemeClr>
+                </a:lnRef>
+                <a:fillRef idx="1">
+                  <a:schemeClr val="accent1"/>
+                </a:fillRef>
+                <a:effectRef idx="0">
+                  <a:schemeClr val="accent1"/>
+                </a:effectRef>
+                <a:fontRef idx="minor">
+                  <a:schemeClr val="lt1"/>
+                </a:fontRef>
+              </p:style>
+              <p:txBody>
+                <a:bodyPr rtlCol="0" anchor="ctr"/>
+                <a:lstStyle/>
+                <a:p>
+                  <a:pPr algn="ctr"/>
+                  <a:endParaRPr lang="en-US"/>
+                </a:p>
+              </p:txBody>
+            </p:sp>
+            <p:sp>
+              <p:nvSpPr>
+                <p:cNvPr id="190" name="Rectangle 189">
+                  <a:extLst>
+                    <a:ext uri="{FF2B5EF4-FFF2-40B4-BE49-F238E27FC236}">
+                      <a16:creationId xmlns:a16="http://schemas.microsoft.com/office/drawing/2014/main" id="{E533C24C-B09E-48EE-B2B0-B070FBD93DCF}"/>
+                    </a:ext>
+                  </a:extLst>
+                </p:cNvPr>
+                <p:cNvSpPr/>
+                <p:nvPr/>
+              </p:nvSpPr>
+              <p:spPr>
+                <a:xfrm>
+                  <a:off x="1082809" y="4004059"/>
+                  <a:ext cx="233608" cy="233608"/>
+                </a:xfrm>
+                <a:prstGeom prst="rect">
+                  <a:avLst/>
+                </a:prstGeom>
+                <a:grpFill/>
+              </p:spPr>
+              <p:style>
+                <a:lnRef idx="2">
+                  <a:schemeClr val="accent1">
+                    <a:shade val="50000"/>
+                  </a:schemeClr>
+                </a:lnRef>
+                <a:fillRef idx="1">
+                  <a:schemeClr val="accent1"/>
+                </a:fillRef>
+                <a:effectRef idx="0">
+                  <a:schemeClr val="accent1"/>
+                </a:effectRef>
+                <a:fontRef idx="minor">
+                  <a:schemeClr val="lt1"/>
+                </a:fontRef>
+              </p:style>
+              <p:txBody>
+                <a:bodyPr rtlCol="0" anchor="ctr"/>
+                <a:lstStyle/>
+                <a:p>
+                  <a:pPr algn="ctr"/>
+                  <a:endParaRPr lang="en-US"/>
+                </a:p>
+              </p:txBody>
+            </p:sp>
+            <p:sp>
+              <p:nvSpPr>
+                <p:cNvPr id="191" name="Rectangle 190">
+                  <a:extLst>
+                    <a:ext uri="{FF2B5EF4-FFF2-40B4-BE49-F238E27FC236}">
+                      <a16:creationId xmlns:a16="http://schemas.microsoft.com/office/drawing/2014/main" id="{CDC525B1-A00F-48AD-B24F-AB8133A14599}"/>
+                    </a:ext>
+                  </a:extLst>
+                </p:cNvPr>
+                <p:cNvSpPr/>
+                <p:nvPr/>
+              </p:nvSpPr>
+              <p:spPr>
+                <a:xfrm>
+                  <a:off x="1082809" y="4318361"/>
+                  <a:ext cx="233608" cy="233608"/>
+                </a:xfrm>
+                <a:prstGeom prst="rect">
+                  <a:avLst/>
+                </a:prstGeom>
+                <a:grpFill/>
+              </p:spPr>
+              <p:style>
+                <a:lnRef idx="2">
+                  <a:schemeClr val="accent1">
+                    <a:shade val="50000"/>
+                  </a:schemeClr>
+                </a:lnRef>
+                <a:fillRef idx="1">
+                  <a:schemeClr val="accent1"/>
+                </a:fillRef>
+                <a:effectRef idx="0">
+                  <a:schemeClr val="accent1"/>
+                </a:effectRef>
+                <a:fontRef idx="minor">
+                  <a:schemeClr val="lt1"/>
+                </a:fontRef>
+              </p:style>
+              <p:txBody>
+                <a:bodyPr rtlCol="0" anchor="ctr"/>
+                <a:lstStyle/>
+                <a:p>
+                  <a:pPr algn="ctr"/>
+                  <a:endParaRPr lang="en-US"/>
+                </a:p>
+              </p:txBody>
+            </p:sp>
+          </p:grpSp>
+          <p:grpSp>
+            <p:nvGrpSpPr>
+              <p:cNvPr id="177" name="Group 176">
+                <a:extLst>
+                  <a:ext uri="{FF2B5EF4-FFF2-40B4-BE49-F238E27FC236}">
+                    <a16:creationId xmlns:a16="http://schemas.microsoft.com/office/drawing/2014/main" id="{11B2DEDB-D389-430E-8738-3A6FBDCD1D04}"/>
+                  </a:ext>
+                </a:extLst>
+              </p:cNvPr>
+              <p:cNvGrpSpPr/>
+              <p:nvPr/>
+            </p:nvGrpSpPr>
+            <p:grpSpPr>
+              <a:xfrm>
+                <a:off x="3325266" y="3449573"/>
+                <a:ext cx="233608" cy="2129134"/>
+                <a:chOff x="1082809" y="2422835"/>
+                <a:chExt cx="233608" cy="2129134"/>
+              </a:xfrm>
+              <a:grpFill/>
+            </p:grpSpPr>
+            <p:sp>
+              <p:nvSpPr>
+                <p:cNvPr id="178" name="Rectangle 177">
+                  <a:extLst>
+                    <a:ext uri="{FF2B5EF4-FFF2-40B4-BE49-F238E27FC236}">
+                      <a16:creationId xmlns:a16="http://schemas.microsoft.com/office/drawing/2014/main" id="{76AF6BE2-6C4A-4B9B-B2C3-3089E0F71E45}"/>
+                    </a:ext>
+                  </a:extLst>
+                </p:cNvPr>
+                <p:cNvSpPr/>
+                <p:nvPr/>
+              </p:nvSpPr>
+              <p:spPr>
+                <a:xfrm>
+                  <a:off x="1082809" y="2422835"/>
+                  <a:ext cx="233608" cy="233608"/>
+                </a:xfrm>
+                <a:prstGeom prst="rect">
+                  <a:avLst/>
+                </a:prstGeom>
+                <a:grpFill/>
+              </p:spPr>
+              <p:style>
+                <a:lnRef idx="2">
+                  <a:schemeClr val="accent1">
+                    <a:shade val="50000"/>
+                  </a:schemeClr>
+                </a:lnRef>
+                <a:fillRef idx="1">
+                  <a:schemeClr val="accent1"/>
+                </a:fillRef>
+                <a:effectRef idx="0">
+                  <a:schemeClr val="accent1"/>
+                </a:effectRef>
+                <a:fontRef idx="minor">
+                  <a:schemeClr val="lt1"/>
+                </a:fontRef>
+              </p:style>
+              <p:txBody>
+                <a:bodyPr rtlCol="0" anchor="ctr"/>
+                <a:lstStyle/>
+                <a:p>
+                  <a:pPr algn="ctr"/>
+                  <a:endParaRPr lang="en-US"/>
+                </a:p>
+              </p:txBody>
+            </p:sp>
+            <p:sp>
+              <p:nvSpPr>
+                <p:cNvPr id="179" name="Rectangle 178">
+                  <a:extLst>
+                    <a:ext uri="{FF2B5EF4-FFF2-40B4-BE49-F238E27FC236}">
+                      <a16:creationId xmlns:a16="http://schemas.microsoft.com/office/drawing/2014/main" id="{76282707-B431-49F0-B41D-982C470DB04B}"/>
+                    </a:ext>
+                  </a:extLst>
+                </p:cNvPr>
+                <p:cNvSpPr/>
+                <p:nvPr/>
+              </p:nvSpPr>
+              <p:spPr>
+                <a:xfrm>
+                  <a:off x="1082809" y="2740588"/>
+                  <a:ext cx="233608" cy="233608"/>
+                </a:xfrm>
+                <a:prstGeom prst="rect">
+                  <a:avLst/>
+                </a:prstGeom>
+                <a:grpFill/>
+              </p:spPr>
+              <p:style>
+                <a:lnRef idx="2">
+                  <a:schemeClr val="accent1">
+                    <a:shade val="50000"/>
+                  </a:schemeClr>
+                </a:lnRef>
+                <a:fillRef idx="1">
+                  <a:schemeClr val="accent1"/>
+                </a:fillRef>
+                <a:effectRef idx="0">
+                  <a:schemeClr val="accent1"/>
+                </a:effectRef>
+                <a:fontRef idx="minor">
+                  <a:schemeClr val="lt1"/>
+                </a:fontRef>
+              </p:style>
+              <p:txBody>
+                <a:bodyPr rtlCol="0" anchor="ctr"/>
+                <a:lstStyle/>
+                <a:p>
+                  <a:pPr algn="ctr"/>
+                  <a:endParaRPr lang="en-US"/>
+                </a:p>
+              </p:txBody>
+            </p:sp>
+            <p:sp>
+              <p:nvSpPr>
+                <p:cNvPr id="180" name="Rectangle 179">
+                  <a:extLst>
+                    <a:ext uri="{FF2B5EF4-FFF2-40B4-BE49-F238E27FC236}">
+                      <a16:creationId xmlns:a16="http://schemas.microsoft.com/office/drawing/2014/main" id="{6FE4A2EE-B223-4C57-A3EE-7F374DE21277}"/>
+                    </a:ext>
+                  </a:extLst>
+                </p:cNvPr>
+                <p:cNvSpPr/>
+                <p:nvPr/>
+              </p:nvSpPr>
+              <p:spPr>
+                <a:xfrm>
+                  <a:off x="1082809" y="3054890"/>
+                  <a:ext cx="233608" cy="233608"/>
+                </a:xfrm>
+                <a:prstGeom prst="rect">
+                  <a:avLst/>
+                </a:prstGeom>
+                <a:grpFill/>
+              </p:spPr>
+              <p:style>
+                <a:lnRef idx="2">
+                  <a:schemeClr val="accent1">
+                    <a:shade val="50000"/>
+                  </a:schemeClr>
+                </a:lnRef>
+                <a:fillRef idx="1">
+                  <a:schemeClr val="accent1"/>
+                </a:fillRef>
+                <a:effectRef idx="0">
+                  <a:schemeClr val="accent1"/>
+                </a:effectRef>
+                <a:fontRef idx="minor">
+                  <a:schemeClr val="lt1"/>
+                </a:fontRef>
+              </p:style>
+              <p:txBody>
+                <a:bodyPr rtlCol="0" anchor="ctr"/>
+                <a:lstStyle/>
+                <a:p>
+                  <a:pPr algn="ctr"/>
+                  <a:endParaRPr lang="en-US"/>
+                </a:p>
+              </p:txBody>
+            </p:sp>
+            <p:sp>
+              <p:nvSpPr>
+                <p:cNvPr id="181" name="Rectangle 180">
+                  <a:extLst>
+                    <a:ext uri="{FF2B5EF4-FFF2-40B4-BE49-F238E27FC236}">
+                      <a16:creationId xmlns:a16="http://schemas.microsoft.com/office/drawing/2014/main" id="{2064CAB4-C0AF-4E57-8C75-6B5EE1D564FE}"/>
+                    </a:ext>
+                  </a:extLst>
+                </p:cNvPr>
+                <p:cNvSpPr/>
+                <p:nvPr/>
+              </p:nvSpPr>
+              <p:spPr>
+                <a:xfrm>
+                  <a:off x="1082809" y="3368879"/>
+                  <a:ext cx="233608" cy="233608"/>
+                </a:xfrm>
+                <a:prstGeom prst="rect">
+                  <a:avLst/>
+                </a:prstGeom>
+                <a:grpFill/>
+              </p:spPr>
+              <p:style>
+                <a:lnRef idx="2">
+                  <a:schemeClr val="accent1">
+                    <a:shade val="50000"/>
+                  </a:schemeClr>
+                </a:lnRef>
+                <a:fillRef idx="1">
+                  <a:schemeClr val="accent1"/>
+                </a:fillRef>
+                <a:effectRef idx="0">
+                  <a:schemeClr val="accent1"/>
+                </a:effectRef>
+                <a:fontRef idx="minor">
+                  <a:schemeClr val="lt1"/>
+                </a:fontRef>
+              </p:style>
+              <p:txBody>
+                <a:bodyPr rtlCol="0" anchor="ctr"/>
+                <a:lstStyle/>
+                <a:p>
+                  <a:pPr algn="ctr"/>
+                  <a:endParaRPr lang="en-US"/>
+                </a:p>
+              </p:txBody>
+            </p:sp>
+            <p:sp>
+              <p:nvSpPr>
+                <p:cNvPr id="182" name="Rectangle 181">
+                  <a:extLst>
+                    <a:ext uri="{FF2B5EF4-FFF2-40B4-BE49-F238E27FC236}">
+                      <a16:creationId xmlns:a16="http://schemas.microsoft.com/office/drawing/2014/main" id="{17B99DFD-C050-43FD-88B8-730B8611E9D4}"/>
+                    </a:ext>
+                  </a:extLst>
+                </p:cNvPr>
+                <p:cNvSpPr/>
+                <p:nvPr/>
+              </p:nvSpPr>
+              <p:spPr>
+                <a:xfrm>
+                  <a:off x="1082809" y="3689757"/>
+                  <a:ext cx="233608" cy="233608"/>
+                </a:xfrm>
+                <a:prstGeom prst="rect">
+                  <a:avLst/>
+                </a:prstGeom>
+                <a:grpFill/>
+              </p:spPr>
+              <p:style>
+                <a:lnRef idx="2">
+                  <a:schemeClr val="accent1">
+                    <a:shade val="50000"/>
+                  </a:schemeClr>
+                </a:lnRef>
+                <a:fillRef idx="1">
+                  <a:schemeClr val="accent1"/>
+                </a:fillRef>
+                <a:effectRef idx="0">
+                  <a:schemeClr val="accent1"/>
+                </a:effectRef>
+                <a:fontRef idx="minor">
+                  <a:schemeClr val="lt1"/>
+                </a:fontRef>
+              </p:style>
+              <p:txBody>
+                <a:bodyPr rtlCol="0" anchor="ctr"/>
+                <a:lstStyle/>
+                <a:p>
+                  <a:pPr algn="ctr"/>
+                  <a:endParaRPr lang="en-US"/>
+                </a:p>
+              </p:txBody>
+            </p:sp>
+            <p:sp>
+              <p:nvSpPr>
+                <p:cNvPr id="183" name="Rectangle 182">
+                  <a:extLst>
+                    <a:ext uri="{FF2B5EF4-FFF2-40B4-BE49-F238E27FC236}">
+                      <a16:creationId xmlns:a16="http://schemas.microsoft.com/office/drawing/2014/main" id="{D747CBDF-2CD3-4A83-BA34-C9C670E430F1}"/>
+                    </a:ext>
+                  </a:extLst>
+                </p:cNvPr>
+                <p:cNvSpPr/>
+                <p:nvPr/>
+              </p:nvSpPr>
+              <p:spPr>
+                <a:xfrm>
+                  <a:off x="1082809" y="4004059"/>
+                  <a:ext cx="233608" cy="233608"/>
+                </a:xfrm>
+                <a:prstGeom prst="rect">
+                  <a:avLst/>
+                </a:prstGeom>
+                <a:grpFill/>
+              </p:spPr>
+              <p:style>
+                <a:lnRef idx="2">
+                  <a:schemeClr val="accent1">
+                    <a:shade val="50000"/>
+                  </a:schemeClr>
+                </a:lnRef>
+                <a:fillRef idx="1">
+                  <a:schemeClr val="accent1"/>
+                </a:fillRef>
+                <a:effectRef idx="0">
+                  <a:schemeClr val="accent1"/>
+                </a:effectRef>
+                <a:fontRef idx="minor">
+                  <a:schemeClr val="lt1"/>
+                </a:fontRef>
+              </p:style>
+              <p:txBody>
+                <a:bodyPr rtlCol="0" anchor="ctr"/>
+                <a:lstStyle/>
+                <a:p>
+                  <a:pPr algn="ctr"/>
+                  <a:endParaRPr lang="en-US"/>
+                </a:p>
+              </p:txBody>
+            </p:sp>
+            <p:sp>
+              <p:nvSpPr>
+                <p:cNvPr id="184" name="Rectangle 183">
+                  <a:extLst>
+                    <a:ext uri="{FF2B5EF4-FFF2-40B4-BE49-F238E27FC236}">
+                      <a16:creationId xmlns:a16="http://schemas.microsoft.com/office/drawing/2014/main" id="{D7C3747E-8524-497B-ACEB-7AC4929DBBFC}"/>
+                    </a:ext>
+                  </a:extLst>
+                </p:cNvPr>
+                <p:cNvSpPr/>
+                <p:nvPr/>
+              </p:nvSpPr>
+              <p:spPr>
+                <a:xfrm>
+                  <a:off x="1082809" y="4318361"/>
+                  <a:ext cx="233608" cy="233608"/>
+                </a:xfrm>
+                <a:prstGeom prst="rect">
+                  <a:avLst/>
+                </a:prstGeom>
+                <a:grpFill/>
+              </p:spPr>
+              <p:style>
+                <a:lnRef idx="2">
+                  <a:schemeClr val="accent1">
+                    <a:shade val="50000"/>
+                  </a:schemeClr>
+                </a:lnRef>
+                <a:fillRef idx="1">
+                  <a:schemeClr val="accent1"/>
+                </a:fillRef>
+                <a:effectRef idx="0">
+                  <a:schemeClr val="accent1"/>
+                </a:effectRef>
+                <a:fontRef idx="minor">
+                  <a:schemeClr val="lt1"/>
+                </a:fontRef>
+              </p:style>
+              <p:txBody>
+                <a:bodyPr rtlCol="0" anchor="ctr"/>
+                <a:lstStyle/>
+                <a:p>
+                  <a:pPr algn="ctr"/>
+                  <a:endParaRPr lang="en-US"/>
+                </a:p>
+              </p:txBody>
+            </p:sp>
+          </p:grpSp>
+        </p:grpSp>
+        <p:sp>
+          <p:nvSpPr>
+            <p:cNvPr id="168" name="Isosceles Triangle 167">
+              <a:extLst>
+                <a:ext uri="{FF2B5EF4-FFF2-40B4-BE49-F238E27FC236}">
+                  <a16:creationId xmlns:a16="http://schemas.microsoft.com/office/drawing/2014/main" id="{EC4DFD1A-19B9-42D9-836C-886439023285}"/>
+                </a:ext>
+              </a:extLst>
+            </p:cNvPr>
+            <p:cNvSpPr/>
+            <p:nvPr/>
+          </p:nvSpPr>
+          <p:spPr>
+            <a:xfrm rot="5400000">
+              <a:off x="3870774" y="3260178"/>
+              <a:ext cx="2093025" cy="405995"/>
+            </a:xfrm>
+            <a:prstGeom prst="triangle">
+              <a:avLst>
+                <a:gd name="adj" fmla="val 49008"/>
+              </a:avLst>
+            </a:prstGeom>
+            <a:noFill/>
+          </p:spPr>
+          <p:style>
+            <a:lnRef idx="2">
+              <a:schemeClr val="accent1">
+                <a:shade val="50000"/>
+              </a:schemeClr>
+            </a:lnRef>
+            <a:fillRef idx="1">
+              <a:schemeClr val="accent1"/>
+            </a:fillRef>
+            <a:effectRef idx="0">
+              <a:schemeClr val="accent1"/>
+            </a:effectRef>
+            <a:fontRef idx="minor">
+              <a:schemeClr val="lt1"/>
+            </a:fontRef>
+          </p:style>
+          <p:txBody>
+            <a:bodyPr rtlCol="0" anchor="ctr"/>
+            <a:lstStyle/>
+            <a:p>
+              <a:pPr algn="ctr"/>
+              <a:endParaRPr lang="en-US"/>
+            </a:p>
+          </p:txBody>
+        </p:sp>
+        <p:sp>
+          <p:nvSpPr>
+            <p:cNvPr id="169" name="Isosceles Triangle 168">
+              <a:extLst>
+                <a:ext uri="{FF2B5EF4-FFF2-40B4-BE49-F238E27FC236}">
+                  <a16:creationId xmlns:a16="http://schemas.microsoft.com/office/drawing/2014/main" id="{4C839370-26DA-4E53-8F7D-C7C440160125}"/>
+                </a:ext>
+              </a:extLst>
+            </p:cNvPr>
+            <p:cNvSpPr/>
+            <p:nvPr/>
+          </p:nvSpPr>
+          <p:spPr>
+            <a:xfrm rot="5400000" flipV="1">
+              <a:off x="4107011" y="3261965"/>
+              <a:ext cx="4326022" cy="509724"/>
+            </a:xfrm>
+            <a:prstGeom prst="triangle">
+              <a:avLst>
+                <a:gd name="adj" fmla="val 48620"/>
+              </a:avLst>
+            </a:prstGeom>
+            <a:noFill/>
+          </p:spPr>
+          <p:style>
+            <a:lnRef idx="2">
+              <a:schemeClr val="accent1">
+                <a:shade val="50000"/>
+              </a:schemeClr>
+            </a:lnRef>
+            <a:fillRef idx="1">
+              <a:schemeClr val="accent1"/>
+            </a:fillRef>
+            <a:effectRef idx="0">
+              <a:schemeClr val="accent1"/>
+            </a:effectRef>
+            <a:fontRef idx="minor">
+              <a:schemeClr val="lt1"/>
+            </a:fontRef>
+          </p:style>
+          <p:txBody>
+            <a:bodyPr rtlCol="0" anchor="ctr"/>
+            <a:lstStyle/>
+            <a:p>
+              <a:pPr algn="ctr"/>
+              <a:endParaRPr lang="en-US"/>
+            </a:p>
+          </p:txBody>
+        </p:sp>
+        <p:grpSp>
+          <p:nvGrpSpPr>
+            <p:cNvPr id="170" name="Group 169">
+              <a:extLst>
+                <a:ext uri="{FF2B5EF4-FFF2-40B4-BE49-F238E27FC236}">
+                  <a16:creationId xmlns:a16="http://schemas.microsoft.com/office/drawing/2014/main" id="{12354116-5514-4466-84F0-6D20478F7737}"/>
+                </a:ext>
+              </a:extLst>
+            </p:cNvPr>
+            <p:cNvGrpSpPr/>
+            <p:nvPr/>
+          </p:nvGrpSpPr>
+          <p:grpSpPr>
+            <a:xfrm>
+              <a:off x="5441706" y="3026708"/>
+              <a:ext cx="233608" cy="861899"/>
+              <a:chOff x="1082809" y="2740588"/>
+              <a:chExt cx="233608" cy="861899"/>
+            </a:xfrm>
+            <a:solidFill>
+              <a:schemeClr val="accent1">
+                <a:lumMod val="40000"/>
+                <a:lumOff val="60000"/>
+              </a:schemeClr>
+            </a:solidFill>
+          </p:grpSpPr>
+          <p:sp>
+            <p:nvSpPr>
+              <p:cNvPr id="173" name="Rectangle 172">
+                <a:extLst>
+                  <a:ext uri="{FF2B5EF4-FFF2-40B4-BE49-F238E27FC236}">
+                    <a16:creationId xmlns:a16="http://schemas.microsoft.com/office/drawing/2014/main" id="{3F30CD32-E223-4D46-814F-0F4E664BB650}"/>
+                  </a:ext>
+                </a:extLst>
+              </p:cNvPr>
+              <p:cNvSpPr/>
+              <p:nvPr/>
+            </p:nvSpPr>
+            <p:spPr>
+              <a:xfrm>
+                <a:off x="1082809" y="2740588"/>
+                <a:ext cx="233608" cy="233608"/>
+              </a:xfrm>
+              <a:prstGeom prst="rect">
+                <a:avLst/>
+              </a:prstGeom>
+              <a:grpFill/>
+            </p:spPr>
+            <p:style>
+              <a:lnRef idx="2">
+                <a:schemeClr val="accent1">
+                  <a:shade val="50000"/>
+                </a:schemeClr>
+              </a:lnRef>
+              <a:fillRef idx="1">
+                <a:schemeClr val="accent1"/>
+              </a:fillRef>
+              <a:effectRef idx="0">
+                <a:schemeClr val="accent1"/>
+              </a:effectRef>
+              <a:fontRef idx="minor">
+                <a:schemeClr val="lt1"/>
+              </a:fontRef>
+            </p:style>
+            <p:txBody>
+              <a:bodyPr rtlCol="0" anchor="ctr"/>
+              <a:lstStyle/>
+              <a:p>
+                <a:pPr algn="ctr"/>
+                <a:endParaRPr lang="en-US"/>
+              </a:p>
+            </p:txBody>
+          </p:sp>
+          <p:sp>
+            <p:nvSpPr>
+              <p:cNvPr id="174" name="Rectangle 173">
+                <a:extLst>
+                  <a:ext uri="{FF2B5EF4-FFF2-40B4-BE49-F238E27FC236}">
+                    <a16:creationId xmlns:a16="http://schemas.microsoft.com/office/drawing/2014/main" id="{C98CD7E9-5F6A-4984-A065-9CF8A63E19DC}"/>
+                  </a:ext>
+                </a:extLst>
+              </p:cNvPr>
+              <p:cNvSpPr/>
+              <p:nvPr/>
+            </p:nvSpPr>
+            <p:spPr>
+              <a:xfrm>
+                <a:off x="1082809" y="3054890"/>
+                <a:ext cx="233608" cy="233608"/>
+              </a:xfrm>
+              <a:prstGeom prst="rect">
+                <a:avLst/>
+              </a:prstGeom>
+              <a:grpFill/>
+            </p:spPr>
+            <p:style>
+              <a:lnRef idx="2">
+                <a:schemeClr val="accent1">
+                  <a:shade val="50000"/>
+                </a:schemeClr>
+              </a:lnRef>
+              <a:fillRef idx="1">
+                <a:schemeClr val="accent1"/>
+              </a:fillRef>
+              <a:effectRef idx="0">
+                <a:schemeClr val="accent1"/>
+              </a:effectRef>
+              <a:fontRef idx="minor">
+                <a:schemeClr val="lt1"/>
+              </a:fontRef>
+            </p:style>
+            <p:txBody>
+              <a:bodyPr rtlCol="0" anchor="ctr"/>
+              <a:lstStyle/>
+              <a:p>
+                <a:pPr algn="ctr"/>
+                <a:endParaRPr lang="en-US"/>
+              </a:p>
+            </p:txBody>
+          </p:sp>
+          <p:sp>
+            <p:nvSpPr>
+              <p:cNvPr id="175" name="Rectangle 174">
+                <a:extLst>
+                  <a:ext uri="{FF2B5EF4-FFF2-40B4-BE49-F238E27FC236}">
+                    <a16:creationId xmlns:a16="http://schemas.microsoft.com/office/drawing/2014/main" id="{474ADB9A-DD96-4571-B398-E992AEBDD412}"/>
+                  </a:ext>
+                </a:extLst>
+              </p:cNvPr>
+              <p:cNvSpPr/>
+              <p:nvPr/>
+            </p:nvSpPr>
+            <p:spPr>
+              <a:xfrm>
+                <a:off x="1082809" y="3368879"/>
+                <a:ext cx="233608" cy="233608"/>
+              </a:xfrm>
+              <a:prstGeom prst="rect">
+                <a:avLst/>
+              </a:prstGeom>
+              <a:grpFill/>
+            </p:spPr>
+            <p:style>
+              <a:lnRef idx="2">
+                <a:schemeClr val="accent1">
+                  <a:shade val="50000"/>
+                </a:schemeClr>
+              </a:lnRef>
+              <a:fillRef idx="1">
+                <a:schemeClr val="accent1"/>
+              </a:fillRef>
+              <a:effectRef idx="0">
+                <a:schemeClr val="accent1"/>
+              </a:effectRef>
+              <a:fontRef idx="minor">
+                <a:schemeClr val="lt1"/>
+              </a:fontRef>
+            </p:style>
+            <p:txBody>
+              <a:bodyPr rtlCol="0" anchor="ctr"/>
+              <a:lstStyle/>
+              <a:p>
+                <a:pPr algn="ctr"/>
+                <a:endParaRPr lang="en-US"/>
+              </a:p>
+            </p:txBody>
+          </p:sp>
+        </p:grpSp>
+        <p:sp>
+          <p:nvSpPr>
+            <p:cNvPr id="171" name="Isosceles Triangle 170">
+              <a:extLst>
+                <a:ext uri="{FF2B5EF4-FFF2-40B4-BE49-F238E27FC236}">
+                  <a16:creationId xmlns:a16="http://schemas.microsoft.com/office/drawing/2014/main" id="{33F9AECB-4F8D-4F29-A87D-DE1498C8B25E}"/>
+                </a:ext>
+              </a:extLst>
+            </p:cNvPr>
+            <p:cNvSpPr/>
+            <p:nvPr/>
+          </p:nvSpPr>
+          <p:spPr>
+            <a:xfrm rot="5400000" flipV="1">
+              <a:off x="4842212" y="3325644"/>
+              <a:ext cx="820177" cy="264029"/>
+            </a:xfrm>
+            <a:prstGeom prst="triangle">
+              <a:avLst>
+                <a:gd name="adj" fmla="val 48620"/>
+              </a:avLst>
+            </a:prstGeom>
+            <a:noFill/>
+          </p:spPr>
+          <p:style>
+            <a:lnRef idx="2">
+              <a:schemeClr val="accent1">
+                <a:shade val="50000"/>
+              </a:schemeClr>
+            </a:lnRef>
+            <a:fillRef idx="1">
+              <a:schemeClr val="accent1"/>
+            </a:fillRef>
+            <a:effectRef idx="0">
+              <a:schemeClr val="accent1"/>
+            </a:effectRef>
+            <a:fontRef idx="minor">
+              <a:schemeClr val="lt1"/>
+            </a:fontRef>
+          </p:style>
+          <p:txBody>
+            <a:bodyPr rtlCol="0" anchor="ctr"/>
+            <a:lstStyle/>
+            <a:p>
+              <a:pPr algn="ctr"/>
+              <a:endParaRPr lang="en-US"/>
+            </a:p>
+          </p:txBody>
+        </p:sp>
+        <p:sp>
+          <p:nvSpPr>
+            <p:cNvPr id="172" name="Isosceles Triangle 171">
+              <a:extLst>
+                <a:ext uri="{FF2B5EF4-FFF2-40B4-BE49-F238E27FC236}">
+                  <a16:creationId xmlns:a16="http://schemas.microsoft.com/office/drawing/2014/main" id="{B18A9E9B-CA04-46A3-9E01-CE07F49809AA}"/>
+                </a:ext>
+              </a:extLst>
+            </p:cNvPr>
+            <p:cNvSpPr/>
+            <p:nvPr/>
+          </p:nvSpPr>
+          <p:spPr>
+            <a:xfrm rot="5400000">
+              <a:off x="5458308" y="3317945"/>
+              <a:ext cx="820178" cy="279428"/>
+            </a:xfrm>
+            <a:prstGeom prst="triangle">
+              <a:avLst>
+                <a:gd name="adj" fmla="val 48620"/>
+              </a:avLst>
+            </a:prstGeom>
+            <a:noFill/>
+          </p:spPr>
+          <p:style>
+            <a:lnRef idx="2">
+              <a:schemeClr val="accent1">
+                <a:shade val="50000"/>
+              </a:schemeClr>
+            </a:lnRef>
+            <a:fillRef idx="1">
+              <a:schemeClr val="accent1"/>
+            </a:fillRef>
+            <a:effectRef idx="0">
+              <a:schemeClr val="accent1"/>
+            </a:effectRef>
+            <a:fontRef idx="minor">
+              <a:schemeClr val="lt1"/>
+            </a:fontRef>
+          </p:style>
+          <p:txBody>
+            <a:bodyPr rtlCol="0" anchor="ctr"/>
+            <a:lstStyle/>
+            <a:p>
+              <a:pPr algn="ctr"/>
+              <a:endParaRPr lang="en-US"/>
+            </a:p>
+          </p:txBody>
+        </p:sp>
+      </p:grpSp>
+      <p:sp>
+        <p:nvSpPr>
+          <p:cNvPr id="199" name="Oval 198">
+            <a:extLst>
+              <a:ext uri="{FF2B5EF4-FFF2-40B4-BE49-F238E27FC236}">
+                <a16:creationId xmlns:a16="http://schemas.microsoft.com/office/drawing/2014/main" id="{DF675E58-57F9-446C-89FD-A1C242D43551}"/>
+              </a:ext>
+            </a:extLst>
+          </p:cNvPr>
+          <p:cNvSpPr/>
+          <p:nvPr/>
+        </p:nvSpPr>
+        <p:spPr>
+          <a:xfrm>
+            <a:off x="9215075" y="2896478"/>
+            <a:ext cx="699495" cy="699495"/>
+          </a:xfrm>
+          <a:prstGeom prst="ellipse">
+            <a:avLst/>
+          </a:prstGeom>
+        </p:spPr>
+        <p:style>
+          <a:lnRef idx="2">
+            <a:schemeClr val="accent1">
+              <a:shade val="50000"/>
+            </a:schemeClr>
+          </a:lnRef>
+          <a:fillRef idx="1">
+            <a:schemeClr val="accent1"/>
+          </a:fillRef>
+          <a:effectRef idx="0">
+            <a:schemeClr val="accent1"/>
+          </a:effectRef>
+          <a:fontRef idx="minor">
+            <a:schemeClr val="lt1"/>
+          </a:fontRef>
+        </p:style>
+        <p:txBody>
+          <a:bodyPr rtlCol="0" anchor="ctr"/>
+          <a:lstStyle/>
+          <a:p>
+            <a:pPr algn="ctr"/>
+            <a:r>
+              <a:rPr lang="en-US"/>
+              <a:t>+</a:t>
+            </a:r>
+          </a:p>
+        </p:txBody>
+      </p:sp>
+      <p:cxnSp>
+        <p:nvCxnSpPr>
+          <p:cNvPr id="201" name="Straight Arrow Connector 200">
+            <a:extLst>
+              <a:ext uri="{FF2B5EF4-FFF2-40B4-BE49-F238E27FC236}">
+                <a16:creationId xmlns:a16="http://schemas.microsoft.com/office/drawing/2014/main" id="{4FBE1C32-CD7D-40D0-BB7B-1A0C2F0870DF}"/>
+              </a:ext>
+            </a:extLst>
+          </p:cNvPr>
+          <p:cNvCxnSpPr>
+            <a:stCxn id="144" idx="3"/>
+            <a:endCxn id="199" idx="2"/>
+          </p:cNvCxnSpPr>
+          <p:nvPr/>
+        </p:nvCxnSpPr>
+        <p:spPr>
+          <a:xfrm>
+            <a:off x="8683345" y="2580271"/>
+            <a:ext cx="531730" cy="665955"/>
+          </a:xfrm>
+          <a:prstGeom prst="straightConnector1">
+            <a:avLst/>
+          </a:prstGeom>
+          <a:ln>
+            <a:tailEnd type="triangle"/>
+          </a:ln>
+        </p:spPr>
+        <p:style>
+          <a:lnRef idx="1">
+            <a:schemeClr val="accent1"/>
+          </a:lnRef>
+          <a:fillRef idx="0">
+            <a:schemeClr val="accent1"/>
+          </a:fillRef>
+          <a:effectRef idx="0">
+            <a:schemeClr val="accent1"/>
+          </a:effectRef>
+          <a:fontRef idx="minor">
+            <a:schemeClr val="tx1"/>
+          </a:fontRef>
+        </p:style>
+      </p:cxnSp>
+      <p:cxnSp>
+        <p:nvCxnSpPr>
+          <p:cNvPr id="202" name="Straight Arrow Connector 201">
+            <a:extLst>
+              <a:ext uri="{FF2B5EF4-FFF2-40B4-BE49-F238E27FC236}">
+                <a16:creationId xmlns:a16="http://schemas.microsoft.com/office/drawing/2014/main" id="{9CC58EBC-123D-40B3-953A-6131F9A0316E}"/>
+              </a:ext>
+            </a:extLst>
+          </p:cNvPr>
+          <p:cNvCxnSpPr>
+            <a:cxnSpLocks/>
+            <a:stCxn id="178" idx="3"/>
+            <a:endCxn id="199" idx="2"/>
+          </p:cNvCxnSpPr>
+          <p:nvPr/>
+        </p:nvCxnSpPr>
+        <p:spPr>
+          <a:xfrm flipV="1">
+            <a:off x="8683346" y="3246226"/>
+            <a:ext cx="531729" cy="858396"/>
+          </a:xfrm>
+          <a:prstGeom prst="straightConnector1">
+            <a:avLst/>
+          </a:prstGeom>
+          <a:ln>
+            <a:tailEnd type="triangle"/>
+          </a:ln>
+        </p:spPr>
+        <p:style>
+          <a:lnRef idx="1">
+            <a:schemeClr val="accent1"/>
+          </a:lnRef>
+          <a:fillRef idx="0">
+            <a:schemeClr val="accent1"/>
+          </a:fillRef>
+          <a:effectRef idx="0">
+            <a:schemeClr val="accent1"/>
+          </a:effectRef>
+          <a:fontRef idx="minor">
+            <a:schemeClr val="tx1"/>
+          </a:fontRef>
+        </p:style>
+      </p:cxnSp>
+      <p:sp>
+        <p:nvSpPr>
+          <p:cNvPr id="205" name="TextBox 204">
+            <a:extLst>
+              <a:ext uri="{FF2B5EF4-FFF2-40B4-BE49-F238E27FC236}">
+                <a16:creationId xmlns:a16="http://schemas.microsoft.com/office/drawing/2014/main" id="{C0CC39B6-C3EE-47DA-9F9A-1EEBAE05B5CE}"/>
+              </a:ext>
+            </a:extLst>
+          </p:cNvPr>
+          <p:cNvSpPr txBox="1"/>
+          <p:nvPr/>
+        </p:nvSpPr>
+        <p:spPr>
+          <a:xfrm rot="18248554">
+            <a:off x="8535879" y="3739374"/>
+            <a:ext cx="1105365" cy="307777"/>
+          </a:xfrm>
+          <a:prstGeom prst="rect">
+            <a:avLst/>
+          </a:prstGeom>
+          <a:noFill/>
+        </p:spPr>
+        <p:txBody>
+          <a:bodyPr wrap="square" rtlCol="0">
+            <a:spAutoFit/>
+          </a:bodyPr>
+          <a:lstStyle/>
+          <a:p>
+            <a:r>
+              <a:rPr lang="en-US" sz="1400"/>
+              <a:t>weighted</a:t>
+            </a:r>
+          </a:p>
+        </p:txBody>
+      </p:sp>
+      <p:sp>
+        <p:nvSpPr>
+          <p:cNvPr id="206" name="TextBox 205">
+            <a:extLst>
+              <a:ext uri="{FF2B5EF4-FFF2-40B4-BE49-F238E27FC236}">
+                <a16:creationId xmlns:a16="http://schemas.microsoft.com/office/drawing/2014/main" id="{46C749A4-4309-42A0-AF37-F9FC34C0A7C7}"/>
+              </a:ext>
+            </a:extLst>
+          </p:cNvPr>
+          <p:cNvSpPr txBox="1"/>
+          <p:nvPr/>
+        </p:nvSpPr>
+        <p:spPr>
+          <a:xfrm>
+            <a:off x="7594590" y="5083279"/>
+            <a:ext cx="1971511" cy="600164"/>
+          </a:xfrm>
+          <a:prstGeom prst="rect">
+            <a:avLst/>
+          </a:prstGeom>
+          <a:noFill/>
+        </p:spPr>
+        <p:txBody>
+          <a:bodyPr wrap="square" rtlCol="0">
+            <a:spAutoFit/>
+          </a:bodyPr>
+          <a:lstStyle/>
+          <a:p>
+            <a:r>
+              <a:rPr lang="en-US" sz="1100" i="1"/>
+              <a:t>Freeze original, update new weights. Now inference is slower :D</a:t>
+            </a:r>
+            <a:endParaRPr lang="en-US" sz="1100" i="1">
+              <a:solidFill>
+                <a:srgbClr val="FF0000"/>
+              </a:solidFill>
+            </a:endParaRPr>
+          </a:p>
+        </p:txBody>
+      </p:sp>
+    </p:spTree>
+    <p:extLst>
+      <p:ext uri="{BB962C8B-B14F-4D97-AF65-F5344CB8AC3E}">
+        <p14:creationId xmlns:p14="http://schemas.microsoft.com/office/powerpoint/2010/main" val="1265498522"/>
+      </p:ext>
+    </p:extLst>
+  </p:cSld>
+  <p:clrMapOvr>
+    <a:masterClrMapping/>
+  </p:clrMapOvr>
+</p:sld>
+</file>
+
 <file path=ppt/theme/theme1.xml><?xml version="1.0" encoding="utf-8"?>
 <a:theme xmlns:a="http://schemas.openxmlformats.org/drawingml/2006/main" name="Office Theme">
   <a:themeElements>
